--- a/files/APCSA/Unit2.pptx
+++ b/files/APCSA/Unit2.pptx
@@ -5,7 +5,7 @@
     <p:sldMasterId id="2147483648" r:id="rId1"/>
   </p:sldMasterIdLst>
   <p:notesMasterIdLst>
-    <p:notesMasterId r:id="rId11"/>
+    <p:notesMasterId r:id="rId36"/>
   </p:notesMasterIdLst>
   <p:sldIdLst>
     <p:sldId id="256" r:id="rId2"/>
@@ -17,6 +17,31 @@
     <p:sldId id="263" r:id="rId8"/>
     <p:sldId id="264" r:id="rId9"/>
     <p:sldId id="265" r:id="rId10"/>
+    <p:sldId id="266" r:id="rId11"/>
+    <p:sldId id="267" r:id="rId12"/>
+    <p:sldId id="268" r:id="rId13"/>
+    <p:sldId id="269" r:id="rId14"/>
+    <p:sldId id="270" r:id="rId15"/>
+    <p:sldId id="271" r:id="rId16"/>
+    <p:sldId id="272" r:id="rId17"/>
+    <p:sldId id="273" r:id="rId18"/>
+    <p:sldId id="274" r:id="rId19"/>
+    <p:sldId id="275" r:id="rId20"/>
+    <p:sldId id="276" r:id="rId21"/>
+    <p:sldId id="277" r:id="rId22"/>
+    <p:sldId id="278" r:id="rId23"/>
+    <p:sldId id="279" r:id="rId24"/>
+    <p:sldId id="280" r:id="rId25"/>
+    <p:sldId id="281" r:id="rId26"/>
+    <p:sldId id="282" r:id="rId27"/>
+    <p:sldId id="283" r:id="rId28"/>
+    <p:sldId id="284" r:id="rId29"/>
+    <p:sldId id="285" r:id="rId30"/>
+    <p:sldId id="286" r:id="rId31"/>
+    <p:sldId id="287" r:id="rId32"/>
+    <p:sldId id="288" r:id="rId33"/>
+    <p:sldId id="289" r:id="rId34"/>
+    <p:sldId id="290" r:id="rId35"/>
   </p:sldIdLst>
   <p:sldSz cx="12192000" cy="6858000"/>
   <p:notesSz cx="6858000" cy="9144000"/>
@@ -205,7 +230,7 @@
           <a:p>
             <a:fld id="{6D4F71AE-FACE-4DB9-B871-AC14F33069FF}" type="datetimeFigureOut">
               <a:rPr lang="zh-CN" altLang="en-US" smtClean="0"/>
-              <a:t>2025/9/18</a:t>
+              <a:t>2025/10/10</a:t>
             </a:fld>
             <a:endParaRPr lang="zh-CN" altLang="en-US"/>
           </a:p>
@@ -749,6 +774,452 @@
 </p:notes>
 </file>
 
+<file path=ppt/notesSlides/notesSlide4.xml><?xml version="1.0" encoding="utf-8"?>
+<p:notes xmlns:a="http://schemas.openxmlformats.org/drawingml/2006/main" xmlns:r="http://schemas.openxmlformats.org/officeDocument/2006/relationships" xmlns:p="http://schemas.openxmlformats.org/presentationml/2006/main">
+  <p:cSld>
+    <p:spTree>
+      <p:nvGrpSpPr>
+        <p:cNvPr id="1" name=""/>
+        <p:cNvGrpSpPr/>
+        <p:nvPr/>
+      </p:nvGrpSpPr>
+      <p:grpSpPr>
+        <a:xfrm>
+          <a:off x="0" y="0"/>
+          <a:ext cx="0" cy="0"/>
+          <a:chOff x="0" y="0"/>
+          <a:chExt cx="0" cy="0"/>
+        </a:xfrm>
+      </p:grpSpPr>
+      <p:sp>
+        <p:nvSpPr>
+          <p:cNvPr id="2" name="Slide Image Placeholder 1"/>
+          <p:cNvSpPr>
+            <a:spLocks noGrp="1" noRot="1" noChangeAspect="1"/>
+          </p:cNvSpPr>
+          <p:nvPr>
+            <p:ph type="sldImg"/>
+          </p:nvPr>
+        </p:nvSpPr>
+        <p:spPr/>
+      </p:sp>
+      <p:sp>
+        <p:nvSpPr>
+          <p:cNvPr id="3" name="Notes Placeholder 2"/>
+          <p:cNvSpPr>
+            <a:spLocks noGrp="1"/>
+          </p:cNvSpPr>
+          <p:nvPr>
+            <p:ph type="body" idx="1"/>
+          </p:nvPr>
+        </p:nvSpPr>
+        <p:spPr/>
+        <p:txBody>
+          <a:bodyPr/>
+          <a:lstStyle/>
+          <a:p>
+            <a:r>
+              <a:rPr lang="en-US" altLang="zh-CN" dirty="0"/>
+              <a:t>2.7.4</a:t>
+            </a:r>
+            <a:endParaRPr lang="zh-CN" altLang="en-US" dirty="0"/>
+          </a:p>
+        </p:txBody>
+      </p:sp>
+      <p:sp>
+        <p:nvSpPr>
+          <p:cNvPr id="4" name="Slide Number Placeholder 3"/>
+          <p:cNvSpPr>
+            <a:spLocks noGrp="1"/>
+          </p:cNvSpPr>
+          <p:nvPr>
+            <p:ph type="sldNum" sz="quarter" idx="5"/>
+          </p:nvPr>
+        </p:nvSpPr>
+        <p:spPr/>
+        <p:txBody>
+          <a:bodyPr/>
+          <a:lstStyle/>
+          <a:p>
+            <a:fld id="{AED018F3-F7D3-4D26-8124-82D90CDA057F}" type="slidenum">
+              <a:rPr lang="zh-CN" altLang="en-US" smtClean="0"/>
+              <a:t>21</a:t>
+            </a:fld>
+            <a:endParaRPr lang="zh-CN" altLang="en-US"/>
+          </a:p>
+        </p:txBody>
+      </p:sp>
+    </p:spTree>
+    <p:extLst>
+      <p:ext uri="{BB962C8B-B14F-4D97-AF65-F5344CB8AC3E}">
+        <p14:creationId xmlns:p14="http://schemas.microsoft.com/office/powerpoint/2010/main" val="2145521467"/>
+      </p:ext>
+    </p:extLst>
+  </p:cSld>
+  <p:clrMapOvr>
+    <a:masterClrMapping/>
+  </p:clrMapOvr>
+</p:notes>
+</file>
+
+<file path=ppt/notesSlides/notesSlide5.xml><?xml version="1.0" encoding="utf-8"?>
+<p:notes xmlns:a="http://schemas.openxmlformats.org/drawingml/2006/main" xmlns:r="http://schemas.openxmlformats.org/officeDocument/2006/relationships" xmlns:p="http://schemas.openxmlformats.org/presentationml/2006/main">
+  <p:cSld>
+    <p:spTree>
+      <p:nvGrpSpPr>
+        <p:cNvPr id="1" name=""/>
+        <p:cNvGrpSpPr/>
+        <p:nvPr/>
+      </p:nvGrpSpPr>
+      <p:grpSpPr>
+        <a:xfrm>
+          <a:off x="0" y="0"/>
+          <a:ext cx="0" cy="0"/>
+          <a:chOff x="0" y="0"/>
+          <a:chExt cx="0" cy="0"/>
+        </a:xfrm>
+      </p:grpSpPr>
+      <p:sp>
+        <p:nvSpPr>
+          <p:cNvPr id="2" name="Slide Image Placeholder 1"/>
+          <p:cNvSpPr>
+            <a:spLocks noGrp="1" noRot="1" noChangeAspect="1"/>
+          </p:cNvSpPr>
+          <p:nvPr>
+            <p:ph type="sldImg"/>
+          </p:nvPr>
+        </p:nvSpPr>
+        <p:spPr/>
+      </p:sp>
+      <p:sp>
+        <p:nvSpPr>
+          <p:cNvPr id="3" name="Notes Placeholder 2"/>
+          <p:cNvSpPr>
+            <a:spLocks noGrp="1"/>
+          </p:cNvSpPr>
+          <p:nvPr>
+            <p:ph type="body" idx="1"/>
+          </p:nvPr>
+        </p:nvSpPr>
+        <p:spPr/>
+        <p:txBody>
+          <a:bodyPr/>
+          <a:lstStyle/>
+          <a:p>
+            <a:r>
+              <a:rPr lang="en-US" altLang="zh-CN" dirty="0"/>
+              <a:t>2.7.4</a:t>
+            </a:r>
+            <a:endParaRPr lang="zh-CN" altLang="en-US" dirty="0"/>
+          </a:p>
+        </p:txBody>
+      </p:sp>
+      <p:sp>
+        <p:nvSpPr>
+          <p:cNvPr id="4" name="Slide Number Placeholder 3"/>
+          <p:cNvSpPr>
+            <a:spLocks noGrp="1"/>
+          </p:cNvSpPr>
+          <p:nvPr>
+            <p:ph type="sldNum" sz="quarter" idx="5"/>
+          </p:nvPr>
+        </p:nvSpPr>
+        <p:spPr/>
+        <p:txBody>
+          <a:bodyPr/>
+          <a:lstStyle/>
+          <a:p>
+            <a:fld id="{AED018F3-F7D3-4D26-8124-82D90CDA057F}" type="slidenum">
+              <a:rPr lang="zh-CN" altLang="en-US" smtClean="0"/>
+              <a:t>22</a:t>
+            </a:fld>
+            <a:endParaRPr lang="zh-CN" altLang="en-US"/>
+          </a:p>
+        </p:txBody>
+      </p:sp>
+    </p:spTree>
+    <p:extLst>
+      <p:ext uri="{BB962C8B-B14F-4D97-AF65-F5344CB8AC3E}">
+        <p14:creationId xmlns:p14="http://schemas.microsoft.com/office/powerpoint/2010/main" val="3146334071"/>
+      </p:ext>
+    </p:extLst>
+  </p:cSld>
+  <p:clrMapOvr>
+    <a:masterClrMapping/>
+  </p:clrMapOvr>
+</p:notes>
+</file>
+
+<file path=ppt/notesSlides/notesSlide6.xml><?xml version="1.0" encoding="utf-8"?>
+<p:notes xmlns:a="http://schemas.openxmlformats.org/drawingml/2006/main" xmlns:r="http://schemas.openxmlformats.org/officeDocument/2006/relationships" xmlns:p="http://schemas.openxmlformats.org/presentationml/2006/main">
+  <p:cSld>
+    <p:spTree>
+      <p:nvGrpSpPr>
+        <p:cNvPr id="1" name=""/>
+        <p:cNvGrpSpPr/>
+        <p:nvPr/>
+      </p:nvGrpSpPr>
+      <p:grpSpPr>
+        <a:xfrm>
+          <a:off x="0" y="0"/>
+          <a:ext cx="0" cy="0"/>
+          <a:chOff x="0" y="0"/>
+          <a:chExt cx="0" cy="0"/>
+        </a:xfrm>
+      </p:grpSpPr>
+      <p:sp>
+        <p:nvSpPr>
+          <p:cNvPr id="2" name="Slide Image Placeholder 1"/>
+          <p:cNvSpPr>
+            <a:spLocks noGrp="1" noRot="1" noChangeAspect="1"/>
+          </p:cNvSpPr>
+          <p:nvPr>
+            <p:ph type="sldImg"/>
+          </p:nvPr>
+        </p:nvSpPr>
+        <p:spPr/>
+      </p:sp>
+      <p:sp>
+        <p:nvSpPr>
+          <p:cNvPr id="3" name="Notes Placeholder 2"/>
+          <p:cNvSpPr>
+            <a:spLocks noGrp="1"/>
+          </p:cNvSpPr>
+          <p:nvPr>
+            <p:ph type="body" idx="1"/>
+          </p:nvPr>
+        </p:nvSpPr>
+        <p:spPr/>
+        <p:txBody>
+          <a:bodyPr/>
+          <a:lstStyle/>
+          <a:p>
+            <a:r>
+              <a:rPr lang="en-US" altLang="zh-CN" dirty="0"/>
+              <a:t>-32</a:t>
+            </a:r>
+          </a:p>
+          <a:p>
+            <a:r>
+              <a:rPr lang="en-US" altLang="zh-CN" dirty="0"/>
+              <a:t>-2</a:t>
+            </a:r>
+          </a:p>
+          <a:p>
+            <a:endParaRPr lang="zh-CN" altLang="en-US" dirty="0"/>
+          </a:p>
+        </p:txBody>
+      </p:sp>
+      <p:sp>
+        <p:nvSpPr>
+          <p:cNvPr id="4" name="Slide Number Placeholder 3"/>
+          <p:cNvSpPr>
+            <a:spLocks noGrp="1"/>
+          </p:cNvSpPr>
+          <p:nvPr>
+            <p:ph type="sldNum" sz="quarter" idx="5"/>
+          </p:nvPr>
+        </p:nvSpPr>
+        <p:spPr/>
+        <p:txBody>
+          <a:bodyPr/>
+          <a:lstStyle/>
+          <a:p>
+            <a:fld id="{AED018F3-F7D3-4D26-8124-82D90CDA057F}" type="slidenum">
+              <a:rPr lang="zh-CN" altLang="en-US" smtClean="0"/>
+              <a:t>26</a:t>
+            </a:fld>
+            <a:endParaRPr lang="zh-CN" altLang="en-US"/>
+          </a:p>
+        </p:txBody>
+      </p:sp>
+    </p:spTree>
+    <p:extLst>
+      <p:ext uri="{BB962C8B-B14F-4D97-AF65-F5344CB8AC3E}">
+        <p14:creationId xmlns:p14="http://schemas.microsoft.com/office/powerpoint/2010/main" val="2782767303"/>
+      </p:ext>
+    </p:extLst>
+  </p:cSld>
+  <p:clrMapOvr>
+    <a:masterClrMapping/>
+  </p:clrMapOvr>
+</p:notes>
+</file>
+
+<file path=ppt/notesSlides/notesSlide7.xml><?xml version="1.0" encoding="utf-8"?>
+<p:notes xmlns:a="http://schemas.openxmlformats.org/drawingml/2006/main" xmlns:r="http://schemas.openxmlformats.org/officeDocument/2006/relationships" xmlns:p="http://schemas.openxmlformats.org/presentationml/2006/main">
+  <p:cSld>
+    <p:spTree>
+      <p:nvGrpSpPr>
+        <p:cNvPr id="1" name=""/>
+        <p:cNvGrpSpPr/>
+        <p:nvPr/>
+      </p:nvGrpSpPr>
+      <p:grpSpPr>
+        <a:xfrm>
+          <a:off x="0" y="0"/>
+          <a:ext cx="0" cy="0"/>
+          <a:chOff x="0" y="0"/>
+          <a:chExt cx="0" cy="0"/>
+        </a:xfrm>
+      </p:grpSpPr>
+      <p:sp>
+        <p:nvSpPr>
+          <p:cNvPr id="2" name="Slide Image Placeholder 1"/>
+          <p:cNvSpPr>
+            <a:spLocks noGrp="1" noRot="1" noChangeAspect="1"/>
+          </p:cNvSpPr>
+          <p:nvPr>
+            <p:ph type="sldImg"/>
+          </p:nvPr>
+        </p:nvSpPr>
+        <p:spPr/>
+      </p:sp>
+      <p:sp>
+        <p:nvSpPr>
+          <p:cNvPr id="3" name="Notes Placeholder 2"/>
+          <p:cNvSpPr>
+            <a:spLocks noGrp="1"/>
+          </p:cNvSpPr>
+          <p:nvPr>
+            <p:ph type="body" idx="1"/>
+          </p:nvPr>
+        </p:nvSpPr>
+        <p:spPr/>
+        <p:txBody>
+          <a:bodyPr/>
+          <a:lstStyle/>
+          <a:p>
+            <a:r>
+              <a:rPr lang="en-US" altLang="zh-CN" dirty="0"/>
+              <a:t>2.8.6 show import scanner</a:t>
+            </a:r>
+          </a:p>
+          <a:p>
+            <a:endParaRPr lang="zh-CN" altLang="en-US" dirty="0"/>
+          </a:p>
+        </p:txBody>
+      </p:sp>
+      <p:sp>
+        <p:nvSpPr>
+          <p:cNvPr id="4" name="Slide Number Placeholder 3"/>
+          <p:cNvSpPr>
+            <a:spLocks noGrp="1"/>
+          </p:cNvSpPr>
+          <p:nvPr>
+            <p:ph type="sldNum" sz="quarter" idx="5"/>
+          </p:nvPr>
+        </p:nvSpPr>
+        <p:spPr/>
+        <p:txBody>
+          <a:bodyPr/>
+          <a:lstStyle/>
+          <a:p>
+            <a:fld id="{AED018F3-F7D3-4D26-8124-82D90CDA057F}" type="slidenum">
+              <a:rPr lang="zh-CN" altLang="en-US" smtClean="0"/>
+              <a:t>27</a:t>
+            </a:fld>
+            <a:endParaRPr lang="zh-CN" altLang="en-US"/>
+          </a:p>
+        </p:txBody>
+      </p:sp>
+    </p:spTree>
+    <p:extLst>
+      <p:ext uri="{BB962C8B-B14F-4D97-AF65-F5344CB8AC3E}">
+        <p14:creationId xmlns:p14="http://schemas.microsoft.com/office/powerpoint/2010/main" val="2066714894"/>
+      </p:ext>
+    </p:extLst>
+  </p:cSld>
+  <p:clrMapOvr>
+    <a:masterClrMapping/>
+  </p:clrMapOvr>
+</p:notes>
+</file>
+
+<file path=ppt/notesSlides/notesSlide8.xml><?xml version="1.0" encoding="utf-8"?>
+<p:notes xmlns:a="http://schemas.openxmlformats.org/drawingml/2006/main" xmlns:r="http://schemas.openxmlformats.org/officeDocument/2006/relationships" xmlns:p="http://schemas.openxmlformats.org/presentationml/2006/main">
+  <p:cSld>
+    <p:spTree>
+      <p:nvGrpSpPr>
+        <p:cNvPr id="1" name=""/>
+        <p:cNvGrpSpPr/>
+        <p:nvPr/>
+      </p:nvGrpSpPr>
+      <p:grpSpPr>
+        <a:xfrm>
+          <a:off x="0" y="0"/>
+          <a:ext cx="0" cy="0"/>
+          <a:chOff x="0" y="0"/>
+          <a:chExt cx="0" cy="0"/>
+        </a:xfrm>
+      </p:grpSpPr>
+      <p:sp>
+        <p:nvSpPr>
+          <p:cNvPr id="2" name="Slide Image Placeholder 1"/>
+          <p:cNvSpPr>
+            <a:spLocks noGrp="1" noRot="1" noChangeAspect="1"/>
+          </p:cNvSpPr>
+          <p:nvPr>
+            <p:ph type="sldImg"/>
+          </p:nvPr>
+        </p:nvSpPr>
+        <p:spPr/>
+      </p:sp>
+      <p:sp>
+        <p:nvSpPr>
+          <p:cNvPr id="3" name="Notes Placeholder 2"/>
+          <p:cNvSpPr>
+            <a:spLocks noGrp="1"/>
+          </p:cNvSpPr>
+          <p:nvPr>
+            <p:ph type="body" idx="1"/>
+          </p:nvPr>
+        </p:nvSpPr>
+        <p:spPr/>
+        <p:txBody>
+          <a:bodyPr/>
+          <a:lstStyle/>
+          <a:p>
+            <a:endParaRPr lang="zh-CN" altLang="en-US" dirty="0"/>
+          </a:p>
+        </p:txBody>
+      </p:sp>
+      <p:sp>
+        <p:nvSpPr>
+          <p:cNvPr id="4" name="Slide Number Placeholder 3"/>
+          <p:cNvSpPr>
+            <a:spLocks noGrp="1"/>
+          </p:cNvSpPr>
+          <p:nvPr>
+            <p:ph type="sldNum" sz="quarter" idx="5"/>
+          </p:nvPr>
+        </p:nvSpPr>
+        <p:spPr/>
+        <p:txBody>
+          <a:bodyPr/>
+          <a:lstStyle/>
+          <a:p>
+            <a:fld id="{AED018F3-F7D3-4D26-8124-82D90CDA057F}" type="slidenum">
+              <a:rPr lang="zh-CN" altLang="en-US" smtClean="0"/>
+              <a:t>34</a:t>
+            </a:fld>
+            <a:endParaRPr lang="zh-CN" altLang="en-US"/>
+          </a:p>
+        </p:txBody>
+      </p:sp>
+    </p:spTree>
+    <p:extLst>
+      <p:ext uri="{BB962C8B-B14F-4D97-AF65-F5344CB8AC3E}">
+        <p14:creationId xmlns:p14="http://schemas.microsoft.com/office/powerpoint/2010/main" val="884190390"/>
+      </p:ext>
+    </p:extLst>
+  </p:cSld>
+  <p:clrMapOvr>
+    <a:masterClrMapping/>
+  </p:clrMapOvr>
+</p:notes>
+</file>
+
 <file path=ppt/slideLayouts/slideLayout1.xml><?xml version="1.0" encoding="utf-8"?>
 <p:sldLayout xmlns:a="http://schemas.openxmlformats.org/drawingml/2006/main" xmlns:r="http://schemas.openxmlformats.org/officeDocument/2006/relationships" xmlns:p="http://schemas.openxmlformats.org/presentationml/2006/main" type="title" preserve="1">
   <p:cSld name="Title Slide">
@@ -898,7 +1369,7 @@
           <a:p>
             <a:fld id="{4122E7CC-E1EA-4EDB-A11B-9EBE68CA3B7D}" type="datetimeFigureOut">
               <a:rPr lang="zh-CN" altLang="en-US" smtClean="0"/>
-              <a:t>2025/9/18</a:t>
+              <a:t>2025/10/10</a:t>
             </a:fld>
             <a:endParaRPr lang="zh-CN" altLang="en-US"/>
           </a:p>
@@ -1098,7 +1569,7 @@
           <a:p>
             <a:fld id="{4122E7CC-E1EA-4EDB-A11B-9EBE68CA3B7D}" type="datetimeFigureOut">
               <a:rPr lang="zh-CN" altLang="en-US" smtClean="0"/>
-              <a:t>2025/9/18</a:t>
+              <a:t>2025/10/10</a:t>
             </a:fld>
             <a:endParaRPr lang="zh-CN" altLang="en-US"/>
           </a:p>
@@ -1308,7 +1779,7 @@
           <a:p>
             <a:fld id="{4122E7CC-E1EA-4EDB-A11B-9EBE68CA3B7D}" type="datetimeFigureOut">
               <a:rPr lang="zh-CN" altLang="en-US" smtClean="0"/>
-              <a:t>2025/9/18</a:t>
+              <a:t>2025/10/10</a:t>
             </a:fld>
             <a:endParaRPr lang="zh-CN" altLang="en-US"/>
           </a:p>
@@ -1508,7 +1979,7 @@
           <a:p>
             <a:fld id="{4122E7CC-E1EA-4EDB-A11B-9EBE68CA3B7D}" type="datetimeFigureOut">
               <a:rPr lang="zh-CN" altLang="en-US" smtClean="0"/>
-              <a:t>2025/9/18</a:t>
+              <a:t>2025/10/10</a:t>
             </a:fld>
             <a:endParaRPr lang="zh-CN" altLang="en-US"/>
           </a:p>
@@ -1784,7 +2255,7 @@
           <a:p>
             <a:fld id="{4122E7CC-E1EA-4EDB-A11B-9EBE68CA3B7D}" type="datetimeFigureOut">
               <a:rPr lang="zh-CN" altLang="en-US" smtClean="0"/>
-              <a:t>2025/9/18</a:t>
+              <a:t>2025/10/10</a:t>
             </a:fld>
             <a:endParaRPr lang="zh-CN" altLang="en-US"/>
           </a:p>
@@ -2052,7 +2523,7 @@
           <a:p>
             <a:fld id="{4122E7CC-E1EA-4EDB-A11B-9EBE68CA3B7D}" type="datetimeFigureOut">
               <a:rPr lang="zh-CN" altLang="en-US" smtClean="0"/>
-              <a:t>2025/9/18</a:t>
+              <a:t>2025/10/10</a:t>
             </a:fld>
             <a:endParaRPr lang="zh-CN" altLang="en-US"/>
           </a:p>
@@ -2467,7 +2938,7 @@
           <a:p>
             <a:fld id="{4122E7CC-E1EA-4EDB-A11B-9EBE68CA3B7D}" type="datetimeFigureOut">
               <a:rPr lang="zh-CN" altLang="en-US" smtClean="0"/>
-              <a:t>2025/9/18</a:t>
+              <a:t>2025/10/10</a:t>
             </a:fld>
             <a:endParaRPr lang="zh-CN" altLang="en-US"/>
           </a:p>
@@ -2609,7 +3080,7 @@
           <a:p>
             <a:fld id="{4122E7CC-E1EA-4EDB-A11B-9EBE68CA3B7D}" type="datetimeFigureOut">
               <a:rPr lang="zh-CN" altLang="en-US" smtClean="0"/>
-              <a:t>2025/9/18</a:t>
+              <a:t>2025/10/10</a:t>
             </a:fld>
             <a:endParaRPr lang="zh-CN" altLang="en-US"/>
           </a:p>
@@ -2722,7 +3193,7 @@
           <a:p>
             <a:fld id="{4122E7CC-E1EA-4EDB-A11B-9EBE68CA3B7D}" type="datetimeFigureOut">
               <a:rPr lang="zh-CN" altLang="en-US" smtClean="0"/>
-              <a:t>2025/9/18</a:t>
+              <a:t>2025/10/10</a:t>
             </a:fld>
             <a:endParaRPr lang="zh-CN" altLang="en-US"/>
           </a:p>
@@ -3035,7 +3506,7 @@
           <a:p>
             <a:fld id="{4122E7CC-E1EA-4EDB-A11B-9EBE68CA3B7D}" type="datetimeFigureOut">
               <a:rPr lang="zh-CN" altLang="en-US" smtClean="0"/>
-              <a:t>2025/9/18</a:t>
+              <a:t>2025/10/10</a:t>
             </a:fld>
             <a:endParaRPr lang="zh-CN" altLang="en-US"/>
           </a:p>
@@ -3324,7 +3795,7 @@
           <a:p>
             <a:fld id="{4122E7CC-E1EA-4EDB-A11B-9EBE68CA3B7D}" type="datetimeFigureOut">
               <a:rPr lang="zh-CN" altLang="en-US" smtClean="0"/>
-              <a:t>2025/9/18</a:t>
+              <a:t>2025/10/10</a:t>
             </a:fld>
             <a:endParaRPr lang="zh-CN" altLang="en-US"/>
           </a:p>
@@ -3567,7 +4038,7 @@
           <a:p>
             <a:fld id="{4122E7CC-E1EA-4EDB-A11B-9EBE68CA3B7D}" type="datetimeFigureOut">
               <a:rPr lang="zh-CN" altLang="en-US" smtClean="0"/>
-              <a:t>2025/9/18</a:t>
+              <a:t>2025/10/10</a:t>
             </a:fld>
             <a:endParaRPr lang="zh-CN" altLang="en-US"/>
           </a:p>
@@ -4047,6 +4518,1867 @@
 </p:sld>
 </file>
 
+<file path=ppt/slides/slide10.xml><?xml version="1.0" encoding="utf-8"?>
+<p:sld xmlns:a="http://schemas.openxmlformats.org/drawingml/2006/main" xmlns:r="http://schemas.openxmlformats.org/officeDocument/2006/relationships" xmlns:p="http://schemas.openxmlformats.org/presentationml/2006/main">
+  <p:cSld>
+    <p:spTree>
+      <p:nvGrpSpPr>
+        <p:cNvPr id="1" name=""/>
+        <p:cNvGrpSpPr/>
+        <p:nvPr/>
+      </p:nvGrpSpPr>
+      <p:grpSpPr>
+        <a:xfrm>
+          <a:off x="0" y="0"/>
+          <a:ext cx="0" cy="0"/>
+          <a:chOff x="0" y="0"/>
+          <a:chExt cx="0" cy="0"/>
+        </a:xfrm>
+      </p:grpSpPr>
+      <p:sp>
+        <p:nvSpPr>
+          <p:cNvPr id="2" name="Title 1">
+            <a:extLst>
+              <a:ext uri="{FF2B5EF4-FFF2-40B4-BE49-F238E27FC236}">
+                <a16:creationId xmlns:a16="http://schemas.microsoft.com/office/drawing/2014/main" id="{D77F4DF2-77A5-C64E-EEE6-6F5C79CADA1D}"/>
+              </a:ext>
+            </a:extLst>
+          </p:cNvPr>
+          <p:cNvSpPr>
+            <a:spLocks noGrp="1"/>
+          </p:cNvSpPr>
+          <p:nvPr>
+            <p:ph type="title"/>
+          </p:nvPr>
+        </p:nvSpPr>
+        <p:spPr/>
+        <p:txBody>
+          <a:bodyPr/>
+          <a:lstStyle/>
+          <a:p>
+            <a:r>
+              <a:rPr lang="en-US" altLang="zh-CN" dirty="0"/>
+              <a:t>2.4 Calling a void method</a:t>
+            </a:r>
+            <a:endParaRPr lang="zh-CN" altLang="en-US" dirty="0"/>
+          </a:p>
+        </p:txBody>
+      </p:sp>
+      <p:sp>
+        <p:nvSpPr>
+          <p:cNvPr id="3" name="Content Placeholder 2">
+            <a:extLst>
+              <a:ext uri="{FF2B5EF4-FFF2-40B4-BE49-F238E27FC236}">
+                <a16:creationId xmlns:a16="http://schemas.microsoft.com/office/drawing/2014/main" id="{E6D0FD27-6338-EC47-C01B-E0C4B1CFD6F5}"/>
+              </a:ext>
+            </a:extLst>
+          </p:cNvPr>
+          <p:cNvSpPr>
+            <a:spLocks noGrp="1"/>
+          </p:cNvSpPr>
+          <p:nvPr>
+            <p:ph idx="1"/>
+          </p:nvPr>
+        </p:nvSpPr>
+        <p:spPr/>
+        <p:txBody>
+          <a:bodyPr/>
+          <a:lstStyle/>
+          <a:p>
+            <a:r>
+              <a:rPr lang="en-US" altLang="zh-CN" dirty="0"/>
+              <a:t>A class consists of:</a:t>
+            </a:r>
+          </a:p>
+          <a:p>
+            <a:pPr lvl="1"/>
+            <a:r>
+              <a:rPr lang="en-US" altLang="zh-CN" dirty="0"/>
+              <a:t>State (Instance Variables)</a:t>
+            </a:r>
+          </a:p>
+          <a:p>
+            <a:pPr lvl="1"/>
+            <a:r>
+              <a:rPr lang="en-US" altLang="zh-CN" dirty="0"/>
+              <a:t>Constructor (Initialize state value)</a:t>
+            </a:r>
+          </a:p>
+          <a:p>
+            <a:pPr lvl="1"/>
+            <a:r>
+              <a:rPr lang="en-US" altLang="zh-CN" dirty="0"/>
+              <a:t>Behavior (methods)</a:t>
+            </a:r>
+            <a:endParaRPr lang="zh-CN" altLang="en-US" dirty="0"/>
+          </a:p>
+          <a:p>
+            <a:endParaRPr lang="zh-CN" altLang="en-US" dirty="0"/>
+          </a:p>
+        </p:txBody>
+      </p:sp>
+      <p:pic>
+        <p:nvPicPr>
+          <p:cNvPr id="4" name="Picture 3">
+            <a:extLst>
+              <a:ext uri="{FF2B5EF4-FFF2-40B4-BE49-F238E27FC236}">
+                <a16:creationId xmlns:a16="http://schemas.microsoft.com/office/drawing/2014/main" id="{4AD1128A-2128-63F8-C23A-287CB99948EB}"/>
+              </a:ext>
+            </a:extLst>
+          </p:cNvPr>
+          <p:cNvPicPr>
+            <a:picLocks noChangeAspect="1"/>
+          </p:cNvPicPr>
+          <p:nvPr/>
+        </p:nvPicPr>
+        <p:blipFill>
+          <a:blip r:embed="rId2">
+            <a:extLst>
+              <a:ext uri="{28A0092B-C50C-407E-A947-70E740481C1C}">
+                <a14:useLocalDpi xmlns:a14="http://schemas.microsoft.com/office/drawing/2010/main" val="0"/>
+              </a:ext>
+            </a:extLst>
+          </a:blip>
+          <a:stretch>
+            <a:fillRect/>
+          </a:stretch>
+        </p:blipFill>
+        <p:spPr>
+          <a:xfrm>
+            <a:off x="6248400" y="2231012"/>
+            <a:ext cx="5763811" cy="4403966"/>
+          </a:xfrm>
+          <a:prstGeom prst="rect">
+            <a:avLst/>
+          </a:prstGeom>
+        </p:spPr>
+      </p:pic>
+    </p:spTree>
+    <p:extLst>
+      <p:ext uri="{BB962C8B-B14F-4D97-AF65-F5344CB8AC3E}">
+        <p14:creationId xmlns:p14="http://schemas.microsoft.com/office/powerpoint/2010/main" val="2741685806"/>
+      </p:ext>
+    </p:extLst>
+  </p:cSld>
+  <p:clrMapOvr>
+    <a:masterClrMapping/>
+  </p:clrMapOvr>
+</p:sld>
+</file>
+
+<file path=ppt/slides/slide11.xml><?xml version="1.0" encoding="utf-8"?>
+<p:sld xmlns:a="http://schemas.openxmlformats.org/drawingml/2006/main" xmlns:r="http://schemas.openxmlformats.org/officeDocument/2006/relationships" xmlns:p="http://schemas.openxmlformats.org/presentationml/2006/main">
+  <p:cSld>
+    <p:spTree>
+      <p:nvGrpSpPr>
+        <p:cNvPr id="1" name=""/>
+        <p:cNvGrpSpPr/>
+        <p:nvPr/>
+      </p:nvGrpSpPr>
+      <p:grpSpPr>
+        <a:xfrm>
+          <a:off x="0" y="0"/>
+          <a:ext cx="0" cy="0"/>
+          <a:chOff x="0" y="0"/>
+          <a:chExt cx="0" cy="0"/>
+        </a:xfrm>
+      </p:grpSpPr>
+      <p:sp>
+        <p:nvSpPr>
+          <p:cNvPr id="2" name="Title 1">
+            <a:extLst>
+              <a:ext uri="{FF2B5EF4-FFF2-40B4-BE49-F238E27FC236}">
+                <a16:creationId xmlns:a16="http://schemas.microsoft.com/office/drawing/2014/main" id="{84F5AB09-7CB0-D553-4E35-109836D92044}"/>
+              </a:ext>
+            </a:extLst>
+          </p:cNvPr>
+          <p:cNvSpPr>
+            <a:spLocks noGrp="1"/>
+          </p:cNvSpPr>
+          <p:nvPr>
+            <p:ph type="title"/>
+          </p:nvPr>
+        </p:nvSpPr>
+        <p:spPr/>
+        <p:txBody>
+          <a:bodyPr/>
+          <a:lstStyle/>
+          <a:p>
+            <a:r>
+              <a:rPr lang="en-US" altLang="zh-CN" dirty="0"/>
+              <a:t>How to write a method</a:t>
+            </a:r>
+            <a:endParaRPr lang="zh-CN" altLang="en-US" dirty="0"/>
+          </a:p>
+        </p:txBody>
+      </p:sp>
+      <p:pic>
+        <p:nvPicPr>
+          <p:cNvPr id="6" name="Content Placeholder 5">
+            <a:extLst>
+              <a:ext uri="{FF2B5EF4-FFF2-40B4-BE49-F238E27FC236}">
+                <a16:creationId xmlns:a16="http://schemas.microsoft.com/office/drawing/2014/main" id="{B0E4A17A-7132-523E-899F-44CECE6F2F67}"/>
+              </a:ext>
+            </a:extLst>
+          </p:cNvPr>
+          <p:cNvPicPr>
+            <a:picLocks noGrp="1" noChangeAspect="1"/>
+          </p:cNvPicPr>
+          <p:nvPr>
+            <p:ph idx="1"/>
+          </p:nvPr>
+        </p:nvPicPr>
+        <p:blipFill>
+          <a:blip r:embed="rId2"/>
+          <a:stretch>
+            <a:fillRect/>
+          </a:stretch>
+        </p:blipFill>
+        <p:spPr>
+          <a:xfrm>
+            <a:off x="1542896" y="2556010"/>
+            <a:ext cx="8843402" cy="1325563"/>
+          </a:xfrm>
+          <a:prstGeom prst="rect">
+            <a:avLst/>
+          </a:prstGeom>
+        </p:spPr>
+      </p:pic>
+    </p:spTree>
+    <p:extLst>
+      <p:ext uri="{BB962C8B-B14F-4D97-AF65-F5344CB8AC3E}">
+        <p14:creationId xmlns:p14="http://schemas.microsoft.com/office/powerpoint/2010/main" val="4293513957"/>
+      </p:ext>
+    </p:extLst>
+  </p:cSld>
+  <p:clrMapOvr>
+    <a:masterClrMapping/>
+  </p:clrMapOvr>
+</p:sld>
+</file>
+
+<file path=ppt/slides/slide12.xml><?xml version="1.0" encoding="utf-8"?>
+<p:sld xmlns:a="http://schemas.openxmlformats.org/drawingml/2006/main" xmlns:r="http://schemas.openxmlformats.org/officeDocument/2006/relationships" xmlns:p="http://schemas.openxmlformats.org/presentationml/2006/main">
+  <p:cSld>
+    <p:spTree>
+      <p:nvGrpSpPr>
+        <p:cNvPr id="1" name=""/>
+        <p:cNvGrpSpPr/>
+        <p:nvPr/>
+      </p:nvGrpSpPr>
+      <p:grpSpPr>
+        <a:xfrm>
+          <a:off x="0" y="0"/>
+          <a:ext cx="0" cy="0"/>
+          <a:chOff x="0" y="0"/>
+          <a:chExt cx="0" cy="0"/>
+        </a:xfrm>
+      </p:grpSpPr>
+      <p:sp>
+        <p:nvSpPr>
+          <p:cNvPr id="2" name="Title 1">
+            <a:extLst>
+              <a:ext uri="{FF2B5EF4-FFF2-40B4-BE49-F238E27FC236}">
+                <a16:creationId xmlns:a16="http://schemas.microsoft.com/office/drawing/2014/main" id="{1A9B3C6D-9E4C-A5C9-C694-97AA953870B8}"/>
+              </a:ext>
+            </a:extLst>
+          </p:cNvPr>
+          <p:cNvSpPr>
+            <a:spLocks noGrp="1"/>
+          </p:cNvSpPr>
+          <p:nvPr>
+            <p:ph type="title"/>
+          </p:nvPr>
+        </p:nvSpPr>
+        <p:spPr/>
+        <p:txBody>
+          <a:bodyPr/>
+          <a:lstStyle/>
+          <a:p>
+            <a:r>
+              <a:rPr lang="en-US" altLang="zh-CN" dirty="0"/>
+              <a:t>How to call a method</a:t>
+            </a:r>
+            <a:endParaRPr lang="zh-CN" altLang="en-US" dirty="0"/>
+          </a:p>
+        </p:txBody>
+      </p:sp>
+      <p:sp>
+        <p:nvSpPr>
+          <p:cNvPr id="3" name="Content Placeholder 2">
+            <a:extLst>
+              <a:ext uri="{FF2B5EF4-FFF2-40B4-BE49-F238E27FC236}">
+                <a16:creationId xmlns:a16="http://schemas.microsoft.com/office/drawing/2014/main" id="{6D8DEF62-CE7A-5D83-5160-49190CC87831}"/>
+              </a:ext>
+            </a:extLst>
+          </p:cNvPr>
+          <p:cNvSpPr>
+            <a:spLocks noGrp="1"/>
+          </p:cNvSpPr>
+          <p:nvPr>
+            <p:ph idx="1"/>
+          </p:nvPr>
+        </p:nvSpPr>
+        <p:spPr/>
+        <p:txBody>
+          <a:bodyPr/>
+          <a:lstStyle/>
+          <a:p>
+            <a:r>
+              <a:rPr lang="en-US" altLang="zh-CN" dirty="0"/>
+              <a:t>Call methods using </a:t>
+            </a:r>
+            <a:r>
+              <a:rPr lang="en-US" altLang="zh-CN" dirty="0" err="1"/>
+              <a:t>objectName.methodName</a:t>
+            </a:r>
+            <a:r>
+              <a:rPr lang="en-US" altLang="zh-CN" dirty="0"/>
+              <a:t>()</a:t>
+            </a:r>
+          </a:p>
+          <a:p>
+            <a:r>
+              <a:rPr lang="en-US" altLang="zh-CN" dirty="0"/>
+              <a:t>Ex: Rectangle r1 = new Rectangle(10, 2);</a:t>
+            </a:r>
+          </a:p>
+          <a:p>
+            <a:pPr marL="0" indent="0">
+              <a:buNone/>
+            </a:pPr>
+            <a:r>
+              <a:rPr lang="en-US" altLang="zh-CN" dirty="0"/>
+              <a:t>        r1.printArea();	</a:t>
+            </a:r>
+            <a:endParaRPr lang="zh-CN" altLang="en-US" dirty="0"/>
+          </a:p>
+        </p:txBody>
+      </p:sp>
+    </p:spTree>
+    <p:extLst>
+      <p:ext uri="{BB962C8B-B14F-4D97-AF65-F5344CB8AC3E}">
+        <p14:creationId xmlns:p14="http://schemas.microsoft.com/office/powerpoint/2010/main" val="4236123233"/>
+      </p:ext>
+    </p:extLst>
+  </p:cSld>
+  <p:clrMapOvr>
+    <a:masterClrMapping/>
+  </p:clrMapOvr>
+</p:sld>
+</file>
+
+<file path=ppt/slides/slide13.xml><?xml version="1.0" encoding="utf-8"?>
+<p:sld xmlns:a="http://schemas.openxmlformats.org/drawingml/2006/main" xmlns:r="http://schemas.openxmlformats.org/officeDocument/2006/relationships" xmlns:p="http://schemas.openxmlformats.org/presentationml/2006/main">
+  <p:cSld>
+    <p:spTree>
+      <p:nvGrpSpPr>
+        <p:cNvPr id="1" name=""/>
+        <p:cNvGrpSpPr/>
+        <p:nvPr/>
+      </p:nvGrpSpPr>
+      <p:grpSpPr>
+        <a:xfrm>
+          <a:off x="0" y="0"/>
+          <a:ext cx="0" cy="0"/>
+          <a:chOff x="0" y="0"/>
+          <a:chExt cx="0" cy="0"/>
+        </a:xfrm>
+      </p:grpSpPr>
+      <p:sp>
+        <p:nvSpPr>
+          <p:cNvPr id="2" name="Title 1">
+            <a:extLst>
+              <a:ext uri="{FF2B5EF4-FFF2-40B4-BE49-F238E27FC236}">
+                <a16:creationId xmlns:a16="http://schemas.microsoft.com/office/drawing/2014/main" id="{5A85F614-12A2-DB26-7171-848947EE3B97}"/>
+              </a:ext>
+            </a:extLst>
+          </p:cNvPr>
+          <p:cNvSpPr>
+            <a:spLocks noGrp="1"/>
+          </p:cNvSpPr>
+          <p:nvPr>
+            <p:ph type="title"/>
+          </p:nvPr>
+        </p:nvSpPr>
+        <p:spPr/>
+        <p:txBody>
+          <a:bodyPr/>
+          <a:lstStyle/>
+          <a:p>
+            <a:r>
+              <a:rPr lang="en-US" altLang="zh-CN" dirty="0"/>
+              <a:t>2.5 Calling a void method with parameter</a:t>
+            </a:r>
+            <a:endParaRPr lang="zh-CN" altLang="en-US" dirty="0"/>
+          </a:p>
+        </p:txBody>
+      </p:sp>
+      <p:pic>
+        <p:nvPicPr>
+          <p:cNvPr id="6" name="Content Placeholder 5" descr="A black text on a white background&#10;&#10;AI-generated content may be incorrect.">
+            <a:extLst>
+              <a:ext uri="{FF2B5EF4-FFF2-40B4-BE49-F238E27FC236}">
+                <a16:creationId xmlns:a16="http://schemas.microsoft.com/office/drawing/2014/main" id="{DB8F0CAD-8AD7-6E43-7DB7-75F16E3EA6A9}"/>
+              </a:ext>
+            </a:extLst>
+          </p:cNvPr>
+          <p:cNvPicPr>
+            <a:picLocks noGrp="1" noChangeAspect="1"/>
+          </p:cNvPicPr>
+          <p:nvPr>
+            <p:ph idx="1"/>
+          </p:nvPr>
+        </p:nvPicPr>
+        <p:blipFill>
+          <a:blip r:embed="rId2">
+            <a:extLst>
+              <a:ext uri="{28A0092B-C50C-407E-A947-70E740481C1C}">
+                <a14:useLocalDpi xmlns:a14="http://schemas.microsoft.com/office/drawing/2010/main" val="0"/>
+              </a:ext>
+            </a:extLst>
+          </a:blip>
+          <a:stretch>
+            <a:fillRect/>
+          </a:stretch>
+        </p:blipFill>
+        <p:spPr>
+          <a:xfrm>
+            <a:off x="1278998" y="3178968"/>
+            <a:ext cx="9634003" cy="1325563"/>
+          </a:xfrm>
+        </p:spPr>
+      </p:pic>
+      <p:pic>
+        <p:nvPicPr>
+          <p:cNvPr id="4" name="Content Placeholder 5">
+            <a:extLst>
+              <a:ext uri="{FF2B5EF4-FFF2-40B4-BE49-F238E27FC236}">
+                <a16:creationId xmlns:a16="http://schemas.microsoft.com/office/drawing/2014/main" id="{BB422032-A854-A577-BA68-203140F75B7E}"/>
+              </a:ext>
+            </a:extLst>
+          </p:cNvPr>
+          <p:cNvPicPr>
+            <a:picLocks noChangeAspect="1"/>
+          </p:cNvPicPr>
+          <p:nvPr/>
+        </p:nvPicPr>
+        <p:blipFill>
+          <a:blip r:embed="rId3"/>
+          <a:stretch>
+            <a:fillRect/>
+          </a:stretch>
+        </p:blipFill>
+        <p:spPr>
+          <a:xfrm>
+            <a:off x="984096" y="2330768"/>
+            <a:ext cx="8843402" cy="1325563"/>
+          </a:xfrm>
+          <a:prstGeom prst="rect">
+            <a:avLst/>
+          </a:prstGeom>
+        </p:spPr>
+      </p:pic>
+    </p:spTree>
+    <p:extLst>
+      <p:ext uri="{BB962C8B-B14F-4D97-AF65-F5344CB8AC3E}">
+        <p14:creationId xmlns:p14="http://schemas.microsoft.com/office/powerpoint/2010/main" val="2963396279"/>
+      </p:ext>
+    </p:extLst>
+  </p:cSld>
+  <p:clrMapOvr>
+    <a:masterClrMapping/>
+  </p:clrMapOvr>
+</p:sld>
+</file>
+
+<file path=ppt/slides/slide14.xml><?xml version="1.0" encoding="utf-8"?>
+<p:sld xmlns:a="http://schemas.openxmlformats.org/drawingml/2006/main" xmlns:r="http://schemas.openxmlformats.org/officeDocument/2006/relationships" xmlns:p="http://schemas.openxmlformats.org/presentationml/2006/main">
+  <p:cSld>
+    <p:spTree>
+      <p:nvGrpSpPr>
+        <p:cNvPr id="1" name=""/>
+        <p:cNvGrpSpPr/>
+        <p:nvPr/>
+      </p:nvGrpSpPr>
+      <p:grpSpPr>
+        <a:xfrm>
+          <a:off x="0" y="0"/>
+          <a:ext cx="0" cy="0"/>
+          <a:chOff x="0" y="0"/>
+          <a:chExt cx="0" cy="0"/>
+        </a:xfrm>
+      </p:grpSpPr>
+      <p:sp>
+        <p:nvSpPr>
+          <p:cNvPr id="2" name="Title 1">
+            <a:extLst>
+              <a:ext uri="{FF2B5EF4-FFF2-40B4-BE49-F238E27FC236}">
+                <a16:creationId xmlns:a16="http://schemas.microsoft.com/office/drawing/2014/main" id="{A9905501-1841-5E28-9D16-9C35C012E7D1}"/>
+              </a:ext>
+            </a:extLst>
+          </p:cNvPr>
+          <p:cNvSpPr>
+            <a:spLocks noGrp="1"/>
+          </p:cNvSpPr>
+          <p:nvPr>
+            <p:ph type="title"/>
+          </p:nvPr>
+        </p:nvSpPr>
+        <p:spPr/>
+        <p:txBody>
+          <a:bodyPr/>
+          <a:lstStyle/>
+          <a:p>
+            <a:r>
+              <a:rPr lang="en-US" altLang="zh-CN" dirty="0"/>
+              <a:t>You can also overload method</a:t>
+            </a:r>
+            <a:endParaRPr lang="zh-CN" altLang="en-US" dirty="0"/>
+          </a:p>
+        </p:txBody>
+      </p:sp>
+      <p:sp>
+        <p:nvSpPr>
+          <p:cNvPr id="3" name="Content Placeholder 2">
+            <a:extLst>
+              <a:ext uri="{FF2B5EF4-FFF2-40B4-BE49-F238E27FC236}">
+                <a16:creationId xmlns:a16="http://schemas.microsoft.com/office/drawing/2014/main" id="{2D63A08B-12B7-B46D-80A9-23F42028C928}"/>
+              </a:ext>
+            </a:extLst>
+          </p:cNvPr>
+          <p:cNvSpPr>
+            <a:spLocks noGrp="1"/>
+          </p:cNvSpPr>
+          <p:nvPr>
+            <p:ph idx="1"/>
+          </p:nvPr>
+        </p:nvSpPr>
+        <p:spPr/>
+        <p:txBody>
+          <a:bodyPr/>
+          <a:lstStyle/>
+          <a:p>
+            <a:r>
+              <a:rPr lang="en-US" altLang="zh-CN" dirty="0"/>
+              <a:t>You could have multiple methods with the same name but different parameters, just like constructors</a:t>
+            </a:r>
+            <a:endParaRPr lang="zh-CN" altLang="en-US" dirty="0"/>
+          </a:p>
+        </p:txBody>
+      </p:sp>
+      <p:pic>
+        <p:nvPicPr>
+          <p:cNvPr id="5" name="Picture 4" descr="A screenshot of a computer program&#10;&#10;AI-generated content may be incorrect.">
+            <a:extLst>
+              <a:ext uri="{FF2B5EF4-FFF2-40B4-BE49-F238E27FC236}">
+                <a16:creationId xmlns:a16="http://schemas.microsoft.com/office/drawing/2014/main" id="{01D374A3-7057-F80D-78F3-F4D8ECB77AB1}"/>
+              </a:ext>
+            </a:extLst>
+          </p:cNvPr>
+          <p:cNvPicPr>
+            <a:picLocks noChangeAspect="1"/>
+          </p:cNvPicPr>
+          <p:nvPr/>
+        </p:nvPicPr>
+        <p:blipFill>
+          <a:blip r:embed="rId2">
+            <a:extLst>
+              <a:ext uri="{28A0092B-C50C-407E-A947-70E740481C1C}">
+                <a14:useLocalDpi xmlns:a14="http://schemas.microsoft.com/office/drawing/2010/main" val="0"/>
+              </a:ext>
+            </a:extLst>
+          </a:blip>
+          <a:stretch>
+            <a:fillRect/>
+          </a:stretch>
+        </p:blipFill>
+        <p:spPr>
+          <a:xfrm>
+            <a:off x="2245300" y="3159760"/>
+            <a:ext cx="9719169" cy="3333115"/>
+          </a:xfrm>
+          <a:prstGeom prst="rect">
+            <a:avLst/>
+          </a:prstGeom>
+        </p:spPr>
+      </p:pic>
+    </p:spTree>
+    <p:extLst>
+      <p:ext uri="{BB962C8B-B14F-4D97-AF65-F5344CB8AC3E}">
+        <p14:creationId xmlns:p14="http://schemas.microsoft.com/office/powerpoint/2010/main" val="2296558918"/>
+      </p:ext>
+    </p:extLst>
+  </p:cSld>
+  <p:clrMapOvr>
+    <a:masterClrMapping/>
+  </p:clrMapOvr>
+</p:sld>
+</file>
+
+<file path=ppt/slides/slide15.xml><?xml version="1.0" encoding="utf-8"?>
+<p:sld xmlns:a="http://schemas.openxmlformats.org/drawingml/2006/main" xmlns:r="http://schemas.openxmlformats.org/officeDocument/2006/relationships" xmlns:p="http://schemas.openxmlformats.org/presentationml/2006/main">
+  <p:cSld>
+    <p:spTree>
+      <p:nvGrpSpPr>
+        <p:cNvPr id="1" name=""/>
+        <p:cNvGrpSpPr/>
+        <p:nvPr/>
+      </p:nvGrpSpPr>
+      <p:grpSpPr>
+        <a:xfrm>
+          <a:off x="0" y="0"/>
+          <a:ext cx="0" cy="0"/>
+          <a:chOff x="0" y="0"/>
+          <a:chExt cx="0" cy="0"/>
+        </a:xfrm>
+      </p:grpSpPr>
+      <p:sp>
+        <p:nvSpPr>
+          <p:cNvPr id="2" name="Title 1">
+            <a:extLst>
+              <a:ext uri="{FF2B5EF4-FFF2-40B4-BE49-F238E27FC236}">
+                <a16:creationId xmlns:a16="http://schemas.microsoft.com/office/drawing/2014/main" id="{9A0FBD91-6751-BCB7-DC1B-D847FB0A2CE1}"/>
+              </a:ext>
+            </a:extLst>
+          </p:cNvPr>
+          <p:cNvSpPr>
+            <a:spLocks noGrp="1"/>
+          </p:cNvSpPr>
+          <p:nvPr>
+            <p:ph type="title"/>
+          </p:nvPr>
+        </p:nvSpPr>
+        <p:spPr/>
+        <p:txBody>
+          <a:bodyPr/>
+          <a:lstStyle/>
+          <a:p>
+            <a:r>
+              <a:rPr lang="en-US" altLang="zh-CN" dirty="0"/>
+              <a:t>2.6 Calling a non-void method</a:t>
+            </a:r>
+            <a:endParaRPr lang="zh-CN" altLang="en-US" dirty="0"/>
+          </a:p>
+        </p:txBody>
+      </p:sp>
+      <p:sp>
+        <p:nvSpPr>
+          <p:cNvPr id="3" name="Content Placeholder 2">
+            <a:extLst>
+              <a:ext uri="{FF2B5EF4-FFF2-40B4-BE49-F238E27FC236}">
+                <a16:creationId xmlns:a16="http://schemas.microsoft.com/office/drawing/2014/main" id="{870A9C96-BCB6-DA74-E488-F22099549515}"/>
+              </a:ext>
+            </a:extLst>
+          </p:cNvPr>
+          <p:cNvSpPr>
+            <a:spLocks noGrp="1"/>
+          </p:cNvSpPr>
+          <p:nvPr>
+            <p:ph idx="1"/>
+          </p:nvPr>
+        </p:nvSpPr>
+        <p:spPr/>
+        <p:txBody>
+          <a:bodyPr/>
+          <a:lstStyle/>
+          <a:p>
+            <a:r>
+              <a:rPr lang="en-US" altLang="zh-CN" dirty="0"/>
+              <a:t>Non-void method are method that </a:t>
+            </a:r>
+            <a:r>
+              <a:rPr lang="en-US" altLang="zh-CN" b="1" dirty="0"/>
+              <a:t>return </a:t>
+            </a:r>
+            <a:r>
+              <a:rPr lang="en-US" altLang="zh-CN" dirty="0"/>
+              <a:t>something, often the answer from the computation carried inside the method</a:t>
+            </a:r>
+          </a:p>
+          <a:p>
+            <a:r>
+              <a:rPr lang="en-US" altLang="zh-CN" dirty="0"/>
+              <a:t>A void method is like a </a:t>
+            </a:r>
+            <a:r>
+              <a:rPr lang="en-US" altLang="zh-CN" b="1" dirty="0"/>
+              <a:t>command</a:t>
+            </a:r>
+            <a:r>
+              <a:rPr lang="en-US" altLang="zh-CN" dirty="0"/>
+              <a:t>, it executes, but then do not give an answer back</a:t>
+            </a:r>
+          </a:p>
+          <a:p>
+            <a:r>
+              <a:rPr lang="en-US" altLang="zh-CN" dirty="0"/>
+              <a:t>A non-void method is like asking a </a:t>
+            </a:r>
+            <a:r>
+              <a:rPr lang="en-US" altLang="zh-CN" b="1" dirty="0"/>
+              <a:t>question</a:t>
+            </a:r>
+            <a:r>
+              <a:rPr lang="en-US" altLang="zh-CN" dirty="0"/>
+              <a:t>, it executes, and then give an answer back</a:t>
+            </a:r>
+            <a:endParaRPr lang="zh-CN" altLang="en-US" b="1" dirty="0"/>
+          </a:p>
+        </p:txBody>
+      </p:sp>
+      <p:pic>
+        <p:nvPicPr>
+          <p:cNvPr id="5" name="Picture 4" descr="A white background with black text&#10;&#10;AI-generated content may be incorrect.">
+            <a:extLst>
+              <a:ext uri="{FF2B5EF4-FFF2-40B4-BE49-F238E27FC236}">
+                <a16:creationId xmlns:a16="http://schemas.microsoft.com/office/drawing/2014/main" id="{699DFF1D-23EC-FC59-3B87-4773AB1A1D97}"/>
+              </a:ext>
+            </a:extLst>
+          </p:cNvPr>
+          <p:cNvPicPr>
+            <a:picLocks noChangeAspect="1"/>
+          </p:cNvPicPr>
+          <p:nvPr/>
+        </p:nvPicPr>
+        <p:blipFill>
+          <a:blip r:embed="rId2">
+            <a:extLst>
+              <a:ext uri="{28A0092B-C50C-407E-A947-70E740481C1C}">
+                <a14:useLocalDpi xmlns:a14="http://schemas.microsoft.com/office/drawing/2010/main" val="0"/>
+              </a:ext>
+            </a:extLst>
+          </a:blip>
+          <a:stretch>
+            <a:fillRect/>
+          </a:stretch>
+        </p:blipFill>
+        <p:spPr>
+          <a:xfrm>
+            <a:off x="5071247" y="4430931"/>
+            <a:ext cx="3429297" cy="2263336"/>
+          </a:xfrm>
+          <a:prstGeom prst="rect">
+            <a:avLst/>
+          </a:prstGeom>
+        </p:spPr>
+      </p:pic>
+      <p:pic>
+        <p:nvPicPr>
+          <p:cNvPr id="7" name="Picture 6" descr="A white background with black text&#10;&#10;AI-generated content may be incorrect.">
+            <a:extLst>
+              <a:ext uri="{FF2B5EF4-FFF2-40B4-BE49-F238E27FC236}">
+                <a16:creationId xmlns:a16="http://schemas.microsoft.com/office/drawing/2014/main" id="{0C463AFF-C51F-4AB2-459F-67222C46D524}"/>
+              </a:ext>
+            </a:extLst>
+          </p:cNvPr>
+          <p:cNvPicPr>
+            <a:picLocks noChangeAspect="1"/>
+          </p:cNvPicPr>
+          <p:nvPr/>
+        </p:nvPicPr>
+        <p:blipFill>
+          <a:blip r:embed="rId3">
+            <a:extLst>
+              <a:ext uri="{28A0092B-C50C-407E-A947-70E740481C1C}">
+                <a14:useLocalDpi xmlns:a14="http://schemas.microsoft.com/office/drawing/2010/main" val="0"/>
+              </a:ext>
+            </a:extLst>
+          </a:blip>
+          <a:stretch>
+            <a:fillRect/>
+          </a:stretch>
+        </p:blipFill>
+        <p:spPr>
+          <a:xfrm>
+            <a:off x="8635704" y="4495706"/>
+            <a:ext cx="3414056" cy="2133785"/>
+          </a:xfrm>
+          <a:prstGeom prst="rect">
+            <a:avLst/>
+          </a:prstGeom>
+        </p:spPr>
+      </p:pic>
+    </p:spTree>
+    <p:extLst>
+      <p:ext uri="{BB962C8B-B14F-4D97-AF65-F5344CB8AC3E}">
+        <p14:creationId xmlns:p14="http://schemas.microsoft.com/office/powerpoint/2010/main" val="1507530140"/>
+      </p:ext>
+    </p:extLst>
+  </p:cSld>
+  <p:clrMapOvr>
+    <a:masterClrMapping/>
+  </p:clrMapOvr>
+  <p:timing>
+    <p:tnLst>
+      <p:par>
+        <p:cTn id="1" dur="indefinite" restart="never" nodeType="tmRoot">
+          <p:childTnLst>
+            <p:seq concurrent="1" nextAc="seek">
+              <p:cTn id="2" dur="indefinite" nodeType="mainSeq">
+                <p:childTnLst>
+                  <p:par>
+                    <p:cTn id="3" fill="hold">
+                      <p:stCondLst>
+                        <p:cond delay="indefinite"/>
+                      </p:stCondLst>
+                      <p:childTnLst>
+                        <p:par>
+                          <p:cTn id="4" fill="hold">
+                            <p:stCondLst>
+                              <p:cond delay="0"/>
+                            </p:stCondLst>
+                            <p:childTnLst>
+                              <p:par>
+                                <p:cTn id="5" presetID="10" presetClass="entr" presetSubtype="0" fill="hold" nodeType="clickEffect">
+                                  <p:stCondLst>
+                                    <p:cond delay="0"/>
+                                  </p:stCondLst>
+                                  <p:childTnLst>
+                                    <p:set>
+                                      <p:cBhvr>
+                                        <p:cTn id="6" dur="1" fill="hold">
+                                          <p:stCondLst>
+                                            <p:cond delay="0"/>
+                                          </p:stCondLst>
+                                        </p:cTn>
+                                        <p:tgtEl>
+                                          <p:spTgt spid="3">
+                                            <p:txEl>
+                                              <p:pRg st="0" end="0"/>
+                                            </p:txEl>
+                                          </p:spTgt>
+                                        </p:tgtEl>
+                                        <p:attrNameLst>
+                                          <p:attrName>style.visibility</p:attrName>
+                                        </p:attrNameLst>
+                                      </p:cBhvr>
+                                      <p:to>
+                                        <p:strVal val="visible"/>
+                                      </p:to>
+                                    </p:set>
+                                    <p:animEffect transition="in" filter="fade">
+                                      <p:cBhvr>
+                                        <p:cTn id="7" dur="500"/>
+                                        <p:tgtEl>
+                                          <p:spTgt spid="3">
+                                            <p:txEl>
+                                              <p:pRg st="0" end="0"/>
+                                            </p:txEl>
+                                          </p:spTgt>
+                                        </p:tgtEl>
+                                      </p:cBhvr>
+                                    </p:animEffect>
+                                  </p:childTnLst>
+                                </p:cTn>
+                              </p:par>
+                            </p:childTnLst>
+                          </p:cTn>
+                        </p:par>
+                      </p:childTnLst>
+                    </p:cTn>
+                  </p:par>
+                  <p:par>
+                    <p:cTn id="8" fill="hold">
+                      <p:stCondLst>
+                        <p:cond delay="indefinite"/>
+                      </p:stCondLst>
+                      <p:childTnLst>
+                        <p:par>
+                          <p:cTn id="9" fill="hold">
+                            <p:stCondLst>
+                              <p:cond delay="0"/>
+                            </p:stCondLst>
+                            <p:childTnLst>
+                              <p:par>
+                                <p:cTn id="10" presetID="10" presetClass="entr" presetSubtype="0" fill="hold" nodeType="clickEffect">
+                                  <p:stCondLst>
+                                    <p:cond delay="0"/>
+                                  </p:stCondLst>
+                                  <p:childTnLst>
+                                    <p:set>
+                                      <p:cBhvr>
+                                        <p:cTn id="11" dur="1" fill="hold">
+                                          <p:stCondLst>
+                                            <p:cond delay="0"/>
+                                          </p:stCondLst>
+                                        </p:cTn>
+                                        <p:tgtEl>
+                                          <p:spTgt spid="3">
+                                            <p:txEl>
+                                              <p:pRg st="1" end="1"/>
+                                            </p:txEl>
+                                          </p:spTgt>
+                                        </p:tgtEl>
+                                        <p:attrNameLst>
+                                          <p:attrName>style.visibility</p:attrName>
+                                        </p:attrNameLst>
+                                      </p:cBhvr>
+                                      <p:to>
+                                        <p:strVal val="visible"/>
+                                      </p:to>
+                                    </p:set>
+                                    <p:animEffect transition="in" filter="fade">
+                                      <p:cBhvr>
+                                        <p:cTn id="12" dur="500"/>
+                                        <p:tgtEl>
+                                          <p:spTgt spid="3">
+                                            <p:txEl>
+                                              <p:pRg st="1" end="1"/>
+                                            </p:txEl>
+                                          </p:spTgt>
+                                        </p:tgtEl>
+                                      </p:cBhvr>
+                                    </p:animEffect>
+                                  </p:childTnLst>
+                                </p:cTn>
+                              </p:par>
+                            </p:childTnLst>
+                          </p:cTn>
+                        </p:par>
+                      </p:childTnLst>
+                    </p:cTn>
+                  </p:par>
+                  <p:par>
+                    <p:cTn id="13" fill="hold">
+                      <p:stCondLst>
+                        <p:cond delay="indefinite"/>
+                      </p:stCondLst>
+                      <p:childTnLst>
+                        <p:par>
+                          <p:cTn id="14" fill="hold">
+                            <p:stCondLst>
+                              <p:cond delay="0"/>
+                            </p:stCondLst>
+                            <p:childTnLst>
+                              <p:par>
+                                <p:cTn id="15" presetID="10" presetClass="entr" presetSubtype="0" fill="hold" nodeType="clickEffect">
+                                  <p:stCondLst>
+                                    <p:cond delay="0"/>
+                                  </p:stCondLst>
+                                  <p:childTnLst>
+                                    <p:set>
+                                      <p:cBhvr>
+                                        <p:cTn id="16" dur="1" fill="hold">
+                                          <p:stCondLst>
+                                            <p:cond delay="0"/>
+                                          </p:stCondLst>
+                                        </p:cTn>
+                                        <p:tgtEl>
+                                          <p:spTgt spid="5"/>
+                                        </p:tgtEl>
+                                        <p:attrNameLst>
+                                          <p:attrName>style.visibility</p:attrName>
+                                        </p:attrNameLst>
+                                      </p:cBhvr>
+                                      <p:to>
+                                        <p:strVal val="visible"/>
+                                      </p:to>
+                                    </p:set>
+                                    <p:animEffect transition="in" filter="fade">
+                                      <p:cBhvr>
+                                        <p:cTn id="17" dur="500"/>
+                                        <p:tgtEl>
+                                          <p:spTgt spid="5"/>
+                                        </p:tgtEl>
+                                      </p:cBhvr>
+                                    </p:animEffect>
+                                  </p:childTnLst>
+                                </p:cTn>
+                              </p:par>
+                            </p:childTnLst>
+                          </p:cTn>
+                        </p:par>
+                      </p:childTnLst>
+                    </p:cTn>
+                  </p:par>
+                  <p:par>
+                    <p:cTn id="18" fill="hold">
+                      <p:stCondLst>
+                        <p:cond delay="indefinite"/>
+                      </p:stCondLst>
+                      <p:childTnLst>
+                        <p:par>
+                          <p:cTn id="19" fill="hold">
+                            <p:stCondLst>
+                              <p:cond delay="0"/>
+                            </p:stCondLst>
+                            <p:childTnLst>
+                              <p:par>
+                                <p:cTn id="20" presetID="10" presetClass="entr" presetSubtype="0" fill="hold" nodeType="clickEffect">
+                                  <p:stCondLst>
+                                    <p:cond delay="0"/>
+                                  </p:stCondLst>
+                                  <p:childTnLst>
+                                    <p:set>
+                                      <p:cBhvr>
+                                        <p:cTn id="21" dur="1" fill="hold">
+                                          <p:stCondLst>
+                                            <p:cond delay="0"/>
+                                          </p:stCondLst>
+                                        </p:cTn>
+                                        <p:tgtEl>
+                                          <p:spTgt spid="3">
+                                            <p:txEl>
+                                              <p:pRg st="2" end="2"/>
+                                            </p:txEl>
+                                          </p:spTgt>
+                                        </p:tgtEl>
+                                        <p:attrNameLst>
+                                          <p:attrName>style.visibility</p:attrName>
+                                        </p:attrNameLst>
+                                      </p:cBhvr>
+                                      <p:to>
+                                        <p:strVal val="visible"/>
+                                      </p:to>
+                                    </p:set>
+                                    <p:animEffect transition="in" filter="fade">
+                                      <p:cBhvr>
+                                        <p:cTn id="22" dur="500"/>
+                                        <p:tgtEl>
+                                          <p:spTgt spid="3">
+                                            <p:txEl>
+                                              <p:pRg st="2" end="2"/>
+                                            </p:txEl>
+                                          </p:spTgt>
+                                        </p:tgtEl>
+                                      </p:cBhvr>
+                                    </p:animEffect>
+                                  </p:childTnLst>
+                                </p:cTn>
+                              </p:par>
+                            </p:childTnLst>
+                          </p:cTn>
+                        </p:par>
+                      </p:childTnLst>
+                    </p:cTn>
+                  </p:par>
+                  <p:par>
+                    <p:cTn id="23" fill="hold">
+                      <p:stCondLst>
+                        <p:cond delay="indefinite"/>
+                      </p:stCondLst>
+                      <p:childTnLst>
+                        <p:par>
+                          <p:cTn id="24" fill="hold">
+                            <p:stCondLst>
+                              <p:cond delay="0"/>
+                            </p:stCondLst>
+                            <p:childTnLst>
+                              <p:par>
+                                <p:cTn id="25" presetID="10" presetClass="entr" presetSubtype="0" fill="hold" nodeType="clickEffect">
+                                  <p:stCondLst>
+                                    <p:cond delay="0"/>
+                                  </p:stCondLst>
+                                  <p:childTnLst>
+                                    <p:set>
+                                      <p:cBhvr>
+                                        <p:cTn id="26" dur="1" fill="hold">
+                                          <p:stCondLst>
+                                            <p:cond delay="0"/>
+                                          </p:stCondLst>
+                                        </p:cTn>
+                                        <p:tgtEl>
+                                          <p:spTgt spid="7"/>
+                                        </p:tgtEl>
+                                        <p:attrNameLst>
+                                          <p:attrName>style.visibility</p:attrName>
+                                        </p:attrNameLst>
+                                      </p:cBhvr>
+                                      <p:to>
+                                        <p:strVal val="visible"/>
+                                      </p:to>
+                                    </p:set>
+                                    <p:animEffect transition="in" filter="fade">
+                                      <p:cBhvr>
+                                        <p:cTn id="27" dur="500"/>
+                                        <p:tgtEl>
+                                          <p:spTgt spid="7"/>
+                                        </p:tgtEl>
+                                      </p:cBhvr>
+                                    </p:animEffect>
+                                  </p:childTnLst>
+                                </p:cTn>
+                              </p:par>
+                            </p:childTnLst>
+                          </p:cTn>
+                        </p:par>
+                      </p:childTnLst>
+                    </p:cTn>
+                  </p:par>
+                </p:childTnLst>
+              </p:cTn>
+              <p:prevCondLst>
+                <p:cond evt="onPrev" delay="0">
+                  <p:tgtEl>
+                    <p:sldTgt/>
+                  </p:tgtEl>
+                </p:cond>
+              </p:prevCondLst>
+              <p:nextCondLst>
+                <p:cond evt="onNext" delay="0">
+                  <p:tgtEl>
+                    <p:sldTgt/>
+                  </p:tgtEl>
+                </p:cond>
+              </p:nextCondLst>
+            </p:seq>
+          </p:childTnLst>
+        </p:cTn>
+      </p:par>
+    </p:tnLst>
+  </p:timing>
+</p:sld>
+</file>
+
+<file path=ppt/slides/slide16.xml><?xml version="1.0" encoding="utf-8"?>
+<p:sld xmlns:a="http://schemas.openxmlformats.org/drawingml/2006/main" xmlns:r="http://schemas.openxmlformats.org/officeDocument/2006/relationships" xmlns:p="http://schemas.openxmlformats.org/presentationml/2006/main">
+  <p:cSld>
+    <p:spTree>
+      <p:nvGrpSpPr>
+        <p:cNvPr id="1" name=""/>
+        <p:cNvGrpSpPr/>
+        <p:nvPr/>
+      </p:nvGrpSpPr>
+      <p:grpSpPr>
+        <a:xfrm>
+          <a:off x="0" y="0"/>
+          <a:ext cx="0" cy="0"/>
+          <a:chOff x="0" y="0"/>
+          <a:chExt cx="0" cy="0"/>
+        </a:xfrm>
+      </p:grpSpPr>
+      <p:sp>
+        <p:nvSpPr>
+          <p:cNvPr id="2" name="Title 1">
+            <a:extLst>
+              <a:ext uri="{FF2B5EF4-FFF2-40B4-BE49-F238E27FC236}">
+                <a16:creationId xmlns:a16="http://schemas.microsoft.com/office/drawing/2014/main" id="{70356251-4137-4E57-5BB3-6CEBFF5D1CE9}"/>
+              </a:ext>
+            </a:extLst>
+          </p:cNvPr>
+          <p:cNvSpPr>
+            <a:spLocks noGrp="1"/>
+          </p:cNvSpPr>
+          <p:nvPr>
+            <p:ph type="title"/>
+          </p:nvPr>
+        </p:nvSpPr>
+        <p:spPr/>
+        <p:txBody>
+          <a:bodyPr/>
+          <a:lstStyle/>
+          <a:p>
+            <a:r>
+              <a:rPr lang="en-US" altLang="zh-CN" dirty="0"/>
+              <a:t>Why is non-void method useful?</a:t>
+            </a:r>
+            <a:endParaRPr lang="zh-CN" altLang="en-US" dirty="0"/>
+          </a:p>
+        </p:txBody>
+      </p:sp>
+      <p:sp>
+        <p:nvSpPr>
+          <p:cNvPr id="3" name="Content Placeholder 2">
+            <a:extLst>
+              <a:ext uri="{FF2B5EF4-FFF2-40B4-BE49-F238E27FC236}">
+                <a16:creationId xmlns:a16="http://schemas.microsoft.com/office/drawing/2014/main" id="{16F10559-E57A-65A2-2B3A-4A96B5C9983E}"/>
+              </a:ext>
+            </a:extLst>
+          </p:cNvPr>
+          <p:cNvSpPr>
+            <a:spLocks noGrp="1"/>
+          </p:cNvSpPr>
+          <p:nvPr>
+            <p:ph idx="1"/>
+          </p:nvPr>
+        </p:nvSpPr>
+        <p:spPr/>
+        <p:txBody>
+          <a:bodyPr/>
+          <a:lstStyle/>
+          <a:p>
+            <a:r>
+              <a:rPr lang="en-US" altLang="zh-CN" dirty="0"/>
+              <a:t>It </a:t>
+            </a:r>
+            <a:r>
+              <a:rPr lang="en-US" altLang="zh-CN" b="1" dirty="0"/>
+              <a:t>keeps the result </a:t>
+            </a:r>
+            <a:r>
+              <a:rPr lang="en-US" altLang="zh-CN" dirty="0"/>
+              <a:t>from the method call, and you can create a new variable to store it. </a:t>
+            </a:r>
+          </a:p>
+          <a:p>
+            <a:pPr lvl="1"/>
+            <a:r>
+              <a:rPr lang="en-US" altLang="zh-CN" dirty="0"/>
+              <a:t>Ex. Rectangle r1 = new Rectangle(4, 8);</a:t>
+            </a:r>
+          </a:p>
+          <a:p>
+            <a:pPr marL="914400" lvl="2" indent="0">
+              <a:buNone/>
+            </a:pPr>
+            <a:r>
+              <a:rPr lang="en-US" altLang="zh-CN" sz="2400" dirty="0"/>
+              <a:t>   int area = r1.getArea();</a:t>
+            </a:r>
+          </a:p>
+        </p:txBody>
+      </p:sp>
+      <p:pic>
+        <p:nvPicPr>
+          <p:cNvPr id="4" name="Picture 3" descr="A white background with black text&#10;&#10;AI-generated content may be incorrect.">
+            <a:extLst>
+              <a:ext uri="{FF2B5EF4-FFF2-40B4-BE49-F238E27FC236}">
+                <a16:creationId xmlns:a16="http://schemas.microsoft.com/office/drawing/2014/main" id="{A0B955B0-E37A-D891-7C5E-53D5D6E0D54F}"/>
+              </a:ext>
+            </a:extLst>
+          </p:cNvPr>
+          <p:cNvPicPr>
+            <a:picLocks noChangeAspect="1"/>
+          </p:cNvPicPr>
+          <p:nvPr/>
+        </p:nvPicPr>
+        <p:blipFill>
+          <a:blip r:embed="rId2">
+            <a:extLst>
+              <a:ext uri="{28A0092B-C50C-407E-A947-70E740481C1C}">
+                <a14:useLocalDpi xmlns:a14="http://schemas.microsoft.com/office/drawing/2010/main" val="0"/>
+              </a:ext>
+            </a:extLst>
+          </a:blip>
+          <a:stretch>
+            <a:fillRect/>
+          </a:stretch>
+        </p:blipFill>
+        <p:spPr>
+          <a:xfrm>
+            <a:off x="7315578" y="3718560"/>
+            <a:ext cx="4311394" cy="2694621"/>
+          </a:xfrm>
+          <a:prstGeom prst="rect">
+            <a:avLst/>
+          </a:prstGeom>
+        </p:spPr>
+      </p:pic>
+    </p:spTree>
+    <p:extLst>
+      <p:ext uri="{BB962C8B-B14F-4D97-AF65-F5344CB8AC3E}">
+        <p14:creationId xmlns:p14="http://schemas.microsoft.com/office/powerpoint/2010/main" val="3712503701"/>
+      </p:ext>
+    </p:extLst>
+  </p:cSld>
+  <p:clrMapOvr>
+    <a:masterClrMapping/>
+  </p:clrMapOvr>
+  <p:timing>
+    <p:tnLst>
+      <p:par>
+        <p:cTn id="1" dur="indefinite" restart="never" nodeType="tmRoot">
+          <p:childTnLst>
+            <p:seq concurrent="1" nextAc="seek">
+              <p:cTn id="2" dur="indefinite" nodeType="mainSeq">
+                <p:childTnLst>
+                  <p:par>
+                    <p:cTn id="3" fill="hold">
+                      <p:stCondLst>
+                        <p:cond delay="indefinite"/>
+                      </p:stCondLst>
+                      <p:childTnLst>
+                        <p:par>
+                          <p:cTn id="4" fill="hold">
+                            <p:stCondLst>
+                              <p:cond delay="0"/>
+                            </p:stCondLst>
+                            <p:childTnLst>
+                              <p:par>
+                                <p:cTn id="5" presetID="10" presetClass="entr" presetSubtype="0" fill="hold" nodeType="clickEffect">
+                                  <p:stCondLst>
+                                    <p:cond delay="0"/>
+                                  </p:stCondLst>
+                                  <p:childTnLst>
+                                    <p:set>
+                                      <p:cBhvr>
+                                        <p:cTn id="6" dur="1" fill="hold">
+                                          <p:stCondLst>
+                                            <p:cond delay="0"/>
+                                          </p:stCondLst>
+                                        </p:cTn>
+                                        <p:tgtEl>
+                                          <p:spTgt spid="3">
+                                            <p:txEl>
+                                              <p:pRg st="0" end="0"/>
+                                            </p:txEl>
+                                          </p:spTgt>
+                                        </p:tgtEl>
+                                        <p:attrNameLst>
+                                          <p:attrName>style.visibility</p:attrName>
+                                        </p:attrNameLst>
+                                      </p:cBhvr>
+                                      <p:to>
+                                        <p:strVal val="visible"/>
+                                      </p:to>
+                                    </p:set>
+                                    <p:animEffect transition="in" filter="fade">
+                                      <p:cBhvr>
+                                        <p:cTn id="7" dur="500"/>
+                                        <p:tgtEl>
+                                          <p:spTgt spid="3">
+                                            <p:txEl>
+                                              <p:pRg st="0" end="0"/>
+                                            </p:txEl>
+                                          </p:spTgt>
+                                        </p:tgtEl>
+                                      </p:cBhvr>
+                                    </p:animEffect>
+                                  </p:childTnLst>
+                                </p:cTn>
+                              </p:par>
+                            </p:childTnLst>
+                          </p:cTn>
+                        </p:par>
+                      </p:childTnLst>
+                    </p:cTn>
+                  </p:par>
+                  <p:par>
+                    <p:cTn id="8" fill="hold">
+                      <p:stCondLst>
+                        <p:cond delay="indefinite"/>
+                      </p:stCondLst>
+                      <p:childTnLst>
+                        <p:par>
+                          <p:cTn id="9" fill="hold">
+                            <p:stCondLst>
+                              <p:cond delay="0"/>
+                            </p:stCondLst>
+                            <p:childTnLst>
+                              <p:par>
+                                <p:cTn id="10" presetID="10" presetClass="entr" presetSubtype="0" fill="hold" nodeType="clickEffect">
+                                  <p:stCondLst>
+                                    <p:cond delay="0"/>
+                                  </p:stCondLst>
+                                  <p:childTnLst>
+                                    <p:set>
+                                      <p:cBhvr>
+                                        <p:cTn id="11" dur="1" fill="hold">
+                                          <p:stCondLst>
+                                            <p:cond delay="0"/>
+                                          </p:stCondLst>
+                                        </p:cTn>
+                                        <p:tgtEl>
+                                          <p:spTgt spid="3">
+                                            <p:txEl>
+                                              <p:pRg st="1" end="1"/>
+                                            </p:txEl>
+                                          </p:spTgt>
+                                        </p:tgtEl>
+                                        <p:attrNameLst>
+                                          <p:attrName>style.visibility</p:attrName>
+                                        </p:attrNameLst>
+                                      </p:cBhvr>
+                                      <p:to>
+                                        <p:strVal val="visible"/>
+                                      </p:to>
+                                    </p:set>
+                                    <p:animEffect transition="in" filter="fade">
+                                      <p:cBhvr>
+                                        <p:cTn id="12" dur="500"/>
+                                        <p:tgtEl>
+                                          <p:spTgt spid="3">
+                                            <p:txEl>
+                                              <p:pRg st="1" end="1"/>
+                                            </p:txEl>
+                                          </p:spTgt>
+                                        </p:tgtEl>
+                                      </p:cBhvr>
+                                    </p:animEffect>
+                                  </p:childTnLst>
+                                </p:cTn>
+                              </p:par>
+                              <p:par>
+                                <p:cTn id="13" presetID="10" presetClass="entr" presetSubtype="0" fill="hold" nodeType="withEffect">
+                                  <p:stCondLst>
+                                    <p:cond delay="0"/>
+                                  </p:stCondLst>
+                                  <p:childTnLst>
+                                    <p:set>
+                                      <p:cBhvr>
+                                        <p:cTn id="14" dur="1" fill="hold">
+                                          <p:stCondLst>
+                                            <p:cond delay="0"/>
+                                          </p:stCondLst>
+                                        </p:cTn>
+                                        <p:tgtEl>
+                                          <p:spTgt spid="3">
+                                            <p:txEl>
+                                              <p:pRg st="2" end="2"/>
+                                            </p:txEl>
+                                          </p:spTgt>
+                                        </p:tgtEl>
+                                        <p:attrNameLst>
+                                          <p:attrName>style.visibility</p:attrName>
+                                        </p:attrNameLst>
+                                      </p:cBhvr>
+                                      <p:to>
+                                        <p:strVal val="visible"/>
+                                      </p:to>
+                                    </p:set>
+                                    <p:animEffect transition="in" filter="fade">
+                                      <p:cBhvr>
+                                        <p:cTn id="15" dur="500"/>
+                                        <p:tgtEl>
+                                          <p:spTgt spid="3">
+                                            <p:txEl>
+                                              <p:pRg st="2" end="2"/>
+                                            </p:txEl>
+                                          </p:spTgt>
+                                        </p:tgtEl>
+                                      </p:cBhvr>
+                                    </p:animEffect>
+                                  </p:childTnLst>
+                                </p:cTn>
+                              </p:par>
+                            </p:childTnLst>
+                          </p:cTn>
+                        </p:par>
+                      </p:childTnLst>
+                    </p:cTn>
+                  </p:par>
+                </p:childTnLst>
+              </p:cTn>
+              <p:prevCondLst>
+                <p:cond evt="onPrev" delay="0">
+                  <p:tgtEl>
+                    <p:sldTgt/>
+                  </p:tgtEl>
+                </p:cond>
+              </p:prevCondLst>
+              <p:nextCondLst>
+                <p:cond evt="onNext" delay="0">
+                  <p:tgtEl>
+                    <p:sldTgt/>
+                  </p:tgtEl>
+                </p:cond>
+              </p:nextCondLst>
+            </p:seq>
+          </p:childTnLst>
+        </p:cTn>
+      </p:par>
+    </p:tnLst>
+  </p:timing>
+</p:sld>
+</file>
+
+<file path=ppt/slides/slide17.xml><?xml version="1.0" encoding="utf-8"?>
+<p:sld xmlns:a="http://schemas.openxmlformats.org/drawingml/2006/main" xmlns:r="http://schemas.openxmlformats.org/officeDocument/2006/relationships" xmlns:p="http://schemas.openxmlformats.org/presentationml/2006/main">
+  <p:cSld>
+    <p:spTree>
+      <p:nvGrpSpPr>
+        <p:cNvPr id="1" name=""/>
+        <p:cNvGrpSpPr/>
+        <p:nvPr/>
+      </p:nvGrpSpPr>
+      <p:grpSpPr>
+        <a:xfrm>
+          <a:off x="0" y="0"/>
+          <a:ext cx="0" cy="0"/>
+          <a:chOff x="0" y="0"/>
+          <a:chExt cx="0" cy="0"/>
+        </a:xfrm>
+      </p:grpSpPr>
+      <p:sp>
+        <p:nvSpPr>
+          <p:cNvPr id="2" name="Title 1">
+            <a:extLst>
+              <a:ext uri="{FF2B5EF4-FFF2-40B4-BE49-F238E27FC236}">
+                <a16:creationId xmlns:a16="http://schemas.microsoft.com/office/drawing/2014/main" id="{D20A8FA0-27E4-215F-D51E-8DD74E91173F}"/>
+              </a:ext>
+            </a:extLst>
+          </p:cNvPr>
+          <p:cNvSpPr>
+            <a:spLocks noGrp="1"/>
+          </p:cNvSpPr>
+          <p:nvPr>
+            <p:ph type="title"/>
+          </p:nvPr>
+        </p:nvSpPr>
+        <p:spPr/>
+        <p:txBody>
+          <a:bodyPr/>
+          <a:lstStyle/>
+          <a:p>
+            <a:r>
+              <a:rPr lang="en-US" altLang="zh-CN" dirty="0"/>
+              <a:t>What happens if you do not use non-void method?</a:t>
+            </a:r>
+            <a:endParaRPr lang="zh-CN" altLang="en-US" dirty="0"/>
+          </a:p>
+        </p:txBody>
+      </p:sp>
+      <p:sp>
+        <p:nvSpPr>
+          <p:cNvPr id="3" name="Content Placeholder 2">
+            <a:extLst>
+              <a:ext uri="{FF2B5EF4-FFF2-40B4-BE49-F238E27FC236}">
+                <a16:creationId xmlns:a16="http://schemas.microsoft.com/office/drawing/2014/main" id="{72E87D18-F351-F11A-BE39-1BDC36329131}"/>
+              </a:ext>
+            </a:extLst>
+          </p:cNvPr>
+          <p:cNvSpPr>
+            <a:spLocks noGrp="1"/>
+          </p:cNvSpPr>
+          <p:nvPr>
+            <p:ph idx="1"/>
+          </p:nvPr>
+        </p:nvSpPr>
+        <p:spPr/>
+        <p:txBody>
+          <a:bodyPr/>
+          <a:lstStyle/>
+          <a:p>
+            <a:r>
+              <a:rPr lang="en-US" altLang="zh-CN" dirty="0"/>
+              <a:t>You only get to </a:t>
+            </a:r>
+            <a:r>
+              <a:rPr lang="en-US" altLang="zh-CN" b="1" dirty="0"/>
+              <a:t>see</a:t>
+            </a:r>
+            <a:r>
+              <a:rPr lang="en-US" altLang="zh-CN" dirty="0"/>
+              <a:t> the result, but you can </a:t>
+            </a:r>
+            <a:r>
+              <a:rPr lang="en-US" altLang="zh-CN" b="1" dirty="0"/>
+              <a:t>never use </a:t>
+            </a:r>
+            <a:r>
+              <a:rPr lang="en-US" altLang="zh-CN" dirty="0"/>
+              <a:t>it elsewhere</a:t>
+            </a:r>
+          </a:p>
+          <a:p>
+            <a:pPr lvl="1"/>
+            <a:r>
+              <a:rPr lang="en-US" altLang="zh-CN" dirty="0"/>
+              <a:t>Ex. Rectangle r1 = new Rectangle(4, 8);</a:t>
+            </a:r>
+          </a:p>
+          <a:p>
+            <a:pPr marL="914400" lvl="2" indent="0">
+              <a:buNone/>
+            </a:pPr>
+            <a:r>
+              <a:rPr lang="en-US" altLang="zh-CN" sz="2400" dirty="0"/>
+              <a:t>   r1.printArea();</a:t>
+            </a:r>
+          </a:p>
+          <a:p>
+            <a:endParaRPr lang="en-US" altLang="zh-CN" dirty="0"/>
+          </a:p>
+          <a:p>
+            <a:endParaRPr lang="zh-CN" altLang="en-US" dirty="0"/>
+          </a:p>
+        </p:txBody>
+      </p:sp>
+      <p:pic>
+        <p:nvPicPr>
+          <p:cNvPr id="4" name="Picture 3" descr="A white background with black text&#10;&#10;AI-generated content may be incorrect.">
+            <a:extLst>
+              <a:ext uri="{FF2B5EF4-FFF2-40B4-BE49-F238E27FC236}">
+                <a16:creationId xmlns:a16="http://schemas.microsoft.com/office/drawing/2014/main" id="{6ADA6F0C-88BF-EB23-739A-002FF9C0911E}"/>
+              </a:ext>
+            </a:extLst>
+          </p:cNvPr>
+          <p:cNvPicPr>
+            <a:picLocks noChangeAspect="1"/>
+          </p:cNvPicPr>
+          <p:nvPr/>
+        </p:nvPicPr>
+        <p:blipFill>
+          <a:blip r:embed="rId2">
+            <a:extLst>
+              <a:ext uri="{28A0092B-C50C-407E-A947-70E740481C1C}">
+                <a14:useLocalDpi xmlns:a14="http://schemas.microsoft.com/office/drawing/2010/main" val="0"/>
+              </a:ext>
+            </a:extLst>
+          </a:blip>
+          <a:stretch>
+            <a:fillRect/>
+          </a:stretch>
+        </p:blipFill>
+        <p:spPr>
+          <a:xfrm>
+            <a:off x="7347087" y="3764624"/>
+            <a:ext cx="4133713" cy="2728251"/>
+          </a:xfrm>
+          <a:prstGeom prst="rect">
+            <a:avLst/>
+          </a:prstGeom>
+        </p:spPr>
+      </p:pic>
+    </p:spTree>
+    <p:extLst>
+      <p:ext uri="{BB962C8B-B14F-4D97-AF65-F5344CB8AC3E}">
+        <p14:creationId xmlns:p14="http://schemas.microsoft.com/office/powerpoint/2010/main" val="3276001570"/>
+      </p:ext>
+    </p:extLst>
+  </p:cSld>
+  <p:clrMapOvr>
+    <a:masterClrMapping/>
+  </p:clrMapOvr>
+</p:sld>
+</file>
+
+<file path=ppt/slides/slide18.xml><?xml version="1.0" encoding="utf-8"?>
+<p:sld xmlns:a="http://schemas.openxmlformats.org/drawingml/2006/main" xmlns:r="http://schemas.openxmlformats.org/officeDocument/2006/relationships" xmlns:p="http://schemas.openxmlformats.org/presentationml/2006/main">
+  <p:cSld>
+    <p:spTree>
+      <p:nvGrpSpPr>
+        <p:cNvPr id="1" name=""/>
+        <p:cNvGrpSpPr/>
+        <p:nvPr/>
+      </p:nvGrpSpPr>
+      <p:grpSpPr>
+        <a:xfrm>
+          <a:off x="0" y="0"/>
+          <a:ext cx="0" cy="0"/>
+          <a:chOff x="0" y="0"/>
+          <a:chExt cx="0" cy="0"/>
+        </a:xfrm>
+      </p:grpSpPr>
+      <p:sp>
+        <p:nvSpPr>
+          <p:cNvPr id="2" name="Title 1">
+            <a:extLst>
+              <a:ext uri="{FF2B5EF4-FFF2-40B4-BE49-F238E27FC236}">
+                <a16:creationId xmlns:a16="http://schemas.microsoft.com/office/drawing/2014/main" id="{891E4808-CC37-9A5E-3E3A-57726C37BC8C}"/>
+              </a:ext>
+            </a:extLst>
+          </p:cNvPr>
+          <p:cNvSpPr>
+            <a:spLocks noGrp="1"/>
+          </p:cNvSpPr>
+          <p:nvPr>
+            <p:ph type="title"/>
+          </p:nvPr>
+        </p:nvSpPr>
+        <p:spPr/>
+        <p:txBody>
+          <a:bodyPr/>
+          <a:lstStyle/>
+          <a:p>
+            <a:r>
+              <a:rPr lang="en-US" altLang="zh-CN" dirty="0"/>
+              <a:t>Key things to remember when declaring non-void method</a:t>
+            </a:r>
+            <a:endParaRPr lang="zh-CN" altLang="en-US" dirty="0"/>
+          </a:p>
+        </p:txBody>
+      </p:sp>
+      <p:sp>
+        <p:nvSpPr>
+          <p:cNvPr id="3" name="Content Placeholder 2">
+            <a:extLst>
+              <a:ext uri="{FF2B5EF4-FFF2-40B4-BE49-F238E27FC236}">
+                <a16:creationId xmlns:a16="http://schemas.microsoft.com/office/drawing/2014/main" id="{F75914D0-1CD1-1C5E-7E27-D664214ECB86}"/>
+              </a:ext>
+            </a:extLst>
+          </p:cNvPr>
+          <p:cNvSpPr>
+            <a:spLocks noGrp="1"/>
+          </p:cNvSpPr>
+          <p:nvPr>
+            <p:ph idx="1"/>
+          </p:nvPr>
+        </p:nvSpPr>
+        <p:spPr/>
+        <p:txBody>
+          <a:bodyPr/>
+          <a:lstStyle/>
+          <a:p>
+            <a:r>
+              <a:rPr lang="en-US" altLang="zh-CN" dirty="0"/>
+              <a:t>1. Must </a:t>
+            </a:r>
+            <a:r>
+              <a:rPr lang="en-US" altLang="zh-CN" b="1" dirty="0"/>
+              <a:t>return</a:t>
+            </a:r>
+          </a:p>
+          <a:p>
+            <a:r>
+              <a:rPr lang="en-US" altLang="zh-CN" dirty="0"/>
+              <a:t>2. Return </a:t>
+            </a:r>
+            <a:r>
+              <a:rPr lang="en-US" altLang="zh-CN" b="1" dirty="0"/>
+              <a:t>type must match</a:t>
+            </a:r>
+            <a:endParaRPr lang="zh-CN" altLang="en-US" b="1" dirty="0"/>
+          </a:p>
+        </p:txBody>
+      </p:sp>
+      <p:pic>
+        <p:nvPicPr>
+          <p:cNvPr id="4" name="Picture 3" descr="A white background with black text&#10;&#10;AI-generated content may be incorrect.">
+            <a:extLst>
+              <a:ext uri="{FF2B5EF4-FFF2-40B4-BE49-F238E27FC236}">
+                <a16:creationId xmlns:a16="http://schemas.microsoft.com/office/drawing/2014/main" id="{486F85D8-E184-CC94-9D57-165102F39A6E}"/>
+              </a:ext>
+            </a:extLst>
+          </p:cNvPr>
+          <p:cNvPicPr>
+            <a:picLocks noChangeAspect="1"/>
+          </p:cNvPicPr>
+          <p:nvPr/>
+        </p:nvPicPr>
+        <p:blipFill>
+          <a:blip r:embed="rId2">
+            <a:extLst>
+              <a:ext uri="{28A0092B-C50C-407E-A947-70E740481C1C}">
+                <a14:useLocalDpi xmlns:a14="http://schemas.microsoft.com/office/drawing/2010/main" val="0"/>
+              </a:ext>
+            </a:extLst>
+          </a:blip>
+          <a:stretch>
+            <a:fillRect/>
+          </a:stretch>
+        </p:blipFill>
+        <p:spPr>
+          <a:xfrm>
+            <a:off x="7335243" y="1825625"/>
+            <a:ext cx="4311394" cy="2694621"/>
+          </a:xfrm>
+          <a:prstGeom prst="rect">
+            <a:avLst/>
+          </a:prstGeom>
+        </p:spPr>
+      </p:pic>
+    </p:spTree>
+    <p:extLst>
+      <p:ext uri="{BB962C8B-B14F-4D97-AF65-F5344CB8AC3E}">
+        <p14:creationId xmlns:p14="http://schemas.microsoft.com/office/powerpoint/2010/main" val="3300222076"/>
+      </p:ext>
+    </p:extLst>
+  </p:cSld>
+  <p:clrMapOvr>
+    <a:masterClrMapping/>
+  </p:clrMapOvr>
+</p:sld>
+</file>
+
+<file path=ppt/slides/slide19.xml><?xml version="1.0" encoding="utf-8"?>
+<p:sld xmlns:a="http://schemas.openxmlformats.org/drawingml/2006/main" xmlns:r="http://schemas.openxmlformats.org/officeDocument/2006/relationships" xmlns:p="http://schemas.openxmlformats.org/presentationml/2006/main">
+  <p:cSld>
+    <p:spTree>
+      <p:nvGrpSpPr>
+        <p:cNvPr id="1" name=""/>
+        <p:cNvGrpSpPr/>
+        <p:nvPr/>
+      </p:nvGrpSpPr>
+      <p:grpSpPr>
+        <a:xfrm>
+          <a:off x="0" y="0"/>
+          <a:ext cx="0" cy="0"/>
+          <a:chOff x="0" y="0"/>
+          <a:chExt cx="0" cy="0"/>
+        </a:xfrm>
+      </p:grpSpPr>
+      <p:sp>
+        <p:nvSpPr>
+          <p:cNvPr id="2" name="Title 1">
+            <a:extLst>
+              <a:ext uri="{FF2B5EF4-FFF2-40B4-BE49-F238E27FC236}">
+                <a16:creationId xmlns:a16="http://schemas.microsoft.com/office/drawing/2014/main" id="{9C10E79A-5CA0-3F9A-7541-70F007DE6DF0}"/>
+              </a:ext>
+            </a:extLst>
+          </p:cNvPr>
+          <p:cNvSpPr>
+            <a:spLocks noGrp="1"/>
+          </p:cNvSpPr>
+          <p:nvPr>
+            <p:ph type="title"/>
+          </p:nvPr>
+        </p:nvSpPr>
+        <p:spPr/>
+        <p:txBody>
+          <a:bodyPr/>
+          <a:lstStyle/>
+          <a:p>
+            <a:r>
+              <a:rPr lang="en-US" altLang="zh-CN" dirty="0"/>
+              <a:t>2.7 String Object</a:t>
+            </a:r>
+            <a:endParaRPr lang="zh-CN" altLang="en-US" dirty="0"/>
+          </a:p>
+        </p:txBody>
+      </p:sp>
+      <p:sp>
+        <p:nvSpPr>
+          <p:cNvPr id="3" name="Content Placeholder 2">
+            <a:extLst>
+              <a:ext uri="{FF2B5EF4-FFF2-40B4-BE49-F238E27FC236}">
+                <a16:creationId xmlns:a16="http://schemas.microsoft.com/office/drawing/2014/main" id="{C38B0355-EABC-CB17-F3B5-4A69B59A8248}"/>
+              </a:ext>
+            </a:extLst>
+          </p:cNvPr>
+          <p:cNvSpPr>
+            <a:spLocks noGrp="1"/>
+          </p:cNvSpPr>
+          <p:nvPr>
+            <p:ph idx="1"/>
+          </p:nvPr>
+        </p:nvSpPr>
+        <p:spPr/>
+        <p:txBody>
+          <a:bodyPr/>
+          <a:lstStyle/>
+          <a:p>
+            <a:r>
+              <a:rPr lang="en-US" altLang="zh-CN" dirty="0"/>
+              <a:t>Revisiting String variable definition: String</a:t>
+            </a:r>
+            <a:r>
+              <a:rPr lang="zh-CN" altLang="en-US" dirty="0"/>
+              <a:t> </a:t>
+            </a:r>
+            <a:r>
+              <a:rPr lang="en-US" altLang="zh-CN" dirty="0"/>
+              <a:t>s1=“Monday”</a:t>
+            </a:r>
+          </a:p>
+          <a:p>
+            <a:r>
+              <a:rPr lang="en-US" altLang="zh-CN" dirty="0"/>
+              <a:t>You can also write as: String s1=new String(“Monday”)</a:t>
+            </a:r>
+          </a:p>
+          <a:p>
+            <a:endParaRPr lang="en-US" altLang="zh-CN" dirty="0"/>
+          </a:p>
+          <a:p>
+            <a:endParaRPr lang="en-US" altLang="zh-CN" dirty="0"/>
+          </a:p>
+        </p:txBody>
+      </p:sp>
+    </p:spTree>
+    <p:extLst>
+      <p:ext uri="{BB962C8B-B14F-4D97-AF65-F5344CB8AC3E}">
+        <p14:creationId xmlns:p14="http://schemas.microsoft.com/office/powerpoint/2010/main" val="1487030339"/>
+      </p:ext>
+    </p:extLst>
+  </p:cSld>
+  <p:clrMapOvr>
+    <a:masterClrMapping/>
+  </p:clrMapOvr>
+</p:sld>
+</file>
+
 <file path=ppt/slides/slide2.xml><?xml version="1.0" encoding="utf-8"?>
 <p:sld xmlns:a="http://schemas.openxmlformats.org/drawingml/2006/main" xmlns:r="http://schemas.openxmlformats.org/officeDocument/2006/relationships" xmlns:p="http://schemas.openxmlformats.org/presentationml/2006/main">
   <p:cSld>
@@ -4211,6 +6543,3872 @@
 </p:sld>
 </file>
 
+<file path=ppt/slides/slide20.xml><?xml version="1.0" encoding="utf-8"?>
+<p:sld xmlns:a="http://schemas.openxmlformats.org/drawingml/2006/main" xmlns:r="http://schemas.openxmlformats.org/officeDocument/2006/relationships" xmlns:p="http://schemas.openxmlformats.org/presentationml/2006/main">
+  <p:cSld>
+    <p:spTree>
+      <p:nvGrpSpPr>
+        <p:cNvPr id="1" name=""/>
+        <p:cNvGrpSpPr/>
+        <p:nvPr/>
+      </p:nvGrpSpPr>
+      <p:grpSpPr>
+        <a:xfrm>
+          <a:off x="0" y="0"/>
+          <a:ext cx="0" cy="0"/>
+          <a:chOff x="0" y="0"/>
+          <a:chExt cx="0" cy="0"/>
+        </a:xfrm>
+      </p:grpSpPr>
+      <p:sp>
+        <p:nvSpPr>
+          <p:cNvPr id="2" name="Title 1">
+            <a:extLst>
+              <a:ext uri="{FF2B5EF4-FFF2-40B4-BE49-F238E27FC236}">
+                <a16:creationId xmlns:a16="http://schemas.microsoft.com/office/drawing/2014/main" id="{74C632D0-0AE1-0AA4-33EE-2382B6EBD713}"/>
+              </a:ext>
+            </a:extLst>
+          </p:cNvPr>
+          <p:cNvSpPr>
+            <a:spLocks noGrp="1"/>
+          </p:cNvSpPr>
+          <p:nvPr>
+            <p:ph type="title"/>
+          </p:nvPr>
+        </p:nvSpPr>
+        <p:spPr/>
+        <p:txBody>
+          <a:bodyPr/>
+          <a:lstStyle/>
+          <a:p>
+            <a:r>
+              <a:rPr lang="en-US" altLang="zh-CN" dirty="0"/>
+              <a:t>String Immutability </a:t>
+            </a:r>
+            <a:endParaRPr lang="zh-CN" altLang="en-US" dirty="0"/>
+          </a:p>
+        </p:txBody>
+      </p:sp>
+      <p:sp>
+        <p:nvSpPr>
+          <p:cNvPr id="3" name="Content Placeholder 2">
+            <a:extLst>
+              <a:ext uri="{FF2B5EF4-FFF2-40B4-BE49-F238E27FC236}">
+                <a16:creationId xmlns:a16="http://schemas.microsoft.com/office/drawing/2014/main" id="{479956C7-B121-6CC3-D8AF-264BB7C44F6A}"/>
+              </a:ext>
+            </a:extLst>
+          </p:cNvPr>
+          <p:cNvSpPr>
+            <a:spLocks noGrp="1"/>
+          </p:cNvSpPr>
+          <p:nvPr>
+            <p:ph idx="1"/>
+          </p:nvPr>
+        </p:nvSpPr>
+        <p:spPr/>
+        <p:txBody>
+          <a:bodyPr/>
+          <a:lstStyle/>
+          <a:p>
+            <a:r>
+              <a:rPr lang="en-US" altLang="zh-CN" dirty="0"/>
+              <a:t>Immutable means “cannot be changed”</a:t>
+            </a:r>
+          </a:p>
+          <a:p>
+            <a:r>
+              <a:rPr lang="en-US" altLang="zh-CN" dirty="0"/>
+              <a:t>Strings are immutable, meaning once they are created, they cannot be changed, but only reassigned</a:t>
+            </a:r>
+          </a:p>
+          <a:p>
+            <a:r>
+              <a:rPr lang="en-US" altLang="zh-CN" dirty="0"/>
+              <a:t>Example</a:t>
+            </a:r>
+          </a:p>
+          <a:p>
+            <a:pPr lvl="1"/>
+            <a:r>
+              <a:rPr lang="en-US" altLang="zh-CN" dirty="0"/>
+              <a:t>String </a:t>
+            </a:r>
+            <a:r>
+              <a:rPr lang="en-US" altLang="zh-CN" dirty="0" err="1"/>
+              <a:t>fName</a:t>
+            </a:r>
+            <a:r>
+              <a:rPr lang="en-US" altLang="zh-CN" dirty="0"/>
+              <a:t>=“Siwen”</a:t>
+            </a:r>
+          </a:p>
+          <a:p>
+            <a:pPr lvl="1"/>
+            <a:r>
+              <a:rPr lang="en-US" altLang="zh-CN" dirty="0" err="1"/>
+              <a:t>fName</a:t>
+            </a:r>
+            <a:r>
+              <a:rPr lang="en-US" altLang="zh-CN" dirty="0"/>
+              <a:t> + “ Wang”</a:t>
+            </a:r>
+            <a:endParaRPr lang="zh-CN" altLang="en-US" dirty="0"/>
+          </a:p>
+        </p:txBody>
+      </p:sp>
+      <p:sp>
+        <p:nvSpPr>
+          <p:cNvPr id="4" name="Multiplication Sign 3">
+            <a:extLst>
+              <a:ext uri="{FF2B5EF4-FFF2-40B4-BE49-F238E27FC236}">
+                <a16:creationId xmlns:a16="http://schemas.microsoft.com/office/drawing/2014/main" id="{179A54AC-68EC-3662-39D2-9B4E50A5583F}"/>
+              </a:ext>
+            </a:extLst>
+          </p:cNvPr>
+          <p:cNvSpPr/>
+          <p:nvPr/>
+        </p:nvSpPr>
+        <p:spPr>
+          <a:xfrm>
+            <a:off x="1366683" y="3965115"/>
+            <a:ext cx="2762865" cy="825909"/>
+          </a:xfrm>
+          <a:prstGeom prst="mathMultiply">
+            <a:avLst/>
+          </a:prstGeom>
+          <a:solidFill>
+            <a:srgbClr val="FF0000"/>
+          </a:solidFill>
+        </p:spPr>
+        <p:style>
+          <a:lnRef idx="2">
+            <a:schemeClr val="accent1">
+              <a:shade val="15000"/>
+            </a:schemeClr>
+          </a:lnRef>
+          <a:fillRef idx="1">
+            <a:schemeClr val="accent1"/>
+          </a:fillRef>
+          <a:effectRef idx="0">
+            <a:schemeClr val="accent1"/>
+          </a:effectRef>
+          <a:fontRef idx="minor">
+            <a:schemeClr val="lt1"/>
+          </a:fontRef>
+        </p:style>
+        <p:txBody>
+          <a:bodyPr rtlCol="0" anchor="ctr"/>
+          <a:lstStyle/>
+          <a:p>
+            <a:pPr algn="ctr"/>
+            <a:endParaRPr lang="zh-CN" altLang="en-US"/>
+          </a:p>
+        </p:txBody>
+      </p:sp>
+    </p:spTree>
+    <p:extLst>
+      <p:ext uri="{BB962C8B-B14F-4D97-AF65-F5344CB8AC3E}">
+        <p14:creationId xmlns:p14="http://schemas.microsoft.com/office/powerpoint/2010/main" val="573284155"/>
+      </p:ext>
+    </p:extLst>
+  </p:cSld>
+  <p:clrMapOvr>
+    <a:masterClrMapping/>
+  </p:clrMapOvr>
+  <p:timing>
+    <p:tnLst>
+      <p:par>
+        <p:cTn id="1" dur="indefinite" restart="never" nodeType="tmRoot">
+          <p:childTnLst>
+            <p:seq concurrent="1" nextAc="seek">
+              <p:cTn id="2" dur="indefinite" nodeType="mainSeq">
+                <p:childTnLst>
+                  <p:par>
+                    <p:cTn id="3" fill="hold">
+                      <p:stCondLst>
+                        <p:cond delay="indefinite"/>
+                      </p:stCondLst>
+                      <p:childTnLst>
+                        <p:par>
+                          <p:cTn id="4" fill="hold">
+                            <p:stCondLst>
+                              <p:cond delay="0"/>
+                            </p:stCondLst>
+                            <p:childTnLst>
+                              <p:par>
+                                <p:cTn id="5" presetID="10" presetClass="entr" presetSubtype="0" fill="hold" nodeType="clickEffect">
+                                  <p:stCondLst>
+                                    <p:cond delay="0"/>
+                                  </p:stCondLst>
+                                  <p:childTnLst>
+                                    <p:set>
+                                      <p:cBhvr>
+                                        <p:cTn id="6" dur="1" fill="hold">
+                                          <p:stCondLst>
+                                            <p:cond delay="0"/>
+                                          </p:stCondLst>
+                                        </p:cTn>
+                                        <p:tgtEl>
+                                          <p:spTgt spid="3">
+                                            <p:txEl>
+                                              <p:pRg st="0" end="0"/>
+                                            </p:txEl>
+                                          </p:spTgt>
+                                        </p:tgtEl>
+                                        <p:attrNameLst>
+                                          <p:attrName>style.visibility</p:attrName>
+                                        </p:attrNameLst>
+                                      </p:cBhvr>
+                                      <p:to>
+                                        <p:strVal val="visible"/>
+                                      </p:to>
+                                    </p:set>
+                                    <p:animEffect transition="in" filter="fade">
+                                      <p:cBhvr>
+                                        <p:cTn id="7" dur="500"/>
+                                        <p:tgtEl>
+                                          <p:spTgt spid="3">
+                                            <p:txEl>
+                                              <p:pRg st="0" end="0"/>
+                                            </p:txEl>
+                                          </p:spTgt>
+                                        </p:tgtEl>
+                                      </p:cBhvr>
+                                    </p:animEffect>
+                                  </p:childTnLst>
+                                </p:cTn>
+                              </p:par>
+                            </p:childTnLst>
+                          </p:cTn>
+                        </p:par>
+                      </p:childTnLst>
+                    </p:cTn>
+                  </p:par>
+                  <p:par>
+                    <p:cTn id="8" fill="hold">
+                      <p:stCondLst>
+                        <p:cond delay="indefinite"/>
+                      </p:stCondLst>
+                      <p:childTnLst>
+                        <p:par>
+                          <p:cTn id="9" fill="hold">
+                            <p:stCondLst>
+                              <p:cond delay="0"/>
+                            </p:stCondLst>
+                            <p:childTnLst>
+                              <p:par>
+                                <p:cTn id="10" presetID="10" presetClass="entr" presetSubtype="0" fill="hold" nodeType="clickEffect">
+                                  <p:stCondLst>
+                                    <p:cond delay="0"/>
+                                  </p:stCondLst>
+                                  <p:childTnLst>
+                                    <p:set>
+                                      <p:cBhvr>
+                                        <p:cTn id="11" dur="1" fill="hold">
+                                          <p:stCondLst>
+                                            <p:cond delay="0"/>
+                                          </p:stCondLst>
+                                        </p:cTn>
+                                        <p:tgtEl>
+                                          <p:spTgt spid="3">
+                                            <p:txEl>
+                                              <p:pRg st="1" end="1"/>
+                                            </p:txEl>
+                                          </p:spTgt>
+                                        </p:tgtEl>
+                                        <p:attrNameLst>
+                                          <p:attrName>style.visibility</p:attrName>
+                                        </p:attrNameLst>
+                                      </p:cBhvr>
+                                      <p:to>
+                                        <p:strVal val="visible"/>
+                                      </p:to>
+                                    </p:set>
+                                    <p:animEffect transition="in" filter="fade">
+                                      <p:cBhvr>
+                                        <p:cTn id="12" dur="500"/>
+                                        <p:tgtEl>
+                                          <p:spTgt spid="3">
+                                            <p:txEl>
+                                              <p:pRg st="1" end="1"/>
+                                            </p:txEl>
+                                          </p:spTgt>
+                                        </p:tgtEl>
+                                      </p:cBhvr>
+                                    </p:animEffect>
+                                  </p:childTnLst>
+                                </p:cTn>
+                              </p:par>
+                            </p:childTnLst>
+                          </p:cTn>
+                        </p:par>
+                      </p:childTnLst>
+                    </p:cTn>
+                  </p:par>
+                  <p:par>
+                    <p:cTn id="13" fill="hold">
+                      <p:stCondLst>
+                        <p:cond delay="indefinite"/>
+                      </p:stCondLst>
+                      <p:childTnLst>
+                        <p:par>
+                          <p:cTn id="14" fill="hold">
+                            <p:stCondLst>
+                              <p:cond delay="0"/>
+                            </p:stCondLst>
+                            <p:childTnLst>
+                              <p:par>
+                                <p:cTn id="15" presetID="10" presetClass="entr" presetSubtype="0" fill="hold" nodeType="clickEffect">
+                                  <p:stCondLst>
+                                    <p:cond delay="0"/>
+                                  </p:stCondLst>
+                                  <p:childTnLst>
+                                    <p:set>
+                                      <p:cBhvr>
+                                        <p:cTn id="16" dur="1" fill="hold">
+                                          <p:stCondLst>
+                                            <p:cond delay="0"/>
+                                          </p:stCondLst>
+                                        </p:cTn>
+                                        <p:tgtEl>
+                                          <p:spTgt spid="3">
+                                            <p:txEl>
+                                              <p:pRg st="2" end="2"/>
+                                            </p:txEl>
+                                          </p:spTgt>
+                                        </p:tgtEl>
+                                        <p:attrNameLst>
+                                          <p:attrName>style.visibility</p:attrName>
+                                        </p:attrNameLst>
+                                      </p:cBhvr>
+                                      <p:to>
+                                        <p:strVal val="visible"/>
+                                      </p:to>
+                                    </p:set>
+                                    <p:animEffect transition="in" filter="fade">
+                                      <p:cBhvr>
+                                        <p:cTn id="17" dur="500"/>
+                                        <p:tgtEl>
+                                          <p:spTgt spid="3">
+                                            <p:txEl>
+                                              <p:pRg st="2" end="2"/>
+                                            </p:txEl>
+                                          </p:spTgt>
+                                        </p:tgtEl>
+                                      </p:cBhvr>
+                                    </p:animEffect>
+                                  </p:childTnLst>
+                                </p:cTn>
+                              </p:par>
+                              <p:par>
+                                <p:cTn id="18" presetID="10" presetClass="entr" presetSubtype="0" fill="hold" nodeType="withEffect">
+                                  <p:stCondLst>
+                                    <p:cond delay="0"/>
+                                  </p:stCondLst>
+                                  <p:childTnLst>
+                                    <p:set>
+                                      <p:cBhvr>
+                                        <p:cTn id="19" dur="1" fill="hold">
+                                          <p:stCondLst>
+                                            <p:cond delay="0"/>
+                                          </p:stCondLst>
+                                        </p:cTn>
+                                        <p:tgtEl>
+                                          <p:spTgt spid="3">
+                                            <p:txEl>
+                                              <p:pRg st="3" end="3"/>
+                                            </p:txEl>
+                                          </p:spTgt>
+                                        </p:tgtEl>
+                                        <p:attrNameLst>
+                                          <p:attrName>style.visibility</p:attrName>
+                                        </p:attrNameLst>
+                                      </p:cBhvr>
+                                      <p:to>
+                                        <p:strVal val="visible"/>
+                                      </p:to>
+                                    </p:set>
+                                    <p:animEffect transition="in" filter="fade">
+                                      <p:cBhvr>
+                                        <p:cTn id="20" dur="500"/>
+                                        <p:tgtEl>
+                                          <p:spTgt spid="3">
+                                            <p:txEl>
+                                              <p:pRg st="3" end="3"/>
+                                            </p:txEl>
+                                          </p:spTgt>
+                                        </p:tgtEl>
+                                      </p:cBhvr>
+                                    </p:animEffect>
+                                  </p:childTnLst>
+                                </p:cTn>
+                              </p:par>
+                              <p:par>
+                                <p:cTn id="21" presetID="10" presetClass="entr" presetSubtype="0" fill="hold" nodeType="withEffect">
+                                  <p:stCondLst>
+                                    <p:cond delay="0"/>
+                                  </p:stCondLst>
+                                  <p:childTnLst>
+                                    <p:set>
+                                      <p:cBhvr>
+                                        <p:cTn id="22" dur="1" fill="hold">
+                                          <p:stCondLst>
+                                            <p:cond delay="0"/>
+                                          </p:stCondLst>
+                                        </p:cTn>
+                                        <p:tgtEl>
+                                          <p:spTgt spid="3">
+                                            <p:txEl>
+                                              <p:pRg st="4" end="4"/>
+                                            </p:txEl>
+                                          </p:spTgt>
+                                        </p:tgtEl>
+                                        <p:attrNameLst>
+                                          <p:attrName>style.visibility</p:attrName>
+                                        </p:attrNameLst>
+                                      </p:cBhvr>
+                                      <p:to>
+                                        <p:strVal val="visible"/>
+                                      </p:to>
+                                    </p:set>
+                                    <p:animEffect transition="in" filter="fade">
+                                      <p:cBhvr>
+                                        <p:cTn id="23" dur="500"/>
+                                        <p:tgtEl>
+                                          <p:spTgt spid="3">
+                                            <p:txEl>
+                                              <p:pRg st="4" end="4"/>
+                                            </p:txEl>
+                                          </p:spTgt>
+                                        </p:tgtEl>
+                                      </p:cBhvr>
+                                    </p:animEffect>
+                                  </p:childTnLst>
+                                </p:cTn>
+                              </p:par>
+                            </p:childTnLst>
+                          </p:cTn>
+                        </p:par>
+                      </p:childTnLst>
+                    </p:cTn>
+                  </p:par>
+                  <p:par>
+                    <p:cTn id="24" fill="hold">
+                      <p:stCondLst>
+                        <p:cond delay="indefinite"/>
+                      </p:stCondLst>
+                      <p:childTnLst>
+                        <p:par>
+                          <p:cTn id="25" fill="hold">
+                            <p:stCondLst>
+                              <p:cond delay="0"/>
+                            </p:stCondLst>
+                            <p:childTnLst>
+                              <p:par>
+                                <p:cTn id="26" presetID="10" presetClass="entr" presetSubtype="0" fill="hold" grpId="0" nodeType="clickEffect">
+                                  <p:stCondLst>
+                                    <p:cond delay="0"/>
+                                  </p:stCondLst>
+                                  <p:childTnLst>
+                                    <p:set>
+                                      <p:cBhvr>
+                                        <p:cTn id="27" dur="1" fill="hold">
+                                          <p:stCondLst>
+                                            <p:cond delay="0"/>
+                                          </p:stCondLst>
+                                        </p:cTn>
+                                        <p:tgtEl>
+                                          <p:spTgt spid="4"/>
+                                        </p:tgtEl>
+                                        <p:attrNameLst>
+                                          <p:attrName>style.visibility</p:attrName>
+                                        </p:attrNameLst>
+                                      </p:cBhvr>
+                                      <p:to>
+                                        <p:strVal val="visible"/>
+                                      </p:to>
+                                    </p:set>
+                                    <p:animEffect transition="in" filter="fade">
+                                      <p:cBhvr>
+                                        <p:cTn id="28" dur="500"/>
+                                        <p:tgtEl>
+                                          <p:spTgt spid="4"/>
+                                        </p:tgtEl>
+                                      </p:cBhvr>
+                                    </p:animEffect>
+                                  </p:childTnLst>
+                                </p:cTn>
+                              </p:par>
+                            </p:childTnLst>
+                          </p:cTn>
+                        </p:par>
+                      </p:childTnLst>
+                    </p:cTn>
+                  </p:par>
+                </p:childTnLst>
+              </p:cTn>
+              <p:prevCondLst>
+                <p:cond evt="onPrev" delay="0">
+                  <p:tgtEl>
+                    <p:sldTgt/>
+                  </p:tgtEl>
+                </p:cond>
+              </p:prevCondLst>
+              <p:nextCondLst>
+                <p:cond evt="onNext" delay="0">
+                  <p:tgtEl>
+                    <p:sldTgt/>
+                  </p:tgtEl>
+                </p:cond>
+              </p:nextCondLst>
+            </p:seq>
+          </p:childTnLst>
+        </p:cTn>
+      </p:par>
+    </p:tnLst>
+    <p:bldLst>
+      <p:bldP spid="4" grpId="0" animBg="1"/>
+    </p:bldLst>
+  </p:timing>
+</p:sld>
+</file>
+
+<file path=ppt/slides/slide21.xml><?xml version="1.0" encoding="utf-8"?>
+<p:sld xmlns:a="http://schemas.openxmlformats.org/drawingml/2006/main" xmlns:r="http://schemas.openxmlformats.org/officeDocument/2006/relationships" xmlns:p="http://schemas.openxmlformats.org/presentationml/2006/main">
+  <p:cSld>
+    <p:spTree>
+      <p:nvGrpSpPr>
+        <p:cNvPr id="1" name=""/>
+        <p:cNvGrpSpPr/>
+        <p:nvPr/>
+      </p:nvGrpSpPr>
+      <p:grpSpPr>
+        <a:xfrm>
+          <a:off x="0" y="0"/>
+          <a:ext cx="0" cy="0"/>
+          <a:chOff x="0" y="0"/>
+          <a:chExt cx="0" cy="0"/>
+        </a:xfrm>
+      </p:grpSpPr>
+      <p:sp>
+        <p:nvSpPr>
+          <p:cNvPr id="2" name="Title 1">
+            <a:extLst>
+              <a:ext uri="{FF2B5EF4-FFF2-40B4-BE49-F238E27FC236}">
+                <a16:creationId xmlns:a16="http://schemas.microsoft.com/office/drawing/2014/main" id="{D39FEFB4-A54E-DECC-BBAD-EDE8B6BBD3F5}"/>
+              </a:ext>
+            </a:extLst>
+          </p:cNvPr>
+          <p:cNvSpPr>
+            <a:spLocks noGrp="1"/>
+          </p:cNvSpPr>
+          <p:nvPr>
+            <p:ph type="title"/>
+          </p:nvPr>
+        </p:nvSpPr>
+        <p:spPr/>
+        <p:txBody>
+          <a:bodyPr/>
+          <a:lstStyle/>
+          <a:p>
+            <a:r>
+              <a:rPr lang="en-US" altLang="zh-CN" dirty="0"/>
+              <a:t>String Concatenation  </a:t>
+            </a:r>
+            <a:endParaRPr lang="zh-CN" altLang="en-US" dirty="0"/>
+          </a:p>
+        </p:txBody>
+      </p:sp>
+      <p:sp>
+        <p:nvSpPr>
+          <p:cNvPr id="3" name="Content Placeholder 2">
+            <a:extLst>
+              <a:ext uri="{FF2B5EF4-FFF2-40B4-BE49-F238E27FC236}">
+                <a16:creationId xmlns:a16="http://schemas.microsoft.com/office/drawing/2014/main" id="{BF4805A2-1CAC-8404-C8B5-0EFB4D1CE301}"/>
+              </a:ext>
+            </a:extLst>
+          </p:cNvPr>
+          <p:cNvSpPr>
+            <a:spLocks noGrp="1"/>
+          </p:cNvSpPr>
+          <p:nvPr>
+            <p:ph idx="1"/>
+          </p:nvPr>
+        </p:nvSpPr>
+        <p:spPr>
+          <a:xfrm>
+            <a:off x="838200" y="1690688"/>
+            <a:ext cx="10515600" cy="4899640"/>
+          </a:xfrm>
+        </p:spPr>
+        <p:txBody>
+          <a:bodyPr>
+            <a:normAutofit fontScale="92500" lnSpcReduction="10000"/>
+          </a:bodyPr>
+          <a:lstStyle/>
+          <a:p>
+            <a:r>
+              <a:rPr lang="en-US" altLang="zh-CN" dirty="0"/>
+              <a:t>Simple Case:</a:t>
+            </a:r>
+          </a:p>
+          <a:p>
+            <a:pPr lvl="1"/>
+            <a:r>
+              <a:rPr lang="en-US" altLang="zh-CN" dirty="0"/>
+              <a:t>String </a:t>
+            </a:r>
+            <a:r>
+              <a:rPr lang="en-US" altLang="zh-CN" dirty="0" err="1"/>
+              <a:t>fName</a:t>
+            </a:r>
+            <a:r>
+              <a:rPr lang="en-US" altLang="zh-CN" dirty="0"/>
+              <a:t>=“Siwen ”</a:t>
+            </a:r>
+          </a:p>
+          <a:p>
+            <a:pPr lvl="1"/>
+            <a:r>
+              <a:rPr lang="en-US" altLang="zh-CN" dirty="0"/>
+              <a:t>String </a:t>
+            </a:r>
+            <a:r>
+              <a:rPr lang="en-US" altLang="zh-CN" dirty="0" err="1"/>
+              <a:t>lName</a:t>
+            </a:r>
+            <a:r>
+              <a:rPr lang="en-US" altLang="zh-CN" dirty="0"/>
+              <a:t>=“Wang”</a:t>
+            </a:r>
+          </a:p>
+          <a:p>
+            <a:pPr lvl="1"/>
+            <a:r>
+              <a:rPr lang="en-US" altLang="zh-CN" dirty="0"/>
+              <a:t>String </a:t>
+            </a:r>
+            <a:r>
+              <a:rPr lang="en-US" altLang="zh-CN" dirty="0" err="1"/>
+              <a:t>fullName</a:t>
+            </a:r>
+            <a:r>
+              <a:rPr lang="en-US" altLang="zh-CN" dirty="0"/>
+              <a:t>=</a:t>
+            </a:r>
+            <a:r>
+              <a:rPr lang="en-US" altLang="zh-CN" dirty="0" err="1"/>
+              <a:t>fName+lName</a:t>
+            </a:r>
+            <a:endParaRPr lang="en-US" altLang="zh-CN" dirty="0"/>
+          </a:p>
+          <a:p>
+            <a:r>
+              <a:rPr lang="en-US" altLang="zh-CN" dirty="0"/>
+              <a:t>Slightly complicated case:</a:t>
+            </a:r>
+          </a:p>
+          <a:p>
+            <a:pPr lvl="1"/>
+            <a:r>
+              <a:rPr lang="en-US" altLang="zh-CN" dirty="0"/>
+              <a:t>String </a:t>
+            </a:r>
+            <a:r>
+              <a:rPr lang="en-US" altLang="zh-CN" dirty="0" err="1"/>
+              <a:t>fName</a:t>
+            </a:r>
+            <a:r>
+              <a:rPr lang="en-US" altLang="zh-CN" dirty="0"/>
+              <a:t>=“Siwen”</a:t>
+            </a:r>
+          </a:p>
+          <a:p>
+            <a:pPr lvl="1"/>
+            <a:r>
+              <a:rPr lang="en-US" altLang="zh-CN" dirty="0"/>
+              <a:t>int age=26</a:t>
+            </a:r>
+          </a:p>
+          <a:p>
+            <a:pPr lvl="1"/>
+            <a:r>
+              <a:rPr lang="en-US" altLang="zh-CN" dirty="0" err="1"/>
+              <a:t>System.out.println</a:t>
+            </a:r>
+            <a:r>
+              <a:rPr lang="en-US" altLang="zh-CN" dirty="0"/>
+              <a:t>(</a:t>
+            </a:r>
+            <a:r>
+              <a:rPr lang="en-US" altLang="zh-CN" dirty="0" err="1"/>
+              <a:t>fName</a:t>
+            </a:r>
+            <a:r>
+              <a:rPr lang="en-US" altLang="zh-CN" dirty="0"/>
+              <a:t>+” is” + age)</a:t>
+            </a:r>
+          </a:p>
+          <a:p>
+            <a:r>
+              <a:rPr lang="en-US" altLang="zh-CN" dirty="0"/>
+              <a:t>Exam Question:</a:t>
+            </a:r>
+          </a:p>
+          <a:p>
+            <a:pPr lvl="1"/>
+            <a:r>
+              <a:rPr lang="en-US" altLang="zh-CN" dirty="0"/>
+              <a:t>String </a:t>
+            </a:r>
+            <a:r>
+              <a:rPr lang="en-US" altLang="zh-CN" dirty="0" err="1"/>
+              <a:t>fName</a:t>
+            </a:r>
+            <a:r>
+              <a:rPr lang="en-US" altLang="zh-CN" dirty="0"/>
+              <a:t>=“Siwen”</a:t>
+            </a:r>
+          </a:p>
+          <a:p>
+            <a:pPr lvl="1"/>
+            <a:r>
+              <a:rPr lang="en-US" altLang="zh-CN" dirty="0"/>
+              <a:t>int age =14</a:t>
+            </a:r>
+          </a:p>
+          <a:p>
+            <a:pPr lvl="1"/>
+            <a:r>
+              <a:rPr lang="en-US" altLang="zh-CN" dirty="0"/>
+              <a:t>int age2 = 12</a:t>
+            </a:r>
+          </a:p>
+          <a:p>
+            <a:pPr lvl="1"/>
+            <a:r>
+              <a:rPr lang="en-US" altLang="zh-CN" dirty="0" err="1"/>
+              <a:t>System.out.println</a:t>
+            </a:r>
+            <a:r>
+              <a:rPr lang="en-US" altLang="zh-CN" dirty="0"/>
+              <a:t>(</a:t>
+            </a:r>
+            <a:r>
+              <a:rPr lang="en-US" altLang="zh-CN" dirty="0" err="1"/>
+              <a:t>fName</a:t>
+            </a:r>
+            <a:r>
+              <a:rPr lang="en-US" altLang="zh-CN" dirty="0"/>
+              <a:t>+” is ” + age + age2)</a:t>
+            </a:r>
+          </a:p>
+          <a:p>
+            <a:pPr lvl="1"/>
+            <a:endParaRPr lang="en-US" altLang="zh-CN" dirty="0"/>
+          </a:p>
+          <a:p>
+            <a:pPr lvl="1"/>
+            <a:endParaRPr lang="en-US" altLang="zh-CN" dirty="0"/>
+          </a:p>
+          <a:p>
+            <a:pPr lvl="1"/>
+            <a:endParaRPr lang="en-US" altLang="zh-CN" dirty="0"/>
+          </a:p>
+        </p:txBody>
+      </p:sp>
+    </p:spTree>
+    <p:extLst>
+      <p:ext uri="{BB962C8B-B14F-4D97-AF65-F5344CB8AC3E}">
+        <p14:creationId xmlns:p14="http://schemas.microsoft.com/office/powerpoint/2010/main" val="2135655416"/>
+      </p:ext>
+    </p:extLst>
+  </p:cSld>
+  <p:clrMapOvr>
+    <a:masterClrMapping/>
+  </p:clrMapOvr>
+  <p:timing>
+    <p:tnLst>
+      <p:par>
+        <p:cTn id="1" dur="indefinite" restart="never" nodeType="tmRoot">
+          <p:childTnLst>
+            <p:seq concurrent="1" nextAc="seek">
+              <p:cTn id="2" dur="indefinite" nodeType="mainSeq">
+                <p:childTnLst>
+                  <p:par>
+                    <p:cTn id="3" fill="hold">
+                      <p:stCondLst>
+                        <p:cond delay="indefinite"/>
+                      </p:stCondLst>
+                      <p:childTnLst>
+                        <p:par>
+                          <p:cTn id="4" fill="hold">
+                            <p:stCondLst>
+                              <p:cond delay="0"/>
+                            </p:stCondLst>
+                            <p:childTnLst>
+                              <p:par>
+                                <p:cTn id="5" presetID="10" presetClass="entr" presetSubtype="0" fill="hold" nodeType="clickEffect">
+                                  <p:stCondLst>
+                                    <p:cond delay="0"/>
+                                  </p:stCondLst>
+                                  <p:childTnLst>
+                                    <p:set>
+                                      <p:cBhvr>
+                                        <p:cTn id="6" dur="1" fill="hold">
+                                          <p:stCondLst>
+                                            <p:cond delay="0"/>
+                                          </p:stCondLst>
+                                        </p:cTn>
+                                        <p:tgtEl>
+                                          <p:spTgt spid="3">
+                                            <p:txEl>
+                                              <p:pRg st="0" end="0"/>
+                                            </p:txEl>
+                                          </p:spTgt>
+                                        </p:tgtEl>
+                                        <p:attrNameLst>
+                                          <p:attrName>style.visibility</p:attrName>
+                                        </p:attrNameLst>
+                                      </p:cBhvr>
+                                      <p:to>
+                                        <p:strVal val="visible"/>
+                                      </p:to>
+                                    </p:set>
+                                    <p:animEffect transition="in" filter="fade">
+                                      <p:cBhvr>
+                                        <p:cTn id="7" dur="500"/>
+                                        <p:tgtEl>
+                                          <p:spTgt spid="3">
+                                            <p:txEl>
+                                              <p:pRg st="0" end="0"/>
+                                            </p:txEl>
+                                          </p:spTgt>
+                                        </p:tgtEl>
+                                      </p:cBhvr>
+                                    </p:animEffect>
+                                  </p:childTnLst>
+                                </p:cTn>
+                              </p:par>
+                              <p:par>
+                                <p:cTn id="8" presetID="10" presetClass="entr" presetSubtype="0" fill="hold" nodeType="withEffect">
+                                  <p:stCondLst>
+                                    <p:cond delay="0"/>
+                                  </p:stCondLst>
+                                  <p:childTnLst>
+                                    <p:set>
+                                      <p:cBhvr>
+                                        <p:cTn id="9" dur="1" fill="hold">
+                                          <p:stCondLst>
+                                            <p:cond delay="0"/>
+                                          </p:stCondLst>
+                                        </p:cTn>
+                                        <p:tgtEl>
+                                          <p:spTgt spid="3">
+                                            <p:txEl>
+                                              <p:pRg st="1" end="1"/>
+                                            </p:txEl>
+                                          </p:spTgt>
+                                        </p:tgtEl>
+                                        <p:attrNameLst>
+                                          <p:attrName>style.visibility</p:attrName>
+                                        </p:attrNameLst>
+                                      </p:cBhvr>
+                                      <p:to>
+                                        <p:strVal val="visible"/>
+                                      </p:to>
+                                    </p:set>
+                                    <p:animEffect transition="in" filter="fade">
+                                      <p:cBhvr>
+                                        <p:cTn id="10" dur="500"/>
+                                        <p:tgtEl>
+                                          <p:spTgt spid="3">
+                                            <p:txEl>
+                                              <p:pRg st="1" end="1"/>
+                                            </p:txEl>
+                                          </p:spTgt>
+                                        </p:tgtEl>
+                                      </p:cBhvr>
+                                    </p:animEffect>
+                                  </p:childTnLst>
+                                </p:cTn>
+                              </p:par>
+                              <p:par>
+                                <p:cTn id="11" presetID="10" presetClass="entr" presetSubtype="0" fill="hold" nodeType="withEffect">
+                                  <p:stCondLst>
+                                    <p:cond delay="0"/>
+                                  </p:stCondLst>
+                                  <p:childTnLst>
+                                    <p:set>
+                                      <p:cBhvr>
+                                        <p:cTn id="12" dur="1" fill="hold">
+                                          <p:stCondLst>
+                                            <p:cond delay="0"/>
+                                          </p:stCondLst>
+                                        </p:cTn>
+                                        <p:tgtEl>
+                                          <p:spTgt spid="3">
+                                            <p:txEl>
+                                              <p:pRg st="2" end="2"/>
+                                            </p:txEl>
+                                          </p:spTgt>
+                                        </p:tgtEl>
+                                        <p:attrNameLst>
+                                          <p:attrName>style.visibility</p:attrName>
+                                        </p:attrNameLst>
+                                      </p:cBhvr>
+                                      <p:to>
+                                        <p:strVal val="visible"/>
+                                      </p:to>
+                                    </p:set>
+                                    <p:animEffect transition="in" filter="fade">
+                                      <p:cBhvr>
+                                        <p:cTn id="13" dur="500"/>
+                                        <p:tgtEl>
+                                          <p:spTgt spid="3">
+                                            <p:txEl>
+                                              <p:pRg st="2" end="2"/>
+                                            </p:txEl>
+                                          </p:spTgt>
+                                        </p:tgtEl>
+                                      </p:cBhvr>
+                                    </p:animEffect>
+                                  </p:childTnLst>
+                                </p:cTn>
+                              </p:par>
+                              <p:par>
+                                <p:cTn id="14" presetID="10" presetClass="entr" presetSubtype="0" fill="hold" nodeType="withEffect">
+                                  <p:stCondLst>
+                                    <p:cond delay="0"/>
+                                  </p:stCondLst>
+                                  <p:childTnLst>
+                                    <p:set>
+                                      <p:cBhvr>
+                                        <p:cTn id="15" dur="1" fill="hold">
+                                          <p:stCondLst>
+                                            <p:cond delay="0"/>
+                                          </p:stCondLst>
+                                        </p:cTn>
+                                        <p:tgtEl>
+                                          <p:spTgt spid="3">
+                                            <p:txEl>
+                                              <p:pRg st="3" end="3"/>
+                                            </p:txEl>
+                                          </p:spTgt>
+                                        </p:tgtEl>
+                                        <p:attrNameLst>
+                                          <p:attrName>style.visibility</p:attrName>
+                                        </p:attrNameLst>
+                                      </p:cBhvr>
+                                      <p:to>
+                                        <p:strVal val="visible"/>
+                                      </p:to>
+                                    </p:set>
+                                    <p:animEffect transition="in" filter="fade">
+                                      <p:cBhvr>
+                                        <p:cTn id="16" dur="500"/>
+                                        <p:tgtEl>
+                                          <p:spTgt spid="3">
+                                            <p:txEl>
+                                              <p:pRg st="3" end="3"/>
+                                            </p:txEl>
+                                          </p:spTgt>
+                                        </p:tgtEl>
+                                      </p:cBhvr>
+                                    </p:animEffect>
+                                  </p:childTnLst>
+                                </p:cTn>
+                              </p:par>
+                            </p:childTnLst>
+                          </p:cTn>
+                        </p:par>
+                      </p:childTnLst>
+                    </p:cTn>
+                  </p:par>
+                  <p:par>
+                    <p:cTn id="17" fill="hold">
+                      <p:stCondLst>
+                        <p:cond delay="indefinite"/>
+                      </p:stCondLst>
+                      <p:childTnLst>
+                        <p:par>
+                          <p:cTn id="18" fill="hold">
+                            <p:stCondLst>
+                              <p:cond delay="0"/>
+                            </p:stCondLst>
+                            <p:childTnLst>
+                              <p:par>
+                                <p:cTn id="19" presetID="10" presetClass="entr" presetSubtype="0" fill="hold" nodeType="clickEffect">
+                                  <p:stCondLst>
+                                    <p:cond delay="0"/>
+                                  </p:stCondLst>
+                                  <p:childTnLst>
+                                    <p:set>
+                                      <p:cBhvr>
+                                        <p:cTn id="20" dur="1" fill="hold">
+                                          <p:stCondLst>
+                                            <p:cond delay="0"/>
+                                          </p:stCondLst>
+                                        </p:cTn>
+                                        <p:tgtEl>
+                                          <p:spTgt spid="3">
+                                            <p:txEl>
+                                              <p:pRg st="4" end="4"/>
+                                            </p:txEl>
+                                          </p:spTgt>
+                                        </p:tgtEl>
+                                        <p:attrNameLst>
+                                          <p:attrName>style.visibility</p:attrName>
+                                        </p:attrNameLst>
+                                      </p:cBhvr>
+                                      <p:to>
+                                        <p:strVal val="visible"/>
+                                      </p:to>
+                                    </p:set>
+                                    <p:animEffect transition="in" filter="fade">
+                                      <p:cBhvr>
+                                        <p:cTn id="21" dur="500"/>
+                                        <p:tgtEl>
+                                          <p:spTgt spid="3">
+                                            <p:txEl>
+                                              <p:pRg st="4" end="4"/>
+                                            </p:txEl>
+                                          </p:spTgt>
+                                        </p:tgtEl>
+                                      </p:cBhvr>
+                                    </p:animEffect>
+                                  </p:childTnLst>
+                                </p:cTn>
+                              </p:par>
+                              <p:par>
+                                <p:cTn id="22" presetID="10" presetClass="entr" presetSubtype="0" fill="hold" nodeType="withEffect">
+                                  <p:stCondLst>
+                                    <p:cond delay="0"/>
+                                  </p:stCondLst>
+                                  <p:childTnLst>
+                                    <p:set>
+                                      <p:cBhvr>
+                                        <p:cTn id="23" dur="1" fill="hold">
+                                          <p:stCondLst>
+                                            <p:cond delay="0"/>
+                                          </p:stCondLst>
+                                        </p:cTn>
+                                        <p:tgtEl>
+                                          <p:spTgt spid="3">
+                                            <p:txEl>
+                                              <p:pRg st="5" end="5"/>
+                                            </p:txEl>
+                                          </p:spTgt>
+                                        </p:tgtEl>
+                                        <p:attrNameLst>
+                                          <p:attrName>style.visibility</p:attrName>
+                                        </p:attrNameLst>
+                                      </p:cBhvr>
+                                      <p:to>
+                                        <p:strVal val="visible"/>
+                                      </p:to>
+                                    </p:set>
+                                    <p:animEffect transition="in" filter="fade">
+                                      <p:cBhvr>
+                                        <p:cTn id="24" dur="500"/>
+                                        <p:tgtEl>
+                                          <p:spTgt spid="3">
+                                            <p:txEl>
+                                              <p:pRg st="5" end="5"/>
+                                            </p:txEl>
+                                          </p:spTgt>
+                                        </p:tgtEl>
+                                      </p:cBhvr>
+                                    </p:animEffect>
+                                  </p:childTnLst>
+                                </p:cTn>
+                              </p:par>
+                              <p:par>
+                                <p:cTn id="25" presetID="10" presetClass="entr" presetSubtype="0" fill="hold" nodeType="withEffect">
+                                  <p:stCondLst>
+                                    <p:cond delay="0"/>
+                                  </p:stCondLst>
+                                  <p:childTnLst>
+                                    <p:set>
+                                      <p:cBhvr>
+                                        <p:cTn id="26" dur="1" fill="hold">
+                                          <p:stCondLst>
+                                            <p:cond delay="0"/>
+                                          </p:stCondLst>
+                                        </p:cTn>
+                                        <p:tgtEl>
+                                          <p:spTgt spid="3">
+                                            <p:txEl>
+                                              <p:pRg st="6" end="6"/>
+                                            </p:txEl>
+                                          </p:spTgt>
+                                        </p:tgtEl>
+                                        <p:attrNameLst>
+                                          <p:attrName>style.visibility</p:attrName>
+                                        </p:attrNameLst>
+                                      </p:cBhvr>
+                                      <p:to>
+                                        <p:strVal val="visible"/>
+                                      </p:to>
+                                    </p:set>
+                                    <p:animEffect transition="in" filter="fade">
+                                      <p:cBhvr>
+                                        <p:cTn id="27" dur="500"/>
+                                        <p:tgtEl>
+                                          <p:spTgt spid="3">
+                                            <p:txEl>
+                                              <p:pRg st="6" end="6"/>
+                                            </p:txEl>
+                                          </p:spTgt>
+                                        </p:tgtEl>
+                                      </p:cBhvr>
+                                    </p:animEffect>
+                                  </p:childTnLst>
+                                </p:cTn>
+                              </p:par>
+                              <p:par>
+                                <p:cTn id="28" presetID="10" presetClass="entr" presetSubtype="0" fill="hold" nodeType="withEffect">
+                                  <p:stCondLst>
+                                    <p:cond delay="0"/>
+                                  </p:stCondLst>
+                                  <p:childTnLst>
+                                    <p:set>
+                                      <p:cBhvr>
+                                        <p:cTn id="29" dur="1" fill="hold">
+                                          <p:stCondLst>
+                                            <p:cond delay="0"/>
+                                          </p:stCondLst>
+                                        </p:cTn>
+                                        <p:tgtEl>
+                                          <p:spTgt spid="3">
+                                            <p:txEl>
+                                              <p:pRg st="7" end="7"/>
+                                            </p:txEl>
+                                          </p:spTgt>
+                                        </p:tgtEl>
+                                        <p:attrNameLst>
+                                          <p:attrName>style.visibility</p:attrName>
+                                        </p:attrNameLst>
+                                      </p:cBhvr>
+                                      <p:to>
+                                        <p:strVal val="visible"/>
+                                      </p:to>
+                                    </p:set>
+                                    <p:animEffect transition="in" filter="fade">
+                                      <p:cBhvr>
+                                        <p:cTn id="30" dur="500"/>
+                                        <p:tgtEl>
+                                          <p:spTgt spid="3">
+                                            <p:txEl>
+                                              <p:pRg st="7" end="7"/>
+                                            </p:txEl>
+                                          </p:spTgt>
+                                        </p:tgtEl>
+                                      </p:cBhvr>
+                                    </p:animEffect>
+                                  </p:childTnLst>
+                                </p:cTn>
+                              </p:par>
+                            </p:childTnLst>
+                          </p:cTn>
+                        </p:par>
+                      </p:childTnLst>
+                    </p:cTn>
+                  </p:par>
+                  <p:par>
+                    <p:cTn id="31" fill="hold">
+                      <p:stCondLst>
+                        <p:cond delay="indefinite"/>
+                      </p:stCondLst>
+                      <p:childTnLst>
+                        <p:par>
+                          <p:cTn id="32" fill="hold">
+                            <p:stCondLst>
+                              <p:cond delay="0"/>
+                            </p:stCondLst>
+                            <p:childTnLst>
+                              <p:par>
+                                <p:cTn id="33" presetID="10" presetClass="entr" presetSubtype="0" fill="hold" nodeType="clickEffect">
+                                  <p:stCondLst>
+                                    <p:cond delay="0"/>
+                                  </p:stCondLst>
+                                  <p:childTnLst>
+                                    <p:set>
+                                      <p:cBhvr>
+                                        <p:cTn id="34" dur="1" fill="hold">
+                                          <p:stCondLst>
+                                            <p:cond delay="0"/>
+                                          </p:stCondLst>
+                                        </p:cTn>
+                                        <p:tgtEl>
+                                          <p:spTgt spid="3">
+                                            <p:txEl>
+                                              <p:pRg st="8" end="8"/>
+                                            </p:txEl>
+                                          </p:spTgt>
+                                        </p:tgtEl>
+                                        <p:attrNameLst>
+                                          <p:attrName>style.visibility</p:attrName>
+                                        </p:attrNameLst>
+                                      </p:cBhvr>
+                                      <p:to>
+                                        <p:strVal val="visible"/>
+                                      </p:to>
+                                    </p:set>
+                                    <p:animEffect transition="in" filter="fade">
+                                      <p:cBhvr>
+                                        <p:cTn id="35" dur="500"/>
+                                        <p:tgtEl>
+                                          <p:spTgt spid="3">
+                                            <p:txEl>
+                                              <p:pRg st="8" end="8"/>
+                                            </p:txEl>
+                                          </p:spTgt>
+                                        </p:tgtEl>
+                                      </p:cBhvr>
+                                    </p:animEffect>
+                                  </p:childTnLst>
+                                </p:cTn>
+                              </p:par>
+                              <p:par>
+                                <p:cTn id="36" presetID="10" presetClass="entr" presetSubtype="0" fill="hold" nodeType="withEffect">
+                                  <p:stCondLst>
+                                    <p:cond delay="0"/>
+                                  </p:stCondLst>
+                                  <p:childTnLst>
+                                    <p:set>
+                                      <p:cBhvr>
+                                        <p:cTn id="37" dur="1" fill="hold">
+                                          <p:stCondLst>
+                                            <p:cond delay="0"/>
+                                          </p:stCondLst>
+                                        </p:cTn>
+                                        <p:tgtEl>
+                                          <p:spTgt spid="3">
+                                            <p:txEl>
+                                              <p:pRg st="9" end="9"/>
+                                            </p:txEl>
+                                          </p:spTgt>
+                                        </p:tgtEl>
+                                        <p:attrNameLst>
+                                          <p:attrName>style.visibility</p:attrName>
+                                        </p:attrNameLst>
+                                      </p:cBhvr>
+                                      <p:to>
+                                        <p:strVal val="visible"/>
+                                      </p:to>
+                                    </p:set>
+                                    <p:animEffect transition="in" filter="fade">
+                                      <p:cBhvr>
+                                        <p:cTn id="38" dur="500"/>
+                                        <p:tgtEl>
+                                          <p:spTgt spid="3">
+                                            <p:txEl>
+                                              <p:pRg st="9" end="9"/>
+                                            </p:txEl>
+                                          </p:spTgt>
+                                        </p:tgtEl>
+                                      </p:cBhvr>
+                                    </p:animEffect>
+                                  </p:childTnLst>
+                                </p:cTn>
+                              </p:par>
+                              <p:par>
+                                <p:cTn id="39" presetID="10" presetClass="entr" presetSubtype="0" fill="hold" nodeType="withEffect">
+                                  <p:stCondLst>
+                                    <p:cond delay="0"/>
+                                  </p:stCondLst>
+                                  <p:childTnLst>
+                                    <p:set>
+                                      <p:cBhvr>
+                                        <p:cTn id="40" dur="1" fill="hold">
+                                          <p:stCondLst>
+                                            <p:cond delay="0"/>
+                                          </p:stCondLst>
+                                        </p:cTn>
+                                        <p:tgtEl>
+                                          <p:spTgt spid="3">
+                                            <p:txEl>
+                                              <p:pRg st="10" end="10"/>
+                                            </p:txEl>
+                                          </p:spTgt>
+                                        </p:tgtEl>
+                                        <p:attrNameLst>
+                                          <p:attrName>style.visibility</p:attrName>
+                                        </p:attrNameLst>
+                                      </p:cBhvr>
+                                      <p:to>
+                                        <p:strVal val="visible"/>
+                                      </p:to>
+                                    </p:set>
+                                    <p:animEffect transition="in" filter="fade">
+                                      <p:cBhvr>
+                                        <p:cTn id="41" dur="500"/>
+                                        <p:tgtEl>
+                                          <p:spTgt spid="3">
+                                            <p:txEl>
+                                              <p:pRg st="10" end="10"/>
+                                            </p:txEl>
+                                          </p:spTgt>
+                                        </p:tgtEl>
+                                      </p:cBhvr>
+                                    </p:animEffect>
+                                  </p:childTnLst>
+                                </p:cTn>
+                              </p:par>
+                              <p:par>
+                                <p:cTn id="42" presetID="10" presetClass="entr" presetSubtype="0" fill="hold" nodeType="withEffect">
+                                  <p:stCondLst>
+                                    <p:cond delay="0"/>
+                                  </p:stCondLst>
+                                  <p:childTnLst>
+                                    <p:set>
+                                      <p:cBhvr>
+                                        <p:cTn id="43" dur="1" fill="hold">
+                                          <p:stCondLst>
+                                            <p:cond delay="0"/>
+                                          </p:stCondLst>
+                                        </p:cTn>
+                                        <p:tgtEl>
+                                          <p:spTgt spid="3">
+                                            <p:txEl>
+                                              <p:pRg st="11" end="11"/>
+                                            </p:txEl>
+                                          </p:spTgt>
+                                        </p:tgtEl>
+                                        <p:attrNameLst>
+                                          <p:attrName>style.visibility</p:attrName>
+                                        </p:attrNameLst>
+                                      </p:cBhvr>
+                                      <p:to>
+                                        <p:strVal val="visible"/>
+                                      </p:to>
+                                    </p:set>
+                                    <p:animEffect transition="in" filter="fade">
+                                      <p:cBhvr>
+                                        <p:cTn id="44" dur="500"/>
+                                        <p:tgtEl>
+                                          <p:spTgt spid="3">
+                                            <p:txEl>
+                                              <p:pRg st="11" end="11"/>
+                                            </p:txEl>
+                                          </p:spTgt>
+                                        </p:tgtEl>
+                                      </p:cBhvr>
+                                    </p:animEffect>
+                                  </p:childTnLst>
+                                </p:cTn>
+                              </p:par>
+                              <p:par>
+                                <p:cTn id="45" presetID="10" presetClass="entr" presetSubtype="0" fill="hold" nodeType="withEffect">
+                                  <p:stCondLst>
+                                    <p:cond delay="0"/>
+                                  </p:stCondLst>
+                                  <p:childTnLst>
+                                    <p:set>
+                                      <p:cBhvr>
+                                        <p:cTn id="46" dur="1" fill="hold">
+                                          <p:stCondLst>
+                                            <p:cond delay="0"/>
+                                          </p:stCondLst>
+                                        </p:cTn>
+                                        <p:tgtEl>
+                                          <p:spTgt spid="3">
+                                            <p:txEl>
+                                              <p:pRg st="12" end="12"/>
+                                            </p:txEl>
+                                          </p:spTgt>
+                                        </p:tgtEl>
+                                        <p:attrNameLst>
+                                          <p:attrName>style.visibility</p:attrName>
+                                        </p:attrNameLst>
+                                      </p:cBhvr>
+                                      <p:to>
+                                        <p:strVal val="visible"/>
+                                      </p:to>
+                                    </p:set>
+                                    <p:animEffect transition="in" filter="fade">
+                                      <p:cBhvr>
+                                        <p:cTn id="47" dur="500"/>
+                                        <p:tgtEl>
+                                          <p:spTgt spid="3">
+                                            <p:txEl>
+                                              <p:pRg st="12" end="12"/>
+                                            </p:txEl>
+                                          </p:spTgt>
+                                        </p:tgtEl>
+                                      </p:cBhvr>
+                                    </p:animEffect>
+                                  </p:childTnLst>
+                                </p:cTn>
+                              </p:par>
+                            </p:childTnLst>
+                          </p:cTn>
+                        </p:par>
+                      </p:childTnLst>
+                    </p:cTn>
+                  </p:par>
+                </p:childTnLst>
+              </p:cTn>
+              <p:prevCondLst>
+                <p:cond evt="onPrev" delay="0">
+                  <p:tgtEl>
+                    <p:sldTgt/>
+                  </p:tgtEl>
+                </p:cond>
+              </p:prevCondLst>
+              <p:nextCondLst>
+                <p:cond evt="onNext" delay="0">
+                  <p:tgtEl>
+                    <p:sldTgt/>
+                  </p:tgtEl>
+                </p:cond>
+              </p:nextCondLst>
+            </p:seq>
+          </p:childTnLst>
+        </p:cTn>
+      </p:par>
+    </p:tnLst>
+  </p:timing>
+</p:sld>
+</file>
+
+<file path=ppt/slides/slide22.xml><?xml version="1.0" encoding="utf-8"?>
+<p:sld xmlns:a="http://schemas.openxmlformats.org/drawingml/2006/main" xmlns:r="http://schemas.openxmlformats.org/officeDocument/2006/relationships" xmlns:p="http://schemas.openxmlformats.org/presentationml/2006/main">
+  <p:cSld>
+    <p:spTree>
+      <p:nvGrpSpPr>
+        <p:cNvPr id="1" name=""/>
+        <p:cNvGrpSpPr/>
+        <p:nvPr/>
+      </p:nvGrpSpPr>
+      <p:grpSpPr>
+        <a:xfrm>
+          <a:off x="0" y="0"/>
+          <a:ext cx="0" cy="0"/>
+          <a:chOff x="0" y="0"/>
+          <a:chExt cx="0" cy="0"/>
+        </a:xfrm>
+      </p:grpSpPr>
+      <p:sp>
+        <p:nvSpPr>
+          <p:cNvPr id="2" name="Title 1">
+            <a:extLst>
+              <a:ext uri="{FF2B5EF4-FFF2-40B4-BE49-F238E27FC236}">
+                <a16:creationId xmlns:a16="http://schemas.microsoft.com/office/drawing/2014/main" id="{5797D500-6162-1C72-6B02-9F2BE933102A}"/>
+              </a:ext>
+            </a:extLst>
+          </p:cNvPr>
+          <p:cNvSpPr>
+            <a:spLocks noGrp="1"/>
+          </p:cNvSpPr>
+          <p:nvPr>
+            <p:ph type="title"/>
+          </p:nvPr>
+        </p:nvSpPr>
+        <p:spPr/>
+        <p:txBody>
+          <a:bodyPr/>
+          <a:lstStyle/>
+          <a:p>
+            <a:r>
+              <a:rPr lang="en-US" altLang="zh-CN" dirty="0"/>
+              <a:t>Use Escape Sequence (\) to type special letters</a:t>
+            </a:r>
+            <a:endParaRPr lang="zh-CN" altLang="en-US" dirty="0"/>
+          </a:p>
+        </p:txBody>
+      </p:sp>
+      <p:pic>
+        <p:nvPicPr>
+          <p:cNvPr id="5" name="Content Placeholder 4" descr="A blue and white box with black text&#10;&#10;AI-generated content may be incorrect.">
+            <a:extLst>
+              <a:ext uri="{FF2B5EF4-FFF2-40B4-BE49-F238E27FC236}">
+                <a16:creationId xmlns:a16="http://schemas.microsoft.com/office/drawing/2014/main" id="{33227962-50E5-1F2C-074B-02D05995DD7C}"/>
+              </a:ext>
+            </a:extLst>
+          </p:cNvPr>
+          <p:cNvPicPr>
+            <a:picLocks noGrp="1" noChangeAspect="1"/>
+          </p:cNvPicPr>
+          <p:nvPr>
+            <p:ph idx="1"/>
+          </p:nvPr>
+        </p:nvPicPr>
+        <p:blipFill>
+          <a:blip r:embed="rId3">
+            <a:extLst>
+              <a:ext uri="{28A0092B-C50C-407E-A947-70E740481C1C}">
+                <a14:useLocalDpi xmlns:a14="http://schemas.microsoft.com/office/drawing/2010/main" val="0"/>
+              </a:ext>
+            </a:extLst>
+          </a:blip>
+          <a:stretch>
+            <a:fillRect/>
+          </a:stretch>
+        </p:blipFill>
+        <p:spPr>
+          <a:xfrm>
+            <a:off x="838200" y="2078755"/>
+            <a:ext cx="10626163" cy="2798045"/>
+          </a:xfrm>
+        </p:spPr>
+      </p:pic>
+    </p:spTree>
+    <p:extLst>
+      <p:ext uri="{BB962C8B-B14F-4D97-AF65-F5344CB8AC3E}">
+        <p14:creationId xmlns:p14="http://schemas.microsoft.com/office/powerpoint/2010/main" val="3675616205"/>
+      </p:ext>
+    </p:extLst>
+  </p:cSld>
+  <p:clrMapOvr>
+    <a:masterClrMapping/>
+  </p:clrMapOvr>
+</p:sld>
+</file>
+
+<file path=ppt/slides/slide23.xml><?xml version="1.0" encoding="utf-8"?>
+<p:sld xmlns:a="http://schemas.openxmlformats.org/drawingml/2006/main" xmlns:r="http://schemas.openxmlformats.org/officeDocument/2006/relationships" xmlns:p="http://schemas.openxmlformats.org/presentationml/2006/main">
+  <p:cSld>
+    <p:spTree>
+      <p:nvGrpSpPr>
+        <p:cNvPr id="1" name=""/>
+        <p:cNvGrpSpPr/>
+        <p:nvPr/>
+      </p:nvGrpSpPr>
+      <p:grpSpPr>
+        <a:xfrm>
+          <a:off x="0" y="0"/>
+          <a:ext cx="0" cy="0"/>
+          <a:chOff x="0" y="0"/>
+          <a:chExt cx="0" cy="0"/>
+        </a:xfrm>
+      </p:grpSpPr>
+      <p:sp>
+        <p:nvSpPr>
+          <p:cNvPr id="2" name="Title 1">
+            <a:extLst>
+              <a:ext uri="{FF2B5EF4-FFF2-40B4-BE49-F238E27FC236}">
+                <a16:creationId xmlns:a16="http://schemas.microsoft.com/office/drawing/2014/main" id="{23947255-67BE-CA78-DF6C-21ABF5C1CCEC}"/>
+              </a:ext>
+            </a:extLst>
+          </p:cNvPr>
+          <p:cNvSpPr>
+            <a:spLocks noGrp="1"/>
+          </p:cNvSpPr>
+          <p:nvPr>
+            <p:ph type="title"/>
+          </p:nvPr>
+        </p:nvSpPr>
+        <p:spPr/>
+        <p:txBody>
+          <a:bodyPr/>
+          <a:lstStyle/>
+          <a:p>
+            <a:r>
+              <a:rPr lang="en-US" altLang="zh-CN" dirty="0"/>
+              <a:t>2.8. String Methods</a:t>
+            </a:r>
+            <a:endParaRPr lang="zh-CN" altLang="en-US" dirty="0"/>
+          </a:p>
+        </p:txBody>
+      </p:sp>
+      <p:sp>
+        <p:nvSpPr>
+          <p:cNvPr id="3" name="Content Placeholder 2">
+            <a:extLst>
+              <a:ext uri="{FF2B5EF4-FFF2-40B4-BE49-F238E27FC236}">
+                <a16:creationId xmlns:a16="http://schemas.microsoft.com/office/drawing/2014/main" id="{5251C396-144C-CEFA-FCA6-ACB8FA371623}"/>
+              </a:ext>
+            </a:extLst>
+          </p:cNvPr>
+          <p:cNvSpPr>
+            <a:spLocks noGrp="1"/>
+          </p:cNvSpPr>
+          <p:nvPr>
+            <p:ph idx="1"/>
+          </p:nvPr>
+        </p:nvSpPr>
+        <p:spPr/>
+        <p:txBody>
+          <a:bodyPr/>
+          <a:lstStyle/>
+          <a:p>
+            <a:r>
+              <a:rPr lang="en-US" altLang="zh-CN" dirty="0"/>
+              <a:t>Strings are Object, so they also have methods</a:t>
+            </a:r>
+          </a:p>
+          <a:p>
+            <a:r>
+              <a:rPr lang="en-US" altLang="zh-CN" dirty="0"/>
+              <a:t>Introducing Java Quick </a:t>
+            </a:r>
+            <a:r>
+              <a:rPr lang="en-US" altLang="zh-CN"/>
+              <a:t>Reference Sheet</a:t>
+            </a:r>
+            <a:endParaRPr lang="zh-CN" altLang="en-US"/>
+          </a:p>
+        </p:txBody>
+      </p:sp>
+    </p:spTree>
+    <p:extLst>
+      <p:ext uri="{BB962C8B-B14F-4D97-AF65-F5344CB8AC3E}">
+        <p14:creationId xmlns:p14="http://schemas.microsoft.com/office/powerpoint/2010/main" val="1400975779"/>
+      </p:ext>
+    </p:extLst>
+  </p:cSld>
+  <p:clrMapOvr>
+    <a:masterClrMapping/>
+  </p:clrMapOvr>
+</p:sld>
+</file>
+
+<file path=ppt/slides/slide24.xml><?xml version="1.0" encoding="utf-8"?>
+<p:sld xmlns:a="http://schemas.openxmlformats.org/drawingml/2006/main" xmlns:r="http://schemas.openxmlformats.org/officeDocument/2006/relationships" xmlns:p="http://schemas.openxmlformats.org/presentationml/2006/main">
+  <p:cSld>
+    <p:spTree>
+      <p:nvGrpSpPr>
+        <p:cNvPr id="1" name=""/>
+        <p:cNvGrpSpPr/>
+        <p:nvPr/>
+      </p:nvGrpSpPr>
+      <p:grpSpPr>
+        <a:xfrm>
+          <a:off x="0" y="0"/>
+          <a:ext cx="0" cy="0"/>
+          <a:chOff x="0" y="0"/>
+          <a:chExt cx="0" cy="0"/>
+        </a:xfrm>
+      </p:grpSpPr>
+      <p:sp>
+        <p:nvSpPr>
+          <p:cNvPr id="2" name="Title 1">
+            <a:extLst>
+              <a:ext uri="{FF2B5EF4-FFF2-40B4-BE49-F238E27FC236}">
+                <a16:creationId xmlns:a16="http://schemas.microsoft.com/office/drawing/2014/main" id="{637EBBF1-A39E-A1FD-571E-817F78986B7E}"/>
+              </a:ext>
+            </a:extLst>
+          </p:cNvPr>
+          <p:cNvSpPr>
+            <a:spLocks noGrp="1"/>
+          </p:cNvSpPr>
+          <p:nvPr>
+            <p:ph type="title"/>
+          </p:nvPr>
+        </p:nvSpPr>
+        <p:spPr/>
+        <p:txBody>
+          <a:bodyPr/>
+          <a:lstStyle/>
+          <a:p>
+            <a:r>
+              <a:rPr lang="en-US" altLang="zh-CN" dirty="0"/>
+              <a:t>String Index</a:t>
+            </a:r>
+            <a:endParaRPr lang="zh-CN" altLang="en-US" dirty="0"/>
+          </a:p>
+        </p:txBody>
+      </p:sp>
+      <p:sp>
+        <p:nvSpPr>
+          <p:cNvPr id="3" name="Content Placeholder 2">
+            <a:extLst>
+              <a:ext uri="{FF2B5EF4-FFF2-40B4-BE49-F238E27FC236}">
+                <a16:creationId xmlns:a16="http://schemas.microsoft.com/office/drawing/2014/main" id="{06A74AFD-54C9-6430-FDFB-1BFF149EE486}"/>
+              </a:ext>
+            </a:extLst>
+          </p:cNvPr>
+          <p:cNvSpPr>
+            <a:spLocks noGrp="1"/>
+          </p:cNvSpPr>
+          <p:nvPr>
+            <p:ph idx="1"/>
+          </p:nvPr>
+        </p:nvSpPr>
+        <p:spPr/>
+        <p:txBody>
+          <a:bodyPr/>
+          <a:lstStyle/>
+          <a:p>
+            <a:r>
+              <a:rPr lang="en-US" altLang="zh-CN" dirty="0"/>
+              <a:t>Strings are sequence of characters</a:t>
+            </a:r>
+          </a:p>
+          <a:p>
+            <a:r>
+              <a:rPr lang="en-US" altLang="zh-CN" dirty="0"/>
+              <a:t>You can use the </a:t>
+            </a:r>
+            <a:r>
+              <a:rPr lang="en-US" altLang="zh-CN" b="1" dirty="0"/>
+              <a:t>.</a:t>
+            </a:r>
+            <a:r>
+              <a:rPr lang="en-US" altLang="zh-CN" b="1" dirty="0" err="1"/>
+              <a:t>charAt</a:t>
+            </a:r>
+            <a:r>
+              <a:rPr lang="en-US" altLang="zh-CN" b="1" dirty="0"/>
+              <a:t>(int index) </a:t>
+            </a:r>
+            <a:r>
+              <a:rPr lang="en-US" altLang="zh-CN" dirty="0"/>
+              <a:t>method to extract characters from String, the return type is </a:t>
+            </a:r>
+            <a:r>
+              <a:rPr lang="en-US" altLang="zh-CN" b="1" dirty="0"/>
+              <a:t>char </a:t>
+            </a:r>
+          </a:p>
+          <a:p>
+            <a:r>
+              <a:rPr lang="en-US" altLang="zh-CN" dirty="0"/>
+              <a:t>For example:</a:t>
+            </a:r>
+          </a:p>
+          <a:p>
+            <a:pPr lvl="1"/>
+            <a:r>
+              <a:rPr lang="en-US" altLang="zh-CN" dirty="0"/>
+              <a:t>String str = “hello”;</a:t>
+            </a:r>
+          </a:p>
+          <a:p>
+            <a:pPr lvl="1"/>
+            <a:r>
+              <a:rPr lang="en-US" altLang="zh-CN" dirty="0"/>
+              <a:t>char l=</a:t>
+            </a:r>
+            <a:r>
+              <a:rPr lang="en-US" altLang="zh-CN" dirty="0" err="1"/>
+              <a:t>str.charAt</a:t>
+            </a:r>
+            <a:r>
+              <a:rPr lang="en-US" altLang="zh-CN" dirty="0"/>
+              <a:t>(1);</a:t>
+            </a:r>
+          </a:p>
+          <a:p>
+            <a:pPr lvl="1"/>
+            <a:endParaRPr lang="zh-CN" altLang="en-US" dirty="0"/>
+          </a:p>
+        </p:txBody>
+      </p:sp>
+      <p:pic>
+        <p:nvPicPr>
+          <p:cNvPr id="5" name="Picture 4" descr="A screenshot of a white board&#10;&#10;AI-generated content may be incorrect.">
+            <a:extLst>
+              <a:ext uri="{FF2B5EF4-FFF2-40B4-BE49-F238E27FC236}">
+                <a16:creationId xmlns:a16="http://schemas.microsoft.com/office/drawing/2014/main" id="{53B5C7A0-80F0-C83E-75C6-100F912E245F}"/>
+              </a:ext>
+            </a:extLst>
+          </p:cNvPr>
+          <p:cNvPicPr>
+            <a:picLocks noChangeAspect="1"/>
+          </p:cNvPicPr>
+          <p:nvPr/>
+        </p:nvPicPr>
+        <p:blipFill>
+          <a:blip r:embed="rId2">
+            <a:extLst>
+              <a:ext uri="{28A0092B-C50C-407E-A947-70E740481C1C}">
+                <a14:useLocalDpi xmlns:a14="http://schemas.microsoft.com/office/drawing/2010/main" val="0"/>
+              </a:ext>
+            </a:extLst>
+          </a:blip>
+          <a:stretch>
+            <a:fillRect/>
+          </a:stretch>
+        </p:blipFill>
+        <p:spPr>
+          <a:xfrm>
+            <a:off x="5720080" y="3675100"/>
+            <a:ext cx="6169553" cy="3030894"/>
+          </a:xfrm>
+          <a:prstGeom prst="rect">
+            <a:avLst/>
+          </a:prstGeom>
+        </p:spPr>
+      </p:pic>
+    </p:spTree>
+    <p:extLst>
+      <p:ext uri="{BB962C8B-B14F-4D97-AF65-F5344CB8AC3E}">
+        <p14:creationId xmlns:p14="http://schemas.microsoft.com/office/powerpoint/2010/main" val="2755268734"/>
+      </p:ext>
+    </p:extLst>
+  </p:cSld>
+  <p:clrMapOvr>
+    <a:masterClrMapping/>
+  </p:clrMapOvr>
+  <p:timing>
+    <p:tnLst>
+      <p:par>
+        <p:cTn id="1" dur="indefinite" restart="never" nodeType="tmRoot">
+          <p:childTnLst>
+            <p:seq concurrent="1" nextAc="seek">
+              <p:cTn id="2" dur="indefinite" nodeType="mainSeq">
+                <p:childTnLst>
+                  <p:par>
+                    <p:cTn id="3" fill="hold">
+                      <p:stCondLst>
+                        <p:cond delay="indefinite"/>
+                      </p:stCondLst>
+                      <p:childTnLst>
+                        <p:par>
+                          <p:cTn id="4" fill="hold">
+                            <p:stCondLst>
+                              <p:cond delay="0"/>
+                            </p:stCondLst>
+                            <p:childTnLst>
+                              <p:par>
+                                <p:cTn id="5" presetID="10" presetClass="entr" presetSubtype="0" fill="hold" nodeType="clickEffect">
+                                  <p:stCondLst>
+                                    <p:cond delay="0"/>
+                                  </p:stCondLst>
+                                  <p:childTnLst>
+                                    <p:set>
+                                      <p:cBhvr>
+                                        <p:cTn id="6" dur="1" fill="hold">
+                                          <p:stCondLst>
+                                            <p:cond delay="0"/>
+                                          </p:stCondLst>
+                                        </p:cTn>
+                                        <p:tgtEl>
+                                          <p:spTgt spid="3">
+                                            <p:txEl>
+                                              <p:pRg st="0" end="0"/>
+                                            </p:txEl>
+                                          </p:spTgt>
+                                        </p:tgtEl>
+                                        <p:attrNameLst>
+                                          <p:attrName>style.visibility</p:attrName>
+                                        </p:attrNameLst>
+                                      </p:cBhvr>
+                                      <p:to>
+                                        <p:strVal val="visible"/>
+                                      </p:to>
+                                    </p:set>
+                                    <p:animEffect transition="in" filter="fade">
+                                      <p:cBhvr>
+                                        <p:cTn id="7" dur="500"/>
+                                        <p:tgtEl>
+                                          <p:spTgt spid="3">
+                                            <p:txEl>
+                                              <p:pRg st="0" end="0"/>
+                                            </p:txEl>
+                                          </p:spTgt>
+                                        </p:tgtEl>
+                                      </p:cBhvr>
+                                    </p:animEffect>
+                                  </p:childTnLst>
+                                </p:cTn>
+                              </p:par>
+                            </p:childTnLst>
+                          </p:cTn>
+                        </p:par>
+                      </p:childTnLst>
+                    </p:cTn>
+                  </p:par>
+                  <p:par>
+                    <p:cTn id="8" fill="hold">
+                      <p:stCondLst>
+                        <p:cond delay="indefinite"/>
+                      </p:stCondLst>
+                      <p:childTnLst>
+                        <p:par>
+                          <p:cTn id="9" fill="hold">
+                            <p:stCondLst>
+                              <p:cond delay="0"/>
+                            </p:stCondLst>
+                            <p:childTnLst>
+                              <p:par>
+                                <p:cTn id="10" presetID="10" presetClass="entr" presetSubtype="0" fill="hold" nodeType="clickEffect">
+                                  <p:stCondLst>
+                                    <p:cond delay="0"/>
+                                  </p:stCondLst>
+                                  <p:childTnLst>
+                                    <p:set>
+                                      <p:cBhvr>
+                                        <p:cTn id="11" dur="1" fill="hold">
+                                          <p:stCondLst>
+                                            <p:cond delay="0"/>
+                                          </p:stCondLst>
+                                        </p:cTn>
+                                        <p:tgtEl>
+                                          <p:spTgt spid="3">
+                                            <p:txEl>
+                                              <p:pRg st="1" end="1"/>
+                                            </p:txEl>
+                                          </p:spTgt>
+                                        </p:tgtEl>
+                                        <p:attrNameLst>
+                                          <p:attrName>style.visibility</p:attrName>
+                                        </p:attrNameLst>
+                                      </p:cBhvr>
+                                      <p:to>
+                                        <p:strVal val="visible"/>
+                                      </p:to>
+                                    </p:set>
+                                    <p:animEffect transition="in" filter="fade">
+                                      <p:cBhvr>
+                                        <p:cTn id="12" dur="500"/>
+                                        <p:tgtEl>
+                                          <p:spTgt spid="3">
+                                            <p:txEl>
+                                              <p:pRg st="1" end="1"/>
+                                            </p:txEl>
+                                          </p:spTgt>
+                                        </p:tgtEl>
+                                      </p:cBhvr>
+                                    </p:animEffect>
+                                  </p:childTnLst>
+                                </p:cTn>
+                              </p:par>
+                            </p:childTnLst>
+                          </p:cTn>
+                        </p:par>
+                      </p:childTnLst>
+                    </p:cTn>
+                  </p:par>
+                  <p:par>
+                    <p:cTn id="13" fill="hold">
+                      <p:stCondLst>
+                        <p:cond delay="indefinite"/>
+                      </p:stCondLst>
+                      <p:childTnLst>
+                        <p:par>
+                          <p:cTn id="14" fill="hold">
+                            <p:stCondLst>
+                              <p:cond delay="0"/>
+                            </p:stCondLst>
+                            <p:childTnLst>
+                              <p:par>
+                                <p:cTn id="15" presetID="10" presetClass="entr" presetSubtype="0" fill="hold" nodeType="clickEffect">
+                                  <p:stCondLst>
+                                    <p:cond delay="0"/>
+                                  </p:stCondLst>
+                                  <p:childTnLst>
+                                    <p:set>
+                                      <p:cBhvr>
+                                        <p:cTn id="16" dur="1" fill="hold">
+                                          <p:stCondLst>
+                                            <p:cond delay="0"/>
+                                          </p:stCondLst>
+                                        </p:cTn>
+                                        <p:tgtEl>
+                                          <p:spTgt spid="3">
+                                            <p:txEl>
+                                              <p:pRg st="2" end="2"/>
+                                            </p:txEl>
+                                          </p:spTgt>
+                                        </p:tgtEl>
+                                        <p:attrNameLst>
+                                          <p:attrName>style.visibility</p:attrName>
+                                        </p:attrNameLst>
+                                      </p:cBhvr>
+                                      <p:to>
+                                        <p:strVal val="visible"/>
+                                      </p:to>
+                                    </p:set>
+                                    <p:animEffect transition="in" filter="fade">
+                                      <p:cBhvr>
+                                        <p:cTn id="17" dur="500"/>
+                                        <p:tgtEl>
+                                          <p:spTgt spid="3">
+                                            <p:txEl>
+                                              <p:pRg st="2" end="2"/>
+                                            </p:txEl>
+                                          </p:spTgt>
+                                        </p:tgtEl>
+                                      </p:cBhvr>
+                                    </p:animEffect>
+                                  </p:childTnLst>
+                                </p:cTn>
+                              </p:par>
+                              <p:par>
+                                <p:cTn id="18" presetID="10" presetClass="entr" presetSubtype="0" fill="hold" nodeType="withEffect">
+                                  <p:stCondLst>
+                                    <p:cond delay="0"/>
+                                  </p:stCondLst>
+                                  <p:childTnLst>
+                                    <p:set>
+                                      <p:cBhvr>
+                                        <p:cTn id="19" dur="1" fill="hold">
+                                          <p:stCondLst>
+                                            <p:cond delay="0"/>
+                                          </p:stCondLst>
+                                        </p:cTn>
+                                        <p:tgtEl>
+                                          <p:spTgt spid="3">
+                                            <p:txEl>
+                                              <p:pRg st="3" end="3"/>
+                                            </p:txEl>
+                                          </p:spTgt>
+                                        </p:tgtEl>
+                                        <p:attrNameLst>
+                                          <p:attrName>style.visibility</p:attrName>
+                                        </p:attrNameLst>
+                                      </p:cBhvr>
+                                      <p:to>
+                                        <p:strVal val="visible"/>
+                                      </p:to>
+                                    </p:set>
+                                    <p:animEffect transition="in" filter="fade">
+                                      <p:cBhvr>
+                                        <p:cTn id="20" dur="500"/>
+                                        <p:tgtEl>
+                                          <p:spTgt spid="3">
+                                            <p:txEl>
+                                              <p:pRg st="3" end="3"/>
+                                            </p:txEl>
+                                          </p:spTgt>
+                                        </p:tgtEl>
+                                      </p:cBhvr>
+                                    </p:animEffect>
+                                  </p:childTnLst>
+                                </p:cTn>
+                              </p:par>
+                              <p:par>
+                                <p:cTn id="21" presetID="10" presetClass="entr" presetSubtype="0" fill="hold" nodeType="withEffect">
+                                  <p:stCondLst>
+                                    <p:cond delay="0"/>
+                                  </p:stCondLst>
+                                  <p:childTnLst>
+                                    <p:set>
+                                      <p:cBhvr>
+                                        <p:cTn id="22" dur="1" fill="hold">
+                                          <p:stCondLst>
+                                            <p:cond delay="0"/>
+                                          </p:stCondLst>
+                                        </p:cTn>
+                                        <p:tgtEl>
+                                          <p:spTgt spid="3">
+                                            <p:txEl>
+                                              <p:pRg st="4" end="4"/>
+                                            </p:txEl>
+                                          </p:spTgt>
+                                        </p:tgtEl>
+                                        <p:attrNameLst>
+                                          <p:attrName>style.visibility</p:attrName>
+                                        </p:attrNameLst>
+                                      </p:cBhvr>
+                                      <p:to>
+                                        <p:strVal val="visible"/>
+                                      </p:to>
+                                    </p:set>
+                                    <p:animEffect transition="in" filter="fade">
+                                      <p:cBhvr>
+                                        <p:cTn id="23" dur="500"/>
+                                        <p:tgtEl>
+                                          <p:spTgt spid="3">
+                                            <p:txEl>
+                                              <p:pRg st="4" end="4"/>
+                                            </p:txEl>
+                                          </p:spTgt>
+                                        </p:tgtEl>
+                                      </p:cBhvr>
+                                    </p:animEffect>
+                                  </p:childTnLst>
+                                </p:cTn>
+                              </p:par>
+                            </p:childTnLst>
+                          </p:cTn>
+                        </p:par>
+                      </p:childTnLst>
+                    </p:cTn>
+                  </p:par>
+                </p:childTnLst>
+              </p:cTn>
+              <p:prevCondLst>
+                <p:cond evt="onPrev" delay="0">
+                  <p:tgtEl>
+                    <p:sldTgt/>
+                  </p:tgtEl>
+                </p:cond>
+              </p:prevCondLst>
+              <p:nextCondLst>
+                <p:cond evt="onNext" delay="0">
+                  <p:tgtEl>
+                    <p:sldTgt/>
+                  </p:tgtEl>
+                </p:cond>
+              </p:nextCondLst>
+            </p:seq>
+          </p:childTnLst>
+        </p:cTn>
+      </p:par>
+    </p:tnLst>
+  </p:timing>
+</p:sld>
+</file>
+
+<file path=ppt/slides/slide25.xml><?xml version="1.0" encoding="utf-8"?>
+<p:sld xmlns:a="http://schemas.openxmlformats.org/drawingml/2006/main" xmlns:r="http://schemas.openxmlformats.org/officeDocument/2006/relationships" xmlns:p="http://schemas.openxmlformats.org/presentationml/2006/main">
+  <p:cSld>
+    <p:spTree>
+      <p:nvGrpSpPr>
+        <p:cNvPr id="1" name=""/>
+        <p:cNvGrpSpPr/>
+        <p:nvPr/>
+      </p:nvGrpSpPr>
+      <p:grpSpPr>
+        <a:xfrm>
+          <a:off x="0" y="0"/>
+          <a:ext cx="0" cy="0"/>
+          <a:chOff x="0" y="0"/>
+          <a:chExt cx="0" cy="0"/>
+        </a:xfrm>
+      </p:grpSpPr>
+      <p:sp>
+        <p:nvSpPr>
+          <p:cNvPr id="2" name="Title 1">
+            <a:extLst>
+              <a:ext uri="{FF2B5EF4-FFF2-40B4-BE49-F238E27FC236}">
+                <a16:creationId xmlns:a16="http://schemas.microsoft.com/office/drawing/2014/main" id="{4EFEE699-DC3F-97EA-5DD4-054F6646E483}"/>
+              </a:ext>
+            </a:extLst>
+          </p:cNvPr>
+          <p:cNvSpPr>
+            <a:spLocks noGrp="1"/>
+          </p:cNvSpPr>
+          <p:nvPr>
+            <p:ph type="title"/>
+          </p:nvPr>
+        </p:nvSpPr>
+        <p:spPr/>
+        <p:txBody>
+          <a:bodyPr/>
+          <a:lstStyle/>
+          <a:p>
+            <a:r>
+              <a:rPr lang="en-US" altLang="zh-CN" dirty="0"/>
+              <a:t>Common String Methods to Know</a:t>
+            </a:r>
+            <a:endParaRPr lang="zh-CN" altLang="en-US" dirty="0"/>
+          </a:p>
+        </p:txBody>
+      </p:sp>
+      <p:sp>
+        <p:nvSpPr>
+          <p:cNvPr id="3" name="Content Placeholder 2">
+            <a:extLst>
+              <a:ext uri="{FF2B5EF4-FFF2-40B4-BE49-F238E27FC236}">
+                <a16:creationId xmlns:a16="http://schemas.microsoft.com/office/drawing/2014/main" id="{FA4EBA2B-C48A-86F4-14B0-BDBE59542C38}"/>
+              </a:ext>
+            </a:extLst>
+          </p:cNvPr>
+          <p:cNvSpPr>
+            <a:spLocks noGrp="1"/>
+          </p:cNvSpPr>
+          <p:nvPr>
+            <p:ph idx="1"/>
+          </p:nvPr>
+        </p:nvSpPr>
+        <p:spPr>
+          <a:xfrm>
+            <a:off x="838199" y="1825625"/>
+            <a:ext cx="11196485" cy="4351338"/>
+          </a:xfrm>
+        </p:spPr>
+        <p:txBody>
+          <a:bodyPr/>
+          <a:lstStyle/>
+          <a:p>
+            <a:pPr marL="0" indent="0">
+              <a:buNone/>
+            </a:pPr>
+            <a:r>
+              <a:rPr lang="en-US" altLang="zh-CN" dirty="0"/>
+              <a:t>String s1=“hello”</a:t>
+            </a:r>
+          </a:p>
+          <a:p>
+            <a:r>
+              <a:rPr lang="en-US" altLang="zh-CN" b="1" dirty="0"/>
+              <a:t>s1.length()</a:t>
+            </a:r>
+            <a:r>
+              <a:rPr lang="en-US" altLang="zh-CN" dirty="0"/>
+              <a:t> returns the number of character in the string as int </a:t>
+            </a:r>
+          </a:p>
+          <a:p>
+            <a:r>
+              <a:rPr lang="en-US" altLang="zh-CN" b="1" dirty="0"/>
+              <a:t>s1.substring(2,5) </a:t>
+            </a:r>
+            <a:r>
+              <a:rPr lang="en-US" altLang="zh-CN" dirty="0"/>
+              <a:t>returns substring from index 2 and ending at 4</a:t>
+            </a:r>
+          </a:p>
+          <a:p>
+            <a:r>
+              <a:rPr lang="en-US" altLang="zh-CN" b="1" dirty="0"/>
+              <a:t>s1.substring(1) </a:t>
+            </a:r>
+            <a:r>
+              <a:rPr lang="en-US" altLang="zh-CN" dirty="0"/>
+              <a:t>returns the substring from index 1 to the end</a:t>
+            </a:r>
+          </a:p>
+          <a:p>
+            <a:r>
+              <a:rPr lang="en-US" altLang="zh-CN" b="1" dirty="0"/>
+              <a:t>s1.indexOf(“e”) </a:t>
+            </a:r>
+            <a:r>
+              <a:rPr lang="en-US" altLang="zh-CN" dirty="0"/>
+              <a:t>returns the index of the first occurrence of “e”, returns -1 if not found</a:t>
+            </a:r>
+          </a:p>
+          <a:p>
+            <a:r>
+              <a:rPr lang="en-US" altLang="zh-CN" b="1" dirty="0"/>
+              <a:t>s1.equals(“</a:t>
+            </a:r>
+            <a:r>
+              <a:rPr lang="en-US" altLang="zh-CN" b="1" dirty="0" err="1"/>
+              <a:t>helo</a:t>
+            </a:r>
+            <a:r>
+              <a:rPr lang="en-US" altLang="zh-CN" b="1" dirty="0"/>
+              <a:t>”) </a:t>
+            </a:r>
+            <a:r>
+              <a:rPr lang="en-US" altLang="zh-CN" dirty="0"/>
+              <a:t>returns true if s1 is equal to “</a:t>
+            </a:r>
+            <a:r>
+              <a:rPr lang="en-US" altLang="zh-CN" dirty="0" err="1"/>
+              <a:t>helo</a:t>
+            </a:r>
+            <a:r>
+              <a:rPr lang="en-US" altLang="zh-CN" dirty="0"/>
+              <a:t>”, false otherwise</a:t>
+            </a:r>
+          </a:p>
+          <a:p>
+            <a:r>
+              <a:rPr lang="en-US" altLang="zh-CN" b="1" dirty="0"/>
+              <a:t>s1.compareTo(“</a:t>
+            </a:r>
+            <a:r>
+              <a:rPr lang="en-US" altLang="zh-CN" b="1" dirty="0" err="1"/>
+              <a:t>helo</a:t>
+            </a:r>
+            <a:r>
+              <a:rPr lang="en-US" altLang="zh-CN" b="1" dirty="0"/>
+              <a:t>”)  </a:t>
+            </a:r>
+          </a:p>
+          <a:p>
+            <a:endParaRPr lang="zh-CN" altLang="en-US" dirty="0"/>
+          </a:p>
+        </p:txBody>
+      </p:sp>
+    </p:spTree>
+    <p:extLst>
+      <p:ext uri="{BB962C8B-B14F-4D97-AF65-F5344CB8AC3E}">
+        <p14:creationId xmlns:p14="http://schemas.microsoft.com/office/powerpoint/2010/main" val="2562818178"/>
+      </p:ext>
+    </p:extLst>
+  </p:cSld>
+  <p:clrMapOvr>
+    <a:masterClrMapping/>
+  </p:clrMapOvr>
+  <p:timing>
+    <p:tnLst>
+      <p:par>
+        <p:cTn id="1" dur="indefinite" restart="never" nodeType="tmRoot">
+          <p:childTnLst>
+            <p:seq concurrent="1" nextAc="seek">
+              <p:cTn id="2" dur="indefinite" nodeType="mainSeq">
+                <p:childTnLst>
+                  <p:par>
+                    <p:cTn id="3" fill="hold">
+                      <p:stCondLst>
+                        <p:cond delay="indefinite"/>
+                      </p:stCondLst>
+                      <p:childTnLst>
+                        <p:par>
+                          <p:cTn id="4" fill="hold">
+                            <p:stCondLst>
+                              <p:cond delay="0"/>
+                            </p:stCondLst>
+                            <p:childTnLst>
+                              <p:par>
+                                <p:cTn id="5" presetID="10" presetClass="entr" presetSubtype="0" fill="hold" nodeType="clickEffect">
+                                  <p:stCondLst>
+                                    <p:cond delay="0"/>
+                                  </p:stCondLst>
+                                  <p:childTnLst>
+                                    <p:set>
+                                      <p:cBhvr>
+                                        <p:cTn id="6" dur="1" fill="hold">
+                                          <p:stCondLst>
+                                            <p:cond delay="0"/>
+                                          </p:stCondLst>
+                                        </p:cTn>
+                                        <p:tgtEl>
+                                          <p:spTgt spid="3">
+                                            <p:txEl>
+                                              <p:pRg st="0" end="0"/>
+                                            </p:txEl>
+                                          </p:spTgt>
+                                        </p:tgtEl>
+                                        <p:attrNameLst>
+                                          <p:attrName>style.visibility</p:attrName>
+                                        </p:attrNameLst>
+                                      </p:cBhvr>
+                                      <p:to>
+                                        <p:strVal val="visible"/>
+                                      </p:to>
+                                    </p:set>
+                                    <p:animEffect transition="in" filter="fade">
+                                      <p:cBhvr>
+                                        <p:cTn id="7" dur="500"/>
+                                        <p:tgtEl>
+                                          <p:spTgt spid="3">
+                                            <p:txEl>
+                                              <p:pRg st="0" end="0"/>
+                                            </p:txEl>
+                                          </p:spTgt>
+                                        </p:tgtEl>
+                                      </p:cBhvr>
+                                    </p:animEffect>
+                                  </p:childTnLst>
+                                </p:cTn>
+                              </p:par>
+                            </p:childTnLst>
+                          </p:cTn>
+                        </p:par>
+                      </p:childTnLst>
+                    </p:cTn>
+                  </p:par>
+                  <p:par>
+                    <p:cTn id="8" fill="hold">
+                      <p:stCondLst>
+                        <p:cond delay="indefinite"/>
+                      </p:stCondLst>
+                      <p:childTnLst>
+                        <p:par>
+                          <p:cTn id="9" fill="hold">
+                            <p:stCondLst>
+                              <p:cond delay="0"/>
+                            </p:stCondLst>
+                            <p:childTnLst>
+                              <p:par>
+                                <p:cTn id="10" presetID="10" presetClass="entr" presetSubtype="0" fill="hold" nodeType="clickEffect">
+                                  <p:stCondLst>
+                                    <p:cond delay="0"/>
+                                  </p:stCondLst>
+                                  <p:childTnLst>
+                                    <p:set>
+                                      <p:cBhvr>
+                                        <p:cTn id="11" dur="1" fill="hold">
+                                          <p:stCondLst>
+                                            <p:cond delay="0"/>
+                                          </p:stCondLst>
+                                        </p:cTn>
+                                        <p:tgtEl>
+                                          <p:spTgt spid="3">
+                                            <p:txEl>
+                                              <p:pRg st="1" end="1"/>
+                                            </p:txEl>
+                                          </p:spTgt>
+                                        </p:tgtEl>
+                                        <p:attrNameLst>
+                                          <p:attrName>style.visibility</p:attrName>
+                                        </p:attrNameLst>
+                                      </p:cBhvr>
+                                      <p:to>
+                                        <p:strVal val="visible"/>
+                                      </p:to>
+                                    </p:set>
+                                    <p:animEffect transition="in" filter="fade">
+                                      <p:cBhvr>
+                                        <p:cTn id="12" dur="500"/>
+                                        <p:tgtEl>
+                                          <p:spTgt spid="3">
+                                            <p:txEl>
+                                              <p:pRg st="1" end="1"/>
+                                            </p:txEl>
+                                          </p:spTgt>
+                                        </p:tgtEl>
+                                      </p:cBhvr>
+                                    </p:animEffect>
+                                  </p:childTnLst>
+                                </p:cTn>
+                              </p:par>
+                            </p:childTnLst>
+                          </p:cTn>
+                        </p:par>
+                      </p:childTnLst>
+                    </p:cTn>
+                  </p:par>
+                  <p:par>
+                    <p:cTn id="13" fill="hold">
+                      <p:stCondLst>
+                        <p:cond delay="indefinite"/>
+                      </p:stCondLst>
+                      <p:childTnLst>
+                        <p:par>
+                          <p:cTn id="14" fill="hold">
+                            <p:stCondLst>
+                              <p:cond delay="0"/>
+                            </p:stCondLst>
+                            <p:childTnLst>
+                              <p:par>
+                                <p:cTn id="15" presetID="10" presetClass="entr" presetSubtype="0" fill="hold" nodeType="clickEffect">
+                                  <p:stCondLst>
+                                    <p:cond delay="0"/>
+                                  </p:stCondLst>
+                                  <p:childTnLst>
+                                    <p:set>
+                                      <p:cBhvr>
+                                        <p:cTn id="16" dur="1" fill="hold">
+                                          <p:stCondLst>
+                                            <p:cond delay="0"/>
+                                          </p:stCondLst>
+                                        </p:cTn>
+                                        <p:tgtEl>
+                                          <p:spTgt spid="3">
+                                            <p:txEl>
+                                              <p:pRg st="2" end="2"/>
+                                            </p:txEl>
+                                          </p:spTgt>
+                                        </p:tgtEl>
+                                        <p:attrNameLst>
+                                          <p:attrName>style.visibility</p:attrName>
+                                        </p:attrNameLst>
+                                      </p:cBhvr>
+                                      <p:to>
+                                        <p:strVal val="visible"/>
+                                      </p:to>
+                                    </p:set>
+                                    <p:animEffect transition="in" filter="fade">
+                                      <p:cBhvr>
+                                        <p:cTn id="17" dur="500"/>
+                                        <p:tgtEl>
+                                          <p:spTgt spid="3">
+                                            <p:txEl>
+                                              <p:pRg st="2" end="2"/>
+                                            </p:txEl>
+                                          </p:spTgt>
+                                        </p:tgtEl>
+                                      </p:cBhvr>
+                                    </p:animEffect>
+                                  </p:childTnLst>
+                                </p:cTn>
+                              </p:par>
+                            </p:childTnLst>
+                          </p:cTn>
+                        </p:par>
+                      </p:childTnLst>
+                    </p:cTn>
+                  </p:par>
+                  <p:par>
+                    <p:cTn id="18" fill="hold">
+                      <p:stCondLst>
+                        <p:cond delay="indefinite"/>
+                      </p:stCondLst>
+                      <p:childTnLst>
+                        <p:par>
+                          <p:cTn id="19" fill="hold">
+                            <p:stCondLst>
+                              <p:cond delay="0"/>
+                            </p:stCondLst>
+                            <p:childTnLst>
+                              <p:par>
+                                <p:cTn id="20" presetID="10" presetClass="entr" presetSubtype="0" fill="hold" nodeType="clickEffect">
+                                  <p:stCondLst>
+                                    <p:cond delay="0"/>
+                                  </p:stCondLst>
+                                  <p:childTnLst>
+                                    <p:set>
+                                      <p:cBhvr>
+                                        <p:cTn id="21" dur="1" fill="hold">
+                                          <p:stCondLst>
+                                            <p:cond delay="0"/>
+                                          </p:stCondLst>
+                                        </p:cTn>
+                                        <p:tgtEl>
+                                          <p:spTgt spid="3">
+                                            <p:txEl>
+                                              <p:pRg st="3" end="3"/>
+                                            </p:txEl>
+                                          </p:spTgt>
+                                        </p:tgtEl>
+                                        <p:attrNameLst>
+                                          <p:attrName>style.visibility</p:attrName>
+                                        </p:attrNameLst>
+                                      </p:cBhvr>
+                                      <p:to>
+                                        <p:strVal val="visible"/>
+                                      </p:to>
+                                    </p:set>
+                                    <p:animEffect transition="in" filter="fade">
+                                      <p:cBhvr>
+                                        <p:cTn id="22" dur="500"/>
+                                        <p:tgtEl>
+                                          <p:spTgt spid="3">
+                                            <p:txEl>
+                                              <p:pRg st="3" end="3"/>
+                                            </p:txEl>
+                                          </p:spTgt>
+                                        </p:tgtEl>
+                                      </p:cBhvr>
+                                    </p:animEffect>
+                                  </p:childTnLst>
+                                </p:cTn>
+                              </p:par>
+                            </p:childTnLst>
+                          </p:cTn>
+                        </p:par>
+                      </p:childTnLst>
+                    </p:cTn>
+                  </p:par>
+                  <p:par>
+                    <p:cTn id="23" fill="hold">
+                      <p:stCondLst>
+                        <p:cond delay="indefinite"/>
+                      </p:stCondLst>
+                      <p:childTnLst>
+                        <p:par>
+                          <p:cTn id="24" fill="hold">
+                            <p:stCondLst>
+                              <p:cond delay="0"/>
+                            </p:stCondLst>
+                            <p:childTnLst>
+                              <p:par>
+                                <p:cTn id="25" presetID="10" presetClass="entr" presetSubtype="0" fill="hold" nodeType="clickEffect">
+                                  <p:stCondLst>
+                                    <p:cond delay="0"/>
+                                  </p:stCondLst>
+                                  <p:childTnLst>
+                                    <p:set>
+                                      <p:cBhvr>
+                                        <p:cTn id="26" dur="1" fill="hold">
+                                          <p:stCondLst>
+                                            <p:cond delay="0"/>
+                                          </p:stCondLst>
+                                        </p:cTn>
+                                        <p:tgtEl>
+                                          <p:spTgt spid="3">
+                                            <p:txEl>
+                                              <p:pRg st="4" end="4"/>
+                                            </p:txEl>
+                                          </p:spTgt>
+                                        </p:tgtEl>
+                                        <p:attrNameLst>
+                                          <p:attrName>style.visibility</p:attrName>
+                                        </p:attrNameLst>
+                                      </p:cBhvr>
+                                      <p:to>
+                                        <p:strVal val="visible"/>
+                                      </p:to>
+                                    </p:set>
+                                    <p:animEffect transition="in" filter="fade">
+                                      <p:cBhvr>
+                                        <p:cTn id="27" dur="500"/>
+                                        <p:tgtEl>
+                                          <p:spTgt spid="3">
+                                            <p:txEl>
+                                              <p:pRg st="4" end="4"/>
+                                            </p:txEl>
+                                          </p:spTgt>
+                                        </p:tgtEl>
+                                      </p:cBhvr>
+                                    </p:animEffect>
+                                  </p:childTnLst>
+                                </p:cTn>
+                              </p:par>
+                            </p:childTnLst>
+                          </p:cTn>
+                        </p:par>
+                      </p:childTnLst>
+                    </p:cTn>
+                  </p:par>
+                  <p:par>
+                    <p:cTn id="28" fill="hold">
+                      <p:stCondLst>
+                        <p:cond delay="indefinite"/>
+                      </p:stCondLst>
+                      <p:childTnLst>
+                        <p:par>
+                          <p:cTn id="29" fill="hold">
+                            <p:stCondLst>
+                              <p:cond delay="0"/>
+                            </p:stCondLst>
+                            <p:childTnLst>
+                              <p:par>
+                                <p:cTn id="30" presetID="10" presetClass="entr" presetSubtype="0" fill="hold" nodeType="clickEffect">
+                                  <p:stCondLst>
+                                    <p:cond delay="0"/>
+                                  </p:stCondLst>
+                                  <p:childTnLst>
+                                    <p:set>
+                                      <p:cBhvr>
+                                        <p:cTn id="31" dur="1" fill="hold">
+                                          <p:stCondLst>
+                                            <p:cond delay="0"/>
+                                          </p:stCondLst>
+                                        </p:cTn>
+                                        <p:tgtEl>
+                                          <p:spTgt spid="3">
+                                            <p:txEl>
+                                              <p:pRg st="5" end="5"/>
+                                            </p:txEl>
+                                          </p:spTgt>
+                                        </p:tgtEl>
+                                        <p:attrNameLst>
+                                          <p:attrName>style.visibility</p:attrName>
+                                        </p:attrNameLst>
+                                      </p:cBhvr>
+                                      <p:to>
+                                        <p:strVal val="visible"/>
+                                      </p:to>
+                                    </p:set>
+                                    <p:animEffect transition="in" filter="fade">
+                                      <p:cBhvr>
+                                        <p:cTn id="32" dur="500"/>
+                                        <p:tgtEl>
+                                          <p:spTgt spid="3">
+                                            <p:txEl>
+                                              <p:pRg st="5" end="5"/>
+                                            </p:txEl>
+                                          </p:spTgt>
+                                        </p:tgtEl>
+                                      </p:cBhvr>
+                                    </p:animEffect>
+                                  </p:childTnLst>
+                                </p:cTn>
+                              </p:par>
+                            </p:childTnLst>
+                          </p:cTn>
+                        </p:par>
+                      </p:childTnLst>
+                    </p:cTn>
+                  </p:par>
+                  <p:par>
+                    <p:cTn id="33" fill="hold">
+                      <p:stCondLst>
+                        <p:cond delay="indefinite"/>
+                      </p:stCondLst>
+                      <p:childTnLst>
+                        <p:par>
+                          <p:cTn id="34" fill="hold">
+                            <p:stCondLst>
+                              <p:cond delay="0"/>
+                            </p:stCondLst>
+                            <p:childTnLst>
+                              <p:par>
+                                <p:cTn id="35" presetID="10" presetClass="entr" presetSubtype="0" fill="hold" nodeType="clickEffect">
+                                  <p:stCondLst>
+                                    <p:cond delay="0"/>
+                                  </p:stCondLst>
+                                  <p:childTnLst>
+                                    <p:set>
+                                      <p:cBhvr>
+                                        <p:cTn id="36" dur="1" fill="hold">
+                                          <p:stCondLst>
+                                            <p:cond delay="0"/>
+                                          </p:stCondLst>
+                                        </p:cTn>
+                                        <p:tgtEl>
+                                          <p:spTgt spid="3">
+                                            <p:txEl>
+                                              <p:pRg st="6" end="6"/>
+                                            </p:txEl>
+                                          </p:spTgt>
+                                        </p:tgtEl>
+                                        <p:attrNameLst>
+                                          <p:attrName>style.visibility</p:attrName>
+                                        </p:attrNameLst>
+                                      </p:cBhvr>
+                                      <p:to>
+                                        <p:strVal val="visible"/>
+                                      </p:to>
+                                    </p:set>
+                                    <p:animEffect transition="in" filter="fade">
+                                      <p:cBhvr>
+                                        <p:cTn id="37" dur="500"/>
+                                        <p:tgtEl>
+                                          <p:spTgt spid="3">
+                                            <p:txEl>
+                                              <p:pRg st="6" end="6"/>
+                                            </p:txEl>
+                                          </p:spTgt>
+                                        </p:tgtEl>
+                                      </p:cBhvr>
+                                    </p:animEffect>
+                                  </p:childTnLst>
+                                </p:cTn>
+                              </p:par>
+                            </p:childTnLst>
+                          </p:cTn>
+                        </p:par>
+                      </p:childTnLst>
+                    </p:cTn>
+                  </p:par>
+                </p:childTnLst>
+              </p:cTn>
+              <p:prevCondLst>
+                <p:cond evt="onPrev" delay="0">
+                  <p:tgtEl>
+                    <p:sldTgt/>
+                  </p:tgtEl>
+                </p:cond>
+              </p:prevCondLst>
+              <p:nextCondLst>
+                <p:cond evt="onNext" delay="0">
+                  <p:tgtEl>
+                    <p:sldTgt/>
+                  </p:tgtEl>
+                </p:cond>
+              </p:nextCondLst>
+            </p:seq>
+          </p:childTnLst>
+        </p:cTn>
+      </p:par>
+    </p:tnLst>
+  </p:timing>
+</p:sld>
+</file>
+
+<file path=ppt/slides/slide26.xml><?xml version="1.0" encoding="utf-8"?>
+<p:sld xmlns:a="http://schemas.openxmlformats.org/drawingml/2006/main" xmlns:r="http://schemas.openxmlformats.org/officeDocument/2006/relationships" xmlns:p="http://schemas.openxmlformats.org/presentationml/2006/main">
+  <p:cSld>
+    <p:spTree>
+      <p:nvGrpSpPr>
+        <p:cNvPr id="1" name=""/>
+        <p:cNvGrpSpPr/>
+        <p:nvPr/>
+      </p:nvGrpSpPr>
+      <p:grpSpPr>
+        <a:xfrm>
+          <a:off x="0" y="0"/>
+          <a:ext cx="0" cy="0"/>
+          <a:chOff x="0" y="0"/>
+          <a:chExt cx="0" cy="0"/>
+        </a:xfrm>
+      </p:grpSpPr>
+      <p:sp>
+        <p:nvSpPr>
+          <p:cNvPr id="2" name="Title 1">
+            <a:extLst>
+              <a:ext uri="{FF2B5EF4-FFF2-40B4-BE49-F238E27FC236}">
+                <a16:creationId xmlns:a16="http://schemas.microsoft.com/office/drawing/2014/main" id="{D7E566FE-8118-B5D7-8BDB-7604657AD5F0}"/>
+              </a:ext>
+            </a:extLst>
+          </p:cNvPr>
+          <p:cNvSpPr>
+            <a:spLocks noGrp="1"/>
+          </p:cNvSpPr>
+          <p:nvPr>
+            <p:ph type="title"/>
+          </p:nvPr>
+        </p:nvSpPr>
+        <p:spPr/>
+        <p:txBody>
+          <a:bodyPr/>
+          <a:lstStyle/>
+          <a:p>
+            <a:r>
+              <a:rPr lang="en-US" altLang="zh-CN" dirty="0" err="1"/>
+              <a:t>compareTo</a:t>
+            </a:r>
+            <a:r>
+              <a:rPr lang="en-US" altLang="zh-CN" dirty="0"/>
+              <a:t>()</a:t>
+            </a:r>
+            <a:endParaRPr lang="zh-CN" altLang="en-US" dirty="0"/>
+          </a:p>
+        </p:txBody>
+      </p:sp>
+      <p:sp>
+        <p:nvSpPr>
+          <p:cNvPr id="3" name="Content Placeholder 2">
+            <a:extLst>
+              <a:ext uri="{FF2B5EF4-FFF2-40B4-BE49-F238E27FC236}">
+                <a16:creationId xmlns:a16="http://schemas.microsoft.com/office/drawing/2014/main" id="{CE2E4BA0-9CA3-E013-8EFE-4773D5CE2A0D}"/>
+              </a:ext>
+            </a:extLst>
+          </p:cNvPr>
+          <p:cNvSpPr>
+            <a:spLocks noGrp="1"/>
+          </p:cNvSpPr>
+          <p:nvPr>
+            <p:ph idx="1"/>
+          </p:nvPr>
+        </p:nvSpPr>
+        <p:spPr/>
+        <p:txBody>
+          <a:bodyPr/>
+          <a:lstStyle/>
+          <a:p>
+            <a:r>
+              <a:rPr lang="en-US" altLang="zh-CN" dirty="0" err="1"/>
+              <a:t>compareTo</a:t>
+            </a:r>
+            <a:r>
+              <a:rPr lang="en-US" altLang="zh-CN" dirty="0"/>
+              <a:t>() compares the value of the </a:t>
+            </a:r>
+            <a:r>
+              <a:rPr lang="en-US" altLang="zh-CN" b="1" dirty="0"/>
+              <a:t>first character </a:t>
+            </a:r>
+            <a:r>
+              <a:rPr lang="en-US" altLang="zh-CN" dirty="0"/>
+              <a:t>that </a:t>
+            </a:r>
+            <a:r>
+              <a:rPr lang="en-US" altLang="zh-CN" b="1" dirty="0"/>
+              <a:t>NOT </a:t>
+            </a:r>
+            <a:r>
+              <a:rPr lang="en-US" altLang="zh-CN" dirty="0"/>
+              <a:t>equal in both strings. It returns a numeric value based on the comparison</a:t>
+            </a:r>
+          </a:p>
+          <a:p>
+            <a:r>
+              <a:rPr lang="en-US" altLang="zh-CN" dirty="0"/>
+              <a:t>Example: </a:t>
+            </a:r>
+          </a:p>
+          <a:p>
+            <a:pPr lvl="1"/>
+            <a:r>
+              <a:rPr lang="en-US" altLang="zh-CN" dirty="0"/>
+              <a:t>int value = “D”.</a:t>
+            </a:r>
+            <a:r>
+              <a:rPr lang="en-US" altLang="zh-CN" dirty="0" err="1"/>
+              <a:t>compareTo</a:t>
+            </a:r>
+            <a:r>
+              <a:rPr lang="en-US" altLang="zh-CN" dirty="0"/>
+              <a:t>(“d”); </a:t>
+            </a:r>
+          </a:p>
+          <a:p>
+            <a:pPr lvl="1"/>
+            <a:r>
+              <a:rPr lang="en-US" altLang="zh-CN" dirty="0"/>
+              <a:t>int res = “Karel”.</a:t>
+            </a:r>
+            <a:r>
+              <a:rPr lang="en-US" altLang="zh-CN" dirty="0" err="1"/>
+              <a:t>compareTo</a:t>
+            </a:r>
+            <a:r>
+              <a:rPr lang="en-US" altLang="zh-CN" dirty="0"/>
+              <a:t>(“Karen”);</a:t>
+            </a:r>
+            <a:endParaRPr lang="zh-CN" altLang="en-US" dirty="0"/>
+          </a:p>
+        </p:txBody>
+      </p:sp>
+      <p:pic>
+        <p:nvPicPr>
+          <p:cNvPr id="5" name="Picture 4" descr="A close up of a number&#10;&#10;AI-generated content may be incorrect.">
+            <a:extLst>
+              <a:ext uri="{FF2B5EF4-FFF2-40B4-BE49-F238E27FC236}">
+                <a16:creationId xmlns:a16="http://schemas.microsoft.com/office/drawing/2014/main" id="{8F98896A-7923-704E-77D3-F87178E823C7}"/>
+              </a:ext>
+            </a:extLst>
+          </p:cNvPr>
+          <p:cNvPicPr>
+            <a:picLocks noChangeAspect="1"/>
+          </p:cNvPicPr>
+          <p:nvPr/>
+        </p:nvPicPr>
+        <p:blipFill>
+          <a:blip r:embed="rId3">
+            <a:extLst>
+              <a:ext uri="{28A0092B-C50C-407E-A947-70E740481C1C}">
+                <a14:useLocalDpi xmlns:a14="http://schemas.microsoft.com/office/drawing/2010/main" val="0"/>
+              </a:ext>
+            </a:extLst>
+          </a:blip>
+          <a:stretch>
+            <a:fillRect/>
+          </a:stretch>
+        </p:blipFill>
+        <p:spPr>
+          <a:xfrm>
+            <a:off x="1051628" y="5006424"/>
+            <a:ext cx="10341632" cy="1305475"/>
+          </a:xfrm>
+          <a:prstGeom prst="rect">
+            <a:avLst/>
+          </a:prstGeom>
+        </p:spPr>
+      </p:pic>
+    </p:spTree>
+    <p:extLst>
+      <p:ext uri="{BB962C8B-B14F-4D97-AF65-F5344CB8AC3E}">
+        <p14:creationId xmlns:p14="http://schemas.microsoft.com/office/powerpoint/2010/main" val="1827134931"/>
+      </p:ext>
+    </p:extLst>
+  </p:cSld>
+  <p:clrMapOvr>
+    <a:masterClrMapping/>
+  </p:clrMapOvr>
+  <p:timing>
+    <p:tnLst>
+      <p:par>
+        <p:cTn id="1" dur="indefinite" restart="never" nodeType="tmRoot">
+          <p:childTnLst>
+            <p:seq concurrent="1" nextAc="seek">
+              <p:cTn id="2" dur="indefinite" nodeType="mainSeq">
+                <p:childTnLst>
+                  <p:par>
+                    <p:cTn id="3" fill="hold">
+                      <p:stCondLst>
+                        <p:cond delay="indefinite"/>
+                      </p:stCondLst>
+                      <p:childTnLst>
+                        <p:par>
+                          <p:cTn id="4" fill="hold">
+                            <p:stCondLst>
+                              <p:cond delay="0"/>
+                            </p:stCondLst>
+                            <p:childTnLst>
+                              <p:par>
+                                <p:cTn id="5" presetID="10" presetClass="entr" presetSubtype="0" fill="hold" nodeType="clickEffect">
+                                  <p:stCondLst>
+                                    <p:cond delay="0"/>
+                                  </p:stCondLst>
+                                  <p:childTnLst>
+                                    <p:set>
+                                      <p:cBhvr>
+                                        <p:cTn id="6" dur="1" fill="hold">
+                                          <p:stCondLst>
+                                            <p:cond delay="0"/>
+                                          </p:stCondLst>
+                                        </p:cTn>
+                                        <p:tgtEl>
+                                          <p:spTgt spid="3">
+                                            <p:txEl>
+                                              <p:pRg st="0" end="0"/>
+                                            </p:txEl>
+                                          </p:spTgt>
+                                        </p:tgtEl>
+                                        <p:attrNameLst>
+                                          <p:attrName>style.visibility</p:attrName>
+                                        </p:attrNameLst>
+                                      </p:cBhvr>
+                                      <p:to>
+                                        <p:strVal val="visible"/>
+                                      </p:to>
+                                    </p:set>
+                                    <p:animEffect transition="in" filter="fade">
+                                      <p:cBhvr>
+                                        <p:cTn id="7" dur="500"/>
+                                        <p:tgtEl>
+                                          <p:spTgt spid="3">
+                                            <p:txEl>
+                                              <p:pRg st="0" end="0"/>
+                                            </p:txEl>
+                                          </p:spTgt>
+                                        </p:tgtEl>
+                                      </p:cBhvr>
+                                    </p:animEffect>
+                                  </p:childTnLst>
+                                </p:cTn>
+                              </p:par>
+                            </p:childTnLst>
+                          </p:cTn>
+                        </p:par>
+                      </p:childTnLst>
+                    </p:cTn>
+                  </p:par>
+                  <p:par>
+                    <p:cTn id="8" fill="hold">
+                      <p:stCondLst>
+                        <p:cond delay="indefinite"/>
+                      </p:stCondLst>
+                      <p:childTnLst>
+                        <p:par>
+                          <p:cTn id="9" fill="hold">
+                            <p:stCondLst>
+                              <p:cond delay="0"/>
+                            </p:stCondLst>
+                            <p:childTnLst>
+                              <p:par>
+                                <p:cTn id="10" presetID="10" presetClass="entr" presetSubtype="0" fill="hold" nodeType="clickEffect">
+                                  <p:stCondLst>
+                                    <p:cond delay="0"/>
+                                  </p:stCondLst>
+                                  <p:childTnLst>
+                                    <p:set>
+                                      <p:cBhvr>
+                                        <p:cTn id="11" dur="1" fill="hold">
+                                          <p:stCondLst>
+                                            <p:cond delay="0"/>
+                                          </p:stCondLst>
+                                        </p:cTn>
+                                        <p:tgtEl>
+                                          <p:spTgt spid="5"/>
+                                        </p:tgtEl>
+                                        <p:attrNameLst>
+                                          <p:attrName>style.visibility</p:attrName>
+                                        </p:attrNameLst>
+                                      </p:cBhvr>
+                                      <p:to>
+                                        <p:strVal val="visible"/>
+                                      </p:to>
+                                    </p:set>
+                                    <p:animEffect transition="in" filter="fade">
+                                      <p:cBhvr>
+                                        <p:cTn id="12" dur="500"/>
+                                        <p:tgtEl>
+                                          <p:spTgt spid="5"/>
+                                        </p:tgtEl>
+                                      </p:cBhvr>
+                                    </p:animEffect>
+                                  </p:childTnLst>
+                                </p:cTn>
+                              </p:par>
+                            </p:childTnLst>
+                          </p:cTn>
+                        </p:par>
+                      </p:childTnLst>
+                    </p:cTn>
+                  </p:par>
+                  <p:par>
+                    <p:cTn id="13" fill="hold">
+                      <p:stCondLst>
+                        <p:cond delay="indefinite"/>
+                      </p:stCondLst>
+                      <p:childTnLst>
+                        <p:par>
+                          <p:cTn id="14" fill="hold">
+                            <p:stCondLst>
+                              <p:cond delay="0"/>
+                            </p:stCondLst>
+                            <p:childTnLst>
+                              <p:par>
+                                <p:cTn id="15" presetID="10" presetClass="entr" presetSubtype="0" fill="hold" nodeType="clickEffect">
+                                  <p:stCondLst>
+                                    <p:cond delay="0"/>
+                                  </p:stCondLst>
+                                  <p:childTnLst>
+                                    <p:set>
+                                      <p:cBhvr>
+                                        <p:cTn id="16" dur="1" fill="hold">
+                                          <p:stCondLst>
+                                            <p:cond delay="0"/>
+                                          </p:stCondLst>
+                                        </p:cTn>
+                                        <p:tgtEl>
+                                          <p:spTgt spid="3">
+                                            <p:txEl>
+                                              <p:pRg st="1" end="1"/>
+                                            </p:txEl>
+                                          </p:spTgt>
+                                        </p:tgtEl>
+                                        <p:attrNameLst>
+                                          <p:attrName>style.visibility</p:attrName>
+                                        </p:attrNameLst>
+                                      </p:cBhvr>
+                                      <p:to>
+                                        <p:strVal val="visible"/>
+                                      </p:to>
+                                    </p:set>
+                                    <p:animEffect transition="in" filter="fade">
+                                      <p:cBhvr>
+                                        <p:cTn id="17" dur="500"/>
+                                        <p:tgtEl>
+                                          <p:spTgt spid="3">
+                                            <p:txEl>
+                                              <p:pRg st="1" end="1"/>
+                                            </p:txEl>
+                                          </p:spTgt>
+                                        </p:tgtEl>
+                                      </p:cBhvr>
+                                    </p:animEffect>
+                                  </p:childTnLst>
+                                </p:cTn>
+                              </p:par>
+                              <p:par>
+                                <p:cTn id="18" presetID="10" presetClass="entr" presetSubtype="0" fill="hold" nodeType="withEffect">
+                                  <p:stCondLst>
+                                    <p:cond delay="0"/>
+                                  </p:stCondLst>
+                                  <p:childTnLst>
+                                    <p:set>
+                                      <p:cBhvr>
+                                        <p:cTn id="19" dur="1" fill="hold">
+                                          <p:stCondLst>
+                                            <p:cond delay="0"/>
+                                          </p:stCondLst>
+                                        </p:cTn>
+                                        <p:tgtEl>
+                                          <p:spTgt spid="3">
+                                            <p:txEl>
+                                              <p:pRg st="2" end="2"/>
+                                            </p:txEl>
+                                          </p:spTgt>
+                                        </p:tgtEl>
+                                        <p:attrNameLst>
+                                          <p:attrName>style.visibility</p:attrName>
+                                        </p:attrNameLst>
+                                      </p:cBhvr>
+                                      <p:to>
+                                        <p:strVal val="visible"/>
+                                      </p:to>
+                                    </p:set>
+                                    <p:animEffect transition="in" filter="fade">
+                                      <p:cBhvr>
+                                        <p:cTn id="20" dur="500"/>
+                                        <p:tgtEl>
+                                          <p:spTgt spid="3">
+                                            <p:txEl>
+                                              <p:pRg st="2" end="2"/>
+                                            </p:txEl>
+                                          </p:spTgt>
+                                        </p:tgtEl>
+                                      </p:cBhvr>
+                                    </p:animEffect>
+                                  </p:childTnLst>
+                                </p:cTn>
+                              </p:par>
+                            </p:childTnLst>
+                          </p:cTn>
+                        </p:par>
+                      </p:childTnLst>
+                    </p:cTn>
+                  </p:par>
+                  <p:par>
+                    <p:cTn id="21" fill="hold">
+                      <p:stCondLst>
+                        <p:cond delay="indefinite"/>
+                      </p:stCondLst>
+                      <p:childTnLst>
+                        <p:par>
+                          <p:cTn id="22" fill="hold">
+                            <p:stCondLst>
+                              <p:cond delay="0"/>
+                            </p:stCondLst>
+                            <p:childTnLst>
+                              <p:par>
+                                <p:cTn id="23" presetID="10" presetClass="entr" presetSubtype="0" fill="hold" nodeType="clickEffect">
+                                  <p:stCondLst>
+                                    <p:cond delay="0"/>
+                                  </p:stCondLst>
+                                  <p:childTnLst>
+                                    <p:set>
+                                      <p:cBhvr>
+                                        <p:cTn id="24" dur="1" fill="hold">
+                                          <p:stCondLst>
+                                            <p:cond delay="0"/>
+                                          </p:stCondLst>
+                                        </p:cTn>
+                                        <p:tgtEl>
+                                          <p:spTgt spid="3">
+                                            <p:txEl>
+                                              <p:pRg st="3" end="3"/>
+                                            </p:txEl>
+                                          </p:spTgt>
+                                        </p:tgtEl>
+                                        <p:attrNameLst>
+                                          <p:attrName>style.visibility</p:attrName>
+                                        </p:attrNameLst>
+                                      </p:cBhvr>
+                                      <p:to>
+                                        <p:strVal val="visible"/>
+                                      </p:to>
+                                    </p:set>
+                                    <p:animEffect transition="in" filter="fade">
+                                      <p:cBhvr>
+                                        <p:cTn id="25" dur="500"/>
+                                        <p:tgtEl>
+                                          <p:spTgt spid="3">
+                                            <p:txEl>
+                                              <p:pRg st="3" end="3"/>
+                                            </p:txEl>
+                                          </p:spTgt>
+                                        </p:tgtEl>
+                                      </p:cBhvr>
+                                    </p:animEffect>
+                                  </p:childTnLst>
+                                </p:cTn>
+                              </p:par>
+                            </p:childTnLst>
+                          </p:cTn>
+                        </p:par>
+                      </p:childTnLst>
+                    </p:cTn>
+                  </p:par>
+                </p:childTnLst>
+              </p:cTn>
+              <p:prevCondLst>
+                <p:cond evt="onPrev" delay="0">
+                  <p:tgtEl>
+                    <p:sldTgt/>
+                  </p:tgtEl>
+                </p:cond>
+              </p:prevCondLst>
+              <p:nextCondLst>
+                <p:cond evt="onNext" delay="0">
+                  <p:tgtEl>
+                    <p:sldTgt/>
+                  </p:tgtEl>
+                </p:cond>
+              </p:nextCondLst>
+            </p:seq>
+          </p:childTnLst>
+        </p:cTn>
+      </p:par>
+    </p:tnLst>
+  </p:timing>
+</p:sld>
+</file>
+
+<file path=ppt/slides/slide27.xml><?xml version="1.0" encoding="utf-8"?>
+<p:sld xmlns:a="http://schemas.openxmlformats.org/drawingml/2006/main" xmlns:r="http://schemas.openxmlformats.org/officeDocument/2006/relationships" xmlns:p="http://schemas.openxmlformats.org/presentationml/2006/main">
+  <p:cSld>
+    <p:spTree>
+      <p:nvGrpSpPr>
+        <p:cNvPr id="1" name=""/>
+        <p:cNvGrpSpPr/>
+        <p:nvPr/>
+      </p:nvGrpSpPr>
+      <p:grpSpPr>
+        <a:xfrm>
+          <a:off x="0" y="0"/>
+          <a:ext cx="0" cy="0"/>
+          <a:chOff x="0" y="0"/>
+          <a:chExt cx="0" cy="0"/>
+        </a:xfrm>
+      </p:grpSpPr>
+      <p:sp>
+        <p:nvSpPr>
+          <p:cNvPr id="2" name="Title 1">
+            <a:extLst>
+              <a:ext uri="{FF2B5EF4-FFF2-40B4-BE49-F238E27FC236}">
+                <a16:creationId xmlns:a16="http://schemas.microsoft.com/office/drawing/2014/main" id="{A3AE111A-CB50-25DC-B8F6-8508086942F3}"/>
+              </a:ext>
+            </a:extLst>
+          </p:cNvPr>
+          <p:cNvSpPr>
+            <a:spLocks noGrp="1"/>
+          </p:cNvSpPr>
+          <p:nvPr>
+            <p:ph type="title"/>
+          </p:nvPr>
+        </p:nvSpPr>
+        <p:spPr/>
+        <p:txBody>
+          <a:bodyPr/>
+          <a:lstStyle/>
+          <a:p>
+            <a:r>
+              <a:rPr lang="en-US" altLang="zh-CN" dirty="0"/>
+              <a:t>Where did the String class come from?</a:t>
+            </a:r>
+            <a:endParaRPr lang="zh-CN" altLang="en-US" dirty="0"/>
+          </a:p>
+        </p:txBody>
+      </p:sp>
+      <p:pic>
+        <p:nvPicPr>
+          <p:cNvPr id="5" name="Content Placeholder 4" descr="A bookcase with many books&#10;&#10;AI-generated content may be incorrect.">
+            <a:extLst>
+              <a:ext uri="{FF2B5EF4-FFF2-40B4-BE49-F238E27FC236}">
+                <a16:creationId xmlns:a16="http://schemas.microsoft.com/office/drawing/2014/main" id="{162B4D22-0588-D00A-47AC-EA773E94C99A}"/>
+              </a:ext>
+            </a:extLst>
+          </p:cNvPr>
+          <p:cNvPicPr>
+            <a:picLocks noGrp="1" noChangeAspect="1"/>
+          </p:cNvPicPr>
+          <p:nvPr>
+            <p:ph idx="1"/>
+          </p:nvPr>
+        </p:nvPicPr>
+        <p:blipFill>
+          <a:blip r:embed="rId3">
+            <a:extLst>
+              <a:ext uri="{28A0092B-C50C-407E-A947-70E740481C1C}">
+                <a14:useLocalDpi xmlns:a14="http://schemas.microsoft.com/office/drawing/2010/main" val="0"/>
+              </a:ext>
+            </a:extLst>
+          </a:blip>
+          <a:stretch>
+            <a:fillRect/>
+          </a:stretch>
+        </p:blipFill>
+        <p:spPr>
+          <a:xfrm>
+            <a:off x="1878024" y="1690688"/>
+            <a:ext cx="8099095" cy="4788590"/>
+          </a:xfrm>
+        </p:spPr>
+      </p:pic>
+      <p:sp>
+        <p:nvSpPr>
+          <p:cNvPr id="6" name="TextBox 5">
+            <a:extLst>
+              <a:ext uri="{FF2B5EF4-FFF2-40B4-BE49-F238E27FC236}">
+                <a16:creationId xmlns:a16="http://schemas.microsoft.com/office/drawing/2014/main" id="{32C6465D-9A8A-AC20-B0DF-B46690B413B7}"/>
+              </a:ext>
+            </a:extLst>
+          </p:cNvPr>
+          <p:cNvSpPr txBox="1"/>
+          <p:nvPr/>
+        </p:nvSpPr>
+        <p:spPr>
+          <a:xfrm>
+            <a:off x="2885440" y="1879600"/>
+            <a:ext cx="1229824" cy="523220"/>
+          </a:xfrm>
+          <a:prstGeom prst="rect">
+            <a:avLst/>
+          </a:prstGeom>
+          <a:noFill/>
+        </p:spPr>
+        <p:txBody>
+          <a:bodyPr wrap="none" rtlCol="0">
+            <a:spAutoFit/>
+          </a:bodyPr>
+          <a:lstStyle/>
+          <a:p>
+            <a:r>
+              <a:rPr lang="en-US" altLang="zh-CN" sz="2800" dirty="0"/>
+              <a:t>Library</a:t>
+            </a:r>
+            <a:endParaRPr lang="zh-CN" altLang="en-US" sz="2800" dirty="0"/>
+          </a:p>
+        </p:txBody>
+      </p:sp>
+      <p:sp>
+        <p:nvSpPr>
+          <p:cNvPr id="7" name="TextBox 6">
+            <a:extLst>
+              <a:ext uri="{FF2B5EF4-FFF2-40B4-BE49-F238E27FC236}">
+                <a16:creationId xmlns:a16="http://schemas.microsoft.com/office/drawing/2014/main" id="{356D9DE2-4AC4-3EA2-444C-3422F44E83A2}"/>
+              </a:ext>
+            </a:extLst>
+          </p:cNvPr>
+          <p:cNvSpPr txBox="1"/>
+          <p:nvPr/>
+        </p:nvSpPr>
+        <p:spPr>
+          <a:xfrm>
+            <a:off x="6908800" y="1523534"/>
+            <a:ext cx="1463862" cy="523220"/>
+          </a:xfrm>
+          <a:prstGeom prst="rect">
+            <a:avLst/>
+          </a:prstGeom>
+          <a:noFill/>
+        </p:spPr>
+        <p:txBody>
+          <a:bodyPr wrap="none" rtlCol="0">
+            <a:spAutoFit/>
+          </a:bodyPr>
+          <a:lstStyle/>
+          <a:p>
+            <a:r>
+              <a:rPr lang="en-US" altLang="zh-CN" sz="2800" dirty="0"/>
+              <a:t>Package</a:t>
+            </a:r>
+            <a:endParaRPr lang="zh-CN" altLang="en-US" sz="2800" dirty="0"/>
+          </a:p>
+        </p:txBody>
+      </p:sp>
+      <p:sp>
+        <p:nvSpPr>
+          <p:cNvPr id="8" name="TextBox 7">
+            <a:extLst>
+              <a:ext uri="{FF2B5EF4-FFF2-40B4-BE49-F238E27FC236}">
+                <a16:creationId xmlns:a16="http://schemas.microsoft.com/office/drawing/2014/main" id="{F1D0E23B-5BF4-498F-9C7B-58D42FF35ABB}"/>
+              </a:ext>
+            </a:extLst>
+          </p:cNvPr>
+          <p:cNvSpPr txBox="1"/>
+          <p:nvPr/>
+        </p:nvSpPr>
+        <p:spPr>
+          <a:xfrm>
+            <a:off x="10170160" y="3763076"/>
+            <a:ext cx="1289135" cy="523220"/>
+          </a:xfrm>
+          <a:prstGeom prst="rect">
+            <a:avLst/>
+          </a:prstGeom>
+          <a:noFill/>
+        </p:spPr>
+        <p:txBody>
+          <a:bodyPr wrap="none" rtlCol="0">
+            <a:spAutoFit/>
+          </a:bodyPr>
+          <a:lstStyle/>
+          <a:p>
+            <a:r>
+              <a:rPr lang="en-US" altLang="zh-CN" sz="2800" dirty="0"/>
+              <a:t>Classes</a:t>
+            </a:r>
+            <a:endParaRPr lang="zh-CN" altLang="en-US" sz="2800" dirty="0"/>
+          </a:p>
+        </p:txBody>
+      </p:sp>
+    </p:spTree>
+    <p:extLst>
+      <p:ext uri="{BB962C8B-B14F-4D97-AF65-F5344CB8AC3E}">
+        <p14:creationId xmlns:p14="http://schemas.microsoft.com/office/powerpoint/2010/main" val="895912602"/>
+      </p:ext>
+    </p:extLst>
+  </p:cSld>
+  <p:clrMapOvr>
+    <a:masterClrMapping/>
+  </p:clrMapOvr>
+</p:sld>
+</file>
+
+<file path=ppt/slides/slide28.xml><?xml version="1.0" encoding="utf-8"?>
+<p:sld xmlns:a="http://schemas.openxmlformats.org/drawingml/2006/main" xmlns:r="http://schemas.openxmlformats.org/officeDocument/2006/relationships" xmlns:p="http://schemas.openxmlformats.org/presentationml/2006/main">
+  <p:cSld>
+    <p:spTree>
+      <p:nvGrpSpPr>
+        <p:cNvPr id="1" name=""/>
+        <p:cNvGrpSpPr/>
+        <p:nvPr/>
+      </p:nvGrpSpPr>
+      <p:grpSpPr>
+        <a:xfrm>
+          <a:off x="0" y="0"/>
+          <a:ext cx="0" cy="0"/>
+          <a:chOff x="0" y="0"/>
+          <a:chExt cx="0" cy="0"/>
+        </a:xfrm>
+      </p:grpSpPr>
+      <p:sp>
+        <p:nvSpPr>
+          <p:cNvPr id="2" name="Title 1">
+            <a:extLst>
+              <a:ext uri="{FF2B5EF4-FFF2-40B4-BE49-F238E27FC236}">
+                <a16:creationId xmlns:a16="http://schemas.microsoft.com/office/drawing/2014/main" id="{09A43702-89DF-7347-CBB0-BCEB9C65FF12}"/>
+              </a:ext>
+            </a:extLst>
+          </p:cNvPr>
+          <p:cNvSpPr>
+            <a:spLocks noGrp="1"/>
+          </p:cNvSpPr>
+          <p:nvPr>
+            <p:ph type="title"/>
+          </p:nvPr>
+        </p:nvSpPr>
+        <p:spPr/>
+        <p:txBody>
+          <a:bodyPr/>
+          <a:lstStyle/>
+          <a:p>
+            <a:r>
+              <a:rPr lang="en-US" altLang="zh-CN" dirty="0"/>
+              <a:t>API (Application Programming Interface)</a:t>
+            </a:r>
+            <a:endParaRPr lang="zh-CN" altLang="en-US" dirty="0"/>
+          </a:p>
+        </p:txBody>
+      </p:sp>
+      <p:sp>
+        <p:nvSpPr>
+          <p:cNvPr id="3" name="Content Placeholder 2">
+            <a:extLst>
+              <a:ext uri="{FF2B5EF4-FFF2-40B4-BE49-F238E27FC236}">
+                <a16:creationId xmlns:a16="http://schemas.microsoft.com/office/drawing/2014/main" id="{E8D46C6F-2A4F-2A1D-F5AB-3BAB3A267833}"/>
+              </a:ext>
+            </a:extLst>
+          </p:cNvPr>
+          <p:cNvSpPr>
+            <a:spLocks noGrp="1"/>
+          </p:cNvSpPr>
+          <p:nvPr>
+            <p:ph idx="1"/>
+          </p:nvPr>
+        </p:nvSpPr>
+        <p:spPr/>
+        <p:txBody>
+          <a:bodyPr/>
+          <a:lstStyle/>
+          <a:p>
+            <a:r>
+              <a:rPr lang="en-US" altLang="zh-CN" dirty="0"/>
+              <a:t>API is a </a:t>
+            </a:r>
+            <a:r>
+              <a:rPr lang="en-US" altLang="zh-CN" b="1" dirty="0"/>
+              <a:t>set of instruction </a:t>
+            </a:r>
+            <a:r>
+              <a:rPr lang="en-US" altLang="zh-CN" dirty="0"/>
+              <a:t>on how to use the class, it allows us to use the class and methods without knowing how its implemented by reading the </a:t>
+            </a:r>
+            <a:r>
+              <a:rPr lang="en-US" altLang="zh-CN" b="1" dirty="0"/>
+              <a:t>documentations</a:t>
+            </a:r>
+          </a:p>
+          <a:p>
+            <a:r>
+              <a:rPr lang="en-US" altLang="zh-CN" dirty="0"/>
+              <a:t>Example:</a:t>
+            </a:r>
+          </a:p>
+          <a:p>
+            <a:pPr lvl="1"/>
+            <a:r>
+              <a:rPr lang="en-US" altLang="zh-CN" dirty="0"/>
+              <a:t>Search “Java String class API”</a:t>
+            </a:r>
+            <a:endParaRPr lang="zh-CN" altLang="en-US" dirty="0"/>
+          </a:p>
+        </p:txBody>
+      </p:sp>
+    </p:spTree>
+    <p:extLst>
+      <p:ext uri="{BB962C8B-B14F-4D97-AF65-F5344CB8AC3E}">
+        <p14:creationId xmlns:p14="http://schemas.microsoft.com/office/powerpoint/2010/main" val="2712992092"/>
+      </p:ext>
+    </p:extLst>
+  </p:cSld>
+  <p:clrMapOvr>
+    <a:masterClrMapping/>
+  </p:clrMapOvr>
+</p:sld>
+</file>
+
+<file path=ppt/slides/slide29.xml><?xml version="1.0" encoding="utf-8"?>
+<p:sld xmlns:a="http://schemas.openxmlformats.org/drawingml/2006/main" xmlns:r="http://schemas.openxmlformats.org/officeDocument/2006/relationships" xmlns:p="http://schemas.openxmlformats.org/presentationml/2006/main">
+  <p:cSld>
+    <p:spTree>
+      <p:nvGrpSpPr>
+        <p:cNvPr id="1" name=""/>
+        <p:cNvGrpSpPr/>
+        <p:nvPr/>
+      </p:nvGrpSpPr>
+      <p:grpSpPr>
+        <a:xfrm>
+          <a:off x="0" y="0"/>
+          <a:ext cx="0" cy="0"/>
+          <a:chOff x="0" y="0"/>
+          <a:chExt cx="0" cy="0"/>
+        </a:xfrm>
+      </p:grpSpPr>
+      <p:sp>
+        <p:nvSpPr>
+          <p:cNvPr id="2" name="Title 1">
+            <a:extLst>
+              <a:ext uri="{FF2B5EF4-FFF2-40B4-BE49-F238E27FC236}">
+                <a16:creationId xmlns:a16="http://schemas.microsoft.com/office/drawing/2014/main" id="{6ACC0BCA-1853-AE9A-70C0-D7242D1706EE}"/>
+              </a:ext>
+            </a:extLst>
+          </p:cNvPr>
+          <p:cNvSpPr>
+            <a:spLocks noGrp="1"/>
+          </p:cNvSpPr>
+          <p:nvPr>
+            <p:ph type="title"/>
+          </p:nvPr>
+        </p:nvSpPr>
+        <p:spPr/>
+        <p:txBody>
+          <a:bodyPr/>
+          <a:lstStyle/>
+          <a:p>
+            <a:r>
+              <a:rPr lang="en-US" altLang="zh-CN" dirty="0"/>
+              <a:t>2.9 Wrapper Class </a:t>
+            </a:r>
+            <a:endParaRPr lang="zh-CN" altLang="en-US" dirty="0"/>
+          </a:p>
+        </p:txBody>
+      </p:sp>
+      <p:sp>
+        <p:nvSpPr>
+          <p:cNvPr id="3" name="Content Placeholder 2">
+            <a:extLst>
+              <a:ext uri="{FF2B5EF4-FFF2-40B4-BE49-F238E27FC236}">
+                <a16:creationId xmlns:a16="http://schemas.microsoft.com/office/drawing/2014/main" id="{88E927B4-B0D2-6260-9816-D63887BD2A57}"/>
+              </a:ext>
+            </a:extLst>
+          </p:cNvPr>
+          <p:cNvSpPr>
+            <a:spLocks noGrp="1"/>
+          </p:cNvSpPr>
+          <p:nvPr>
+            <p:ph idx="1"/>
+          </p:nvPr>
+        </p:nvSpPr>
+        <p:spPr/>
+        <p:txBody>
+          <a:bodyPr/>
+          <a:lstStyle/>
+          <a:p>
+            <a:r>
+              <a:rPr lang="en-US" altLang="zh-CN" dirty="0"/>
+              <a:t>int, double are called primitive types</a:t>
+            </a:r>
+          </a:p>
+          <a:p>
+            <a:r>
+              <a:rPr lang="en-US" altLang="zh-CN" dirty="0"/>
+              <a:t>Integer and Double are its corresponding </a:t>
+            </a:r>
+            <a:r>
+              <a:rPr lang="en-US" altLang="zh-CN" b="1" dirty="0"/>
+              <a:t>wrapper class</a:t>
+            </a:r>
+            <a:r>
+              <a:rPr lang="en-US" altLang="zh-CN" dirty="0"/>
+              <a:t>, which are reference types (objects)</a:t>
+            </a:r>
+          </a:p>
+          <a:p>
+            <a:r>
+              <a:rPr lang="en-US" altLang="zh-CN" dirty="0"/>
+              <a:t>The “only reason that you are learning this wrapper class is that in the future we will learn a new data structure which only takes in reference types</a:t>
+            </a:r>
+            <a:endParaRPr lang="zh-CN" altLang="en-US" dirty="0"/>
+          </a:p>
+        </p:txBody>
+      </p:sp>
+    </p:spTree>
+    <p:extLst>
+      <p:ext uri="{BB962C8B-B14F-4D97-AF65-F5344CB8AC3E}">
+        <p14:creationId xmlns:p14="http://schemas.microsoft.com/office/powerpoint/2010/main" val="1607474524"/>
+      </p:ext>
+    </p:extLst>
+  </p:cSld>
+  <p:clrMapOvr>
+    <a:masterClrMapping/>
+  </p:clrMapOvr>
+  <p:timing>
+    <p:tnLst>
+      <p:par>
+        <p:cTn id="1" dur="indefinite" restart="never" nodeType="tmRoot">
+          <p:childTnLst>
+            <p:seq concurrent="1" nextAc="seek">
+              <p:cTn id="2" dur="indefinite" nodeType="mainSeq">
+                <p:childTnLst>
+                  <p:par>
+                    <p:cTn id="3" fill="hold">
+                      <p:stCondLst>
+                        <p:cond delay="indefinite"/>
+                      </p:stCondLst>
+                      <p:childTnLst>
+                        <p:par>
+                          <p:cTn id="4" fill="hold">
+                            <p:stCondLst>
+                              <p:cond delay="0"/>
+                            </p:stCondLst>
+                            <p:childTnLst>
+                              <p:par>
+                                <p:cTn id="5" presetID="10" presetClass="entr" presetSubtype="0" fill="hold" nodeType="clickEffect">
+                                  <p:stCondLst>
+                                    <p:cond delay="0"/>
+                                  </p:stCondLst>
+                                  <p:childTnLst>
+                                    <p:set>
+                                      <p:cBhvr>
+                                        <p:cTn id="6" dur="1" fill="hold">
+                                          <p:stCondLst>
+                                            <p:cond delay="0"/>
+                                          </p:stCondLst>
+                                        </p:cTn>
+                                        <p:tgtEl>
+                                          <p:spTgt spid="3">
+                                            <p:txEl>
+                                              <p:pRg st="0" end="0"/>
+                                            </p:txEl>
+                                          </p:spTgt>
+                                        </p:tgtEl>
+                                        <p:attrNameLst>
+                                          <p:attrName>style.visibility</p:attrName>
+                                        </p:attrNameLst>
+                                      </p:cBhvr>
+                                      <p:to>
+                                        <p:strVal val="visible"/>
+                                      </p:to>
+                                    </p:set>
+                                    <p:animEffect transition="in" filter="fade">
+                                      <p:cBhvr>
+                                        <p:cTn id="7" dur="500"/>
+                                        <p:tgtEl>
+                                          <p:spTgt spid="3">
+                                            <p:txEl>
+                                              <p:pRg st="0" end="0"/>
+                                            </p:txEl>
+                                          </p:spTgt>
+                                        </p:tgtEl>
+                                      </p:cBhvr>
+                                    </p:animEffect>
+                                  </p:childTnLst>
+                                </p:cTn>
+                              </p:par>
+                            </p:childTnLst>
+                          </p:cTn>
+                        </p:par>
+                      </p:childTnLst>
+                    </p:cTn>
+                  </p:par>
+                  <p:par>
+                    <p:cTn id="8" fill="hold">
+                      <p:stCondLst>
+                        <p:cond delay="indefinite"/>
+                      </p:stCondLst>
+                      <p:childTnLst>
+                        <p:par>
+                          <p:cTn id="9" fill="hold">
+                            <p:stCondLst>
+                              <p:cond delay="0"/>
+                            </p:stCondLst>
+                            <p:childTnLst>
+                              <p:par>
+                                <p:cTn id="10" presetID="10" presetClass="entr" presetSubtype="0" fill="hold" nodeType="clickEffect">
+                                  <p:stCondLst>
+                                    <p:cond delay="0"/>
+                                  </p:stCondLst>
+                                  <p:childTnLst>
+                                    <p:set>
+                                      <p:cBhvr>
+                                        <p:cTn id="11" dur="1" fill="hold">
+                                          <p:stCondLst>
+                                            <p:cond delay="0"/>
+                                          </p:stCondLst>
+                                        </p:cTn>
+                                        <p:tgtEl>
+                                          <p:spTgt spid="3">
+                                            <p:txEl>
+                                              <p:pRg st="1" end="1"/>
+                                            </p:txEl>
+                                          </p:spTgt>
+                                        </p:tgtEl>
+                                        <p:attrNameLst>
+                                          <p:attrName>style.visibility</p:attrName>
+                                        </p:attrNameLst>
+                                      </p:cBhvr>
+                                      <p:to>
+                                        <p:strVal val="visible"/>
+                                      </p:to>
+                                    </p:set>
+                                    <p:animEffect transition="in" filter="fade">
+                                      <p:cBhvr>
+                                        <p:cTn id="12" dur="500"/>
+                                        <p:tgtEl>
+                                          <p:spTgt spid="3">
+                                            <p:txEl>
+                                              <p:pRg st="1" end="1"/>
+                                            </p:txEl>
+                                          </p:spTgt>
+                                        </p:tgtEl>
+                                      </p:cBhvr>
+                                    </p:animEffect>
+                                  </p:childTnLst>
+                                </p:cTn>
+                              </p:par>
+                            </p:childTnLst>
+                          </p:cTn>
+                        </p:par>
+                      </p:childTnLst>
+                    </p:cTn>
+                  </p:par>
+                  <p:par>
+                    <p:cTn id="13" fill="hold">
+                      <p:stCondLst>
+                        <p:cond delay="indefinite"/>
+                      </p:stCondLst>
+                      <p:childTnLst>
+                        <p:par>
+                          <p:cTn id="14" fill="hold">
+                            <p:stCondLst>
+                              <p:cond delay="0"/>
+                            </p:stCondLst>
+                            <p:childTnLst>
+                              <p:par>
+                                <p:cTn id="15" presetID="10" presetClass="entr" presetSubtype="0" fill="hold" nodeType="clickEffect">
+                                  <p:stCondLst>
+                                    <p:cond delay="0"/>
+                                  </p:stCondLst>
+                                  <p:childTnLst>
+                                    <p:set>
+                                      <p:cBhvr>
+                                        <p:cTn id="16" dur="1" fill="hold">
+                                          <p:stCondLst>
+                                            <p:cond delay="0"/>
+                                          </p:stCondLst>
+                                        </p:cTn>
+                                        <p:tgtEl>
+                                          <p:spTgt spid="3">
+                                            <p:txEl>
+                                              <p:pRg st="2" end="2"/>
+                                            </p:txEl>
+                                          </p:spTgt>
+                                        </p:tgtEl>
+                                        <p:attrNameLst>
+                                          <p:attrName>style.visibility</p:attrName>
+                                        </p:attrNameLst>
+                                      </p:cBhvr>
+                                      <p:to>
+                                        <p:strVal val="visible"/>
+                                      </p:to>
+                                    </p:set>
+                                    <p:animEffect transition="in" filter="fade">
+                                      <p:cBhvr>
+                                        <p:cTn id="17" dur="500"/>
+                                        <p:tgtEl>
+                                          <p:spTgt spid="3">
+                                            <p:txEl>
+                                              <p:pRg st="2" end="2"/>
+                                            </p:txEl>
+                                          </p:spTgt>
+                                        </p:tgtEl>
+                                      </p:cBhvr>
+                                    </p:animEffect>
+                                  </p:childTnLst>
+                                </p:cTn>
+                              </p:par>
+                            </p:childTnLst>
+                          </p:cTn>
+                        </p:par>
+                      </p:childTnLst>
+                    </p:cTn>
+                  </p:par>
+                </p:childTnLst>
+              </p:cTn>
+              <p:prevCondLst>
+                <p:cond evt="onPrev" delay="0">
+                  <p:tgtEl>
+                    <p:sldTgt/>
+                  </p:tgtEl>
+                </p:cond>
+              </p:prevCondLst>
+              <p:nextCondLst>
+                <p:cond evt="onNext" delay="0">
+                  <p:tgtEl>
+                    <p:sldTgt/>
+                  </p:tgtEl>
+                </p:cond>
+              </p:nextCondLst>
+            </p:seq>
+          </p:childTnLst>
+        </p:cTn>
+      </p:par>
+    </p:tnLst>
+  </p:timing>
+</p:sld>
+</file>
+
 <file path=ppt/slides/slide3.xml><?xml version="1.0" encoding="utf-8"?>
 <p:sld xmlns:a="http://schemas.openxmlformats.org/drawingml/2006/main" xmlns:r="http://schemas.openxmlformats.org/officeDocument/2006/relationships" xmlns:p="http://schemas.openxmlformats.org/presentationml/2006/main">
   <p:cSld>
@@ -4353,6 +10551,2149 @@
   <p:clrMapOvr>
     <a:masterClrMapping/>
   </p:clrMapOvr>
+</p:sld>
+</file>
+
+<file path=ppt/slides/slide30.xml><?xml version="1.0" encoding="utf-8"?>
+<p:sld xmlns:a="http://schemas.openxmlformats.org/drawingml/2006/main" xmlns:r="http://schemas.openxmlformats.org/officeDocument/2006/relationships" xmlns:p="http://schemas.openxmlformats.org/presentationml/2006/main">
+  <p:cSld>
+    <p:spTree>
+      <p:nvGrpSpPr>
+        <p:cNvPr id="1" name=""/>
+        <p:cNvGrpSpPr/>
+        <p:nvPr/>
+      </p:nvGrpSpPr>
+      <p:grpSpPr>
+        <a:xfrm>
+          <a:off x="0" y="0"/>
+          <a:ext cx="0" cy="0"/>
+          <a:chOff x="0" y="0"/>
+          <a:chExt cx="0" cy="0"/>
+        </a:xfrm>
+      </p:grpSpPr>
+      <p:sp>
+        <p:nvSpPr>
+          <p:cNvPr id="2" name="Title 1">
+            <a:extLst>
+              <a:ext uri="{FF2B5EF4-FFF2-40B4-BE49-F238E27FC236}">
+                <a16:creationId xmlns:a16="http://schemas.microsoft.com/office/drawing/2014/main" id="{A208734E-D6E6-1072-7F1F-26862E9B636E}"/>
+              </a:ext>
+            </a:extLst>
+          </p:cNvPr>
+          <p:cNvSpPr>
+            <a:spLocks noGrp="1"/>
+          </p:cNvSpPr>
+          <p:nvPr>
+            <p:ph type="title"/>
+          </p:nvPr>
+        </p:nvSpPr>
+        <p:spPr/>
+        <p:txBody>
+          <a:bodyPr/>
+          <a:lstStyle/>
+          <a:p>
+            <a:r>
+              <a:rPr lang="en-US" altLang="zh-CN" dirty="0"/>
+              <a:t>Key Takeaway</a:t>
+            </a:r>
+            <a:endParaRPr lang="zh-CN" altLang="en-US" dirty="0"/>
+          </a:p>
+        </p:txBody>
+      </p:sp>
+      <p:sp>
+        <p:nvSpPr>
+          <p:cNvPr id="3" name="Content Placeholder 2">
+            <a:extLst>
+              <a:ext uri="{FF2B5EF4-FFF2-40B4-BE49-F238E27FC236}">
+                <a16:creationId xmlns:a16="http://schemas.microsoft.com/office/drawing/2014/main" id="{CF5193FE-706B-D7C4-8AAC-4437A0EFEC5C}"/>
+              </a:ext>
+            </a:extLst>
+          </p:cNvPr>
+          <p:cNvSpPr>
+            <a:spLocks noGrp="1"/>
+          </p:cNvSpPr>
+          <p:nvPr>
+            <p:ph idx="1"/>
+          </p:nvPr>
+        </p:nvSpPr>
+        <p:spPr/>
+        <p:txBody>
+          <a:bodyPr/>
+          <a:lstStyle/>
+          <a:p>
+            <a:r>
+              <a:rPr lang="en-US" altLang="zh-CN" dirty="0"/>
+              <a:t>In most scenarios, especially in computation, you can treat Double &amp; double, </a:t>
+            </a:r>
+            <a:r>
+              <a:rPr lang="en-US" altLang="zh-CN" dirty="0" err="1"/>
+              <a:t>Integer&amp;int</a:t>
+            </a:r>
+            <a:r>
+              <a:rPr lang="en-US" altLang="zh-CN" dirty="0"/>
+              <a:t> as the same thing due to </a:t>
+            </a:r>
+            <a:r>
+              <a:rPr lang="en-US" altLang="zh-CN" b="1" dirty="0"/>
+              <a:t>autoboxing</a:t>
+            </a:r>
+            <a:r>
+              <a:rPr lang="en-US" altLang="zh-CN" dirty="0"/>
+              <a:t> and </a:t>
+            </a:r>
+            <a:r>
+              <a:rPr lang="en-US" altLang="zh-CN" b="1" dirty="0"/>
+              <a:t>unboxing</a:t>
+            </a:r>
+          </a:p>
+          <a:p>
+            <a:r>
+              <a:rPr lang="en-US" altLang="zh-CN" dirty="0"/>
+              <a:t>The exceptions are:</a:t>
+            </a:r>
+          </a:p>
+          <a:p>
+            <a:pPr lvl="1"/>
+            <a:r>
+              <a:rPr lang="en-US" altLang="zh-CN" dirty="0"/>
+              <a:t>1. You cannot call methods from a primitive type, autoboxing will not happen here</a:t>
+            </a:r>
+          </a:p>
+          <a:p>
+            <a:pPr lvl="2"/>
+            <a:r>
+              <a:rPr lang="en-US" altLang="zh-CN" dirty="0"/>
+              <a:t>int x=5</a:t>
+            </a:r>
+          </a:p>
+          <a:p>
+            <a:pPr lvl="2"/>
+            <a:r>
+              <a:rPr lang="en-US" altLang="zh-CN" dirty="0"/>
+              <a:t>int y = </a:t>
+            </a:r>
+            <a:r>
+              <a:rPr lang="en-US" altLang="zh-CN" dirty="0" err="1"/>
+              <a:t>x.intValue</a:t>
+            </a:r>
+            <a:r>
+              <a:rPr lang="en-US" altLang="zh-CN" dirty="0"/>
+              <a:t>()</a:t>
+            </a:r>
+          </a:p>
+          <a:p>
+            <a:pPr lvl="1"/>
+            <a:r>
+              <a:rPr lang="en-US" altLang="zh-CN" dirty="0"/>
+              <a:t>2. You cannot directly typecast on the wrapper class</a:t>
+            </a:r>
+          </a:p>
+          <a:p>
+            <a:pPr lvl="2"/>
+            <a:r>
+              <a:rPr lang="en-US" altLang="zh-CN" dirty="0"/>
+              <a:t>Double x=5.5;</a:t>
+            </a:r>
+          </a:p>
+          <a:p>
+            <a:pPr lvl="2"/>
+            <a:r>
+              <a:rPr lang="en-US" altLang="zh-CN" dirty="0"/>
+              <a:t>int y = (int) x;</a:t>
+            </a:r>
+            <a:endParaRPr lang="zh-CN" altLang="en-US" dirty="0"/>
+          </a:p>
+        </p:txBody>
+      </p:sp>
+      <p:sp>
+        <p:nvSpPr>
+          <p:cNvPr id="5" name="Multiplication Sign 4">
+            <a:extLst>
+              <a:ext uri="{FF2B5EF4-FFF2-40B4-BE49-F238E27FC236}">
+                <a16:creationId xmlns:a16="http://schemas.microsoft.com/office/drawing/2014/main" id="{5760DB27-8411-27D6-E919-CC845C970B29}"/>
+              </a:ext>
+            </a:extLst>
+          </p:cNvPr>
+          <p:cNvSpPr/>
+          <p:nvPr/>
+        </p:nvSpPr>
+        <p:spPr>
+          <a:xfrm>
+            <a:off x="1917291" y="4483509"/>
+            <a:ext cx="2143432" cy="641811"/>
+          </a:xfrm>
+          <a:prstGeom prst="mathMultiply">
+            <a:avLst/>
+          </a:prstGeom>
+          <a:solidFill>
+            <a:srgbClr val="FF0000"/>
+          </a:solidFill>
+        </p:spPr>
+        <p:style>
+          <a:lnRef idx="2">
+            <a:schemeClr val="accent1">
+              <a:shade val="15000"/>
+            </a:schemeClr>
+          </a:lnRef>
+          <a:fillRef idx="1">
+            <a:schemeClr val="accent1"/>
+          </a:fillRef>
+          <a:effectRef idx="0">
+            <a:schemeClr val="accent1"/>
+          </a:effectRef>
+          <a:fontRef idx="minor">
+            <a:schemeClr val="lt1"/>
+          </a:fontRef>
+        </p:style>
+        <p:txBody>
+          <a:bodyPr rtlCol="0" anchor="ctr"/>
+          <a:lstStyle/>
+          <a:p>
+            <a:pPr algn="ctr"/>
+            <a:endParaRPr lang="zh-CN" altLang="en-US" dirty="0"/>
+          </a:p>
+        </p:txBody>
+      </p:sp>
+      <p:sp>
+        <p:nvSpPr>
+          <p:cNvPr id="6" name="Multiplication Sign 5">
+            <a:extLst>
+              <a:ext uri="{FF2B5EF4-FFF2-40B4-BE49-F238E27FC236}">
+                <a16:creationId xmlns:a16="http://schemas.microsoft.com/office/drawing/2014/main" id="{926D728F-02FC-21C4-4905-FD7151EC9F9F}"/>
+              </a:ext>
+            </a:extLst>
+          </p:cNvPr>
+          <p:cNvSpPr/>
+          <p:nvPr/>
+        </p:nvSpPr>
+        <p:spPr>
+          <a:xfrm>
+            <a:off x="1725562" y="5535152"/>
+            <a:ext cx="2143432" cy="641811"/>
+          </a:xfrm>
+          <a:prstGeom prst="mathMultiply">
+            <a:avLst/>
+          </a:prstGeom>
+          <a:solidFill>
+            <a:srgbClr val="FF0000"/>
+          </a:solidFill>
+        </p:spPr>
+        <p:style>
+          <a:lnRef idx="2">
+            <a:schemeClr val="accent1">
+              <a:shade val="15000"/>
+            </a:schemeClr>
+          </a:lnRef>
+          <a:fillRef idx="1">
+            <a:schemeClr val="accent1"/>
+          </a:fillRef>
+          <a:effectRef idx="0">
+            <a:schemeClr val="accent1"/>
+          </a:effectRef>
+          <a:fontRef idx="minor">
+            <a:schemeClr val="lt1"/>
+          </a:fontRef>
+        </p:style>
+        <p:txBody>
+          <a:bodyPr rtlCol="0" anchor="ctr"/>
+          <a:lstStyle/>
+          <a:p>
+            <a:pPr algn="ctr"/>
+            <a:endParaRPr lang="zh-CN" altLang="en-US"/>
+          </a:p>
+        </p:txBody>
+      </p:sp>
+    </p:spTree>
+    <p:extLst>
+      <p:ext uri="{BB962C8B-B14F-4D97-AF65-F5344CB8AC3E}">
+        <p14:creationId xmlns:p14="http://schemas.microsoft.com/office/powerpoint/2010/main" val="2871063290"/>
+      </p:ext>
+    </p:extLst>
+  </p:cSld>
+  <p:clrMapOvr>
+    <a:masterClrMapping/>
+  </p:clrMapOvr>
+  <p:timing>
+    <p:tnLst>
+      <p:par>
+        <p:cTn id="1" dur="indefinite" restart="never" nodeType="tmRoot">
+          <p:childTnLst>
+            <p:seq concurrent="1" nextAc="seek">
+              <p:cTn id="2" dur="indefinite" nodeType="mainSeq">
+                <p:childTnLst>
+                  <p:par>
+                    <p:cTn id="3" fill="hold">
+                      <p:stCondLst>
+                        <p:cond delay="indefinite"/>
+                      </p:stCondLst>
+                      <p:childTnLst>
+                        <p:par>
+                          <p:cTn id="4" fill="hold">
+                            <p:stCondLst>
+                              <p:cond delay="0"/>
+                            </p:stCondLst>
+                            <p:childTnLst>
+                              <p:par>
+                                <p:cTn id="5" presetID="10" presetClass="entr" presetSubtype="0" fill="hold" nodeType="clickEffect">
+                                  <p:stCondLst>
+                                    <p:cond delay="0"/>
+                                  </p:stCondLst>
+                                  <p:childTnLst>
+                                    <p:set>
+                                      <p:cBhvr>
+                                        <p:cTn id="6" dur="1" fill="hold">
+                                          <p:stCondLst>
+                                            <p:cond delay="0"/>
+                                          </p:stCondLst>
+                                        </p:cTn>
+                                        <p:tgtEl>
+                                          <p:spTgt spid="3">
+                                            <p:txEl>
+                                              <p:pRg st="0" end="0"/>
+                                            </p:txEl>
+                                          </p:spTgt>
+                                        </p:tgtEl>
+                                        <p:attrNameLst>
+                                          <p:attrName>style.visibility</p:attrName>
+                                        </p:attrNameLst>
+                                      </p:cBhvr>
+                                      <p:to>
+                                        <p:strVal val="visible"/>
+                                      </p:to>
+                                    </p:set>
+                                    <p:animEffect transition="in" filter="fade">
+                                      <p:cBhvr>
+                                        <p:cTn id="7" dur="500"/>
+                                        <p:tgtEl>
+                                          <p:spTgt spid="3">
+                                            <p:txEl>
+                                              <p:pRg st="0" end="0"/>
+                                            </p:txEl>
+                                          </p:spTgt>
+                                        </p:tgtEl>
+                                      </p:cBhvr>
+                                    </p:animEffect>
+                                  </p:childTnLst>
+                                </p:cTn>
+                              </p:par>
+                            </p:childTnLst>
+                          </p:cTn>
+                        </p:par>
+                      </p:childTnLst>
+                    </p:cTn>
+                  </p:par>
+                  <p:par>
+                    <p:cTn id="8" fill="hold">
+                      <p:stCondLst>
+                        <p:cond delay="indefinite"/>
+                      </p:stCondLst>
+                      <p:childTnLst>
+                        <p:par>
+                          <p:cTn id="9" fill="hold">
+                            <p:stCondLst>
+                              <p:cond delay="0"/>
+                            </p:stCondLst>
+                            <p:childTnLst>
+                              <p:par>
+                                <p:cTn id="10" presetID="10" presetClass="entr" presetSubtype="0" fill="hold" nodeType="clickEffect">
+                                  <p:stCondLst>
+                                    <p:cond delay="0"/>
+                                  </p:stCondLst>
+                                  <p:childTnLst>
+                                    <p:set>
+                                      <p:cBhvr>
+                                        <p:cTn id="11" dur="1" fill="hold">
+                                          <p:stCondLst>
+                                            <p:cond delay="0"/>
+                                          </p:stCondLst>
+                                        </p:cTn>
+                                        <p:tgtEl>
+                                          <p:spTgt spid="3">
+                                            <p:txEl>
+                                              <p:pRg st="1" end="1"/>
+                                            </p:txEl>
+                                          </p:spTgt>
+                                        </p:tgtEl>
+                                        <p:attrNameLst>
+                                          <p:attrName>style.visibility</p:attrName>
+                                        </p:attrNameLst>
+                                      </p:cBhvr>
+                                      <p:to>
+                                        <p:strVal val="visible"/>
+                                      </p:to>
+                                    </p:set>
+                                    <p:animEffect transition="in" filter="fade">
+                                      <p:cBhvr>
+                                        <p:cTn id="12" dur="500"/>
+                                        <p:tgtEl>
+                                          <p:spTgt spid="3">
+                                            <p:txEl>
+                                              <p:pRg st="1" end="1"/>
+                                            </p:txEl>
+                                          </p:spTgt>
+                                        </p:tgtEl>
+                                      </p:cBhvr>
+                                    </p:animEffect>
+                                  </p:childTnLst>
+                                </p:cTn>
+                              </p:par>
+                            </p:childTnLst>
+                          </p:cTn>
+                        </p:par>
+                      </p:childTnLst>
+                    </p:cTn>
+                  </p:par>
+                  <p:par>
+                    <p:cTn id="13" fill="hold">
+                      <p:stCondLst>
+                        <p:cond delay="indefinite"/>
+                      </p:stCondLst>
+                      <p:childTnLst>
+                        <p:par>
+                          <p:cTn id="14" fill="hold">
+                            <p:stCondLst>
+                              <p:cond delay="0"/>
+                            </p:stCondLst>
+                            <p:childTnLst>
+                              <p:par>
+                                <p:cTn id="15" presetID="10" presetClass="entr" presetSubtype="0" fill="hold" nodeType="clickEffect">
+                                  <p:stCondLst>
+                                    <p:cond delay="0"/>
+                                  </p:stCondLst>
+                                  <p:childTnLst>
+                                    <p:set>
+                                      <p:cBhvr>
+                                        <p:cTn id="16" dur="1" fill="hold">
+                                          <p:stCondLst>
+                                            <p:cond delay="0"/>
+                                          </p:stCondLst>
+                                        </p:cTn>
+                                        <p:tgtEl>
+                                          <p:spTgt spid="3">
+                                            <p:txEl>
+                                              <p:pRg st="2" end="2"/>
+                                            </p:txEl>
+                                          </p:spTgt>
+                                        </p:tgtEl>
+                                        <p:attrNameLst>
+                                          <p:attrName>style.visibility</p:attrName>
+                                        </p:attrNameLst>
+                                      </p:cBhvr>
+                                      <p:to>
+                                        <p:strVal val="visible"/>
+                                      </p:to>
+                                    </p:set>
+                                    <p:animEffect transition="in" filter="fade">
+                                      <p:cBhvr>
+                                        <p:cTn id="17" dur="500"/>
+                                        <p:tgtEl>
+                                          <p:spTgt spid="3">
+                                            <p:txEl>
+                                              <p:pRg st="2" end="2"/>
+                                            </p:txEl>
+                                          </p:spTgt>
+                                        </p:tgtEl>
+                                      </p:cBhvr>
+                                    </p:animEffect>
+                                  </p:childTnLst>
+                                </p:cTn>
+                              </p:par>
+                              <p:par>
+                                <p:cTn id="18" presetID="10" presetClass="entr" presetSubtype="0" fill="hold" nodeType="withEffect">
+                                  <p:stCondLst>
+                                    <p:cond delay="0"/>
+                                  </p:stCondLst>
+                                  <p:childTnLst>
+                                    <p:set>
+                                      <p:cBhvr>
+                                        <p:cTn id="19" dur="1" fill="hold">
+                                          <p:stCondLst>
+                                            <p:cond delay="0"/>
+                                          </p:stCondLst>
+                                        </p:cTn>
+                                        <p:tgtEl>
+                                          <p:spTgt spid="3">
+                                            <p:txEl>
+                                              <p:pRg st="3" end="3"/>
+                                            </p:txEl>
+                                          </p:spTgt>
+                                        </p:tgtEl>
+                                        <p:attrNameLst>
+                                          <p:attrName>style.visibility</p:attrName>
+                                        </p:attrNameLst>
+                                      </p:cBhvr>
+                                      <p:to>
+                                        <p:strVal val="visible"/>
+                                      </p:to>
+                                    </p:set>
+                                    <p:animEffect transition="in" filter="fade">
+                                      <p:cBhvr>
+                                        <p:cTn id="20" dur="500"/>
+                                        <p:tgtEl>
+                                          <p:spTgt spid="3">
+                                            <p:txEl>
+                                              <p:pRg st="3" end="3"/>
+                                            </p:txEl>
+                                          </p:spTgt>
+                                        </p:tgtEl>
+                                      </p:cBhvr>
+                                    </p:animEffect>
+                                  </p:childTnLst>
+                                </p:cTn>
+                              </p:par>
+                              <p:par>
+                                <p:cTn id="21" presetID="10" presetClass="entr" presetSubtype="0" fill="hold" nodeType="withEffect">
+                                  <p:stCondLst>
+                                    <p:cond delay="0"/>
+                                  </p:stCondLst>
+                                  <p:childTnLst>
+                                    <p:set>
+                                      <p:cBhvr>
+                                        <p:cTn id="22" dur="1" fill="hold">
+                                          <p:stCondLst>
+                                            <p:cond delay="0"/>
+                                          </p:stCondLst>
+                                        </p:cTn>
+                                        <p:tgtEl>
+                                          <p:spTgt spid="3">
+                                            <p:txEl>
+                                              <p:pRg st="4" end="4"/>
+                                            </p:txEl>
+                                          </p:spTgt>
+                                        </p:tgtEl>
+                                        <p:attrNameLst>
+                                          <p:attrName>style.visibility</p:attrName>
+                                        </p:attrNameLst>
+                                      </p:cBhvr>
+                                      <p:to>
+                                        <p:strVal val="visible"/>
+                                      </p:to>
+                                    </p:set>
+                                    <p:animEffect transition="in" filter="fade">
+                                      <p:cBhvr>
+                                        <p:cTn id="23" dur="500"/>
+                                        <p:tgtEl>
+                                          <p:spTgt spid="3">
+                                            <p:txEl>
+                                              <p:pRg st="4" end="4"/>
+                                            </p:txEl>
+                                          </p:spTgt>
+                                        </p:tgtEl>
+                                      </p:cBhvr>
+                                    </p:animEffect>
+                                  </p:childTnLst>
+                                </p:cTn>
+                              </p:par>
+                            </p:childTnLst>
+                          </p:cTn>
+                        </p:par>
+                      </p:childTnLst>
+                    </p:cTn>
+                  </p:par>
+                  <p:par>
+                    <p:cTn id="24" fill="hold">
+                      <p:stCondLst>
+                        <p:cond delay="indefinite"/>
+                      </p:stCondLst>
+                      <p:childTnLst>
+                        <p:par>
+                          <p:cTn id="25" fill="hold">
+                            <p:stCondLst>
+                              <p:cond delay="0"/>
+                            </p:stCondLst>
+                            <p:childTnLst>
+                              <p:par>
+                                <p:cTn id="26" presetID="10" presetClass="entr" presetSubtype="0" fill="hold" grpId="0" nodeType="clickEffect">
+                                  <p:stCondLst>
+                                    <p:cond delay="0"/>
+                                  </p:stCondLst>
+                                  <p:childTnLst>
+                                    <p:set>
+                                      <p:cBhvr>
+                                        <p:cTn id="27" dur="1" fill="hold">
+                                          <p:stCondLst>
+                                            <p:cond delay="0"/>
+                                          </p:stCondLst>
+                                        </p:cTn>
+                                        <p:tgtEl>
+                                          <p:spTgt spid="5"/>
+                                        </p:tgtEl>
+                                        <p:attrNameLst>
+                                          <p:attrName>style.visibility</p:attrName>
+                                        </p:attrNameLst>
+                                      </p:cBhvr>
+                                      <p:to>
+                                        <p:strVal val="visible"/>
+                                      </p:to>
+                                    </p:set>
+                                    <p:animEffect transition="in" filter="fade">
+                                      <p:cBhvr>
+                                        <p:cTn id="28" dur="500"/>
+                                        <p:tgtEl>
+                                          <p:spTgt spid="5"/>
+                                        </p:tgtEl>
+                                      </p:cBhvr>
+                                    </p:animEffect>
+                                  </p:childTnLst>
+                                </p:cTn>
+                              </p:par>
+                            </p:childTnLst>
+                          </p:cTn>
+                        </p:par>
+                      </p:childTnLst>
+                    </p:cTn>
+                  </p:par>
+                  <p:par>
+                    <p:cTn id="29" fill="hold">
+                      <p:stCondLst>
+                        <p:cond delay="indefinite"/>
+                      </p:stCondLst>
+                      <p:childTnLst>
+                        <p:par>
+                          <p:cTn id="30" fill="hold">
+                            <p:stCondLst>
+                              <p:cond delay="0"/>
+                            </p:stCondLst>
+                            <p:childTnLst>
+                              <p:par>
+                                <p:cTn id="31" presetID="10" presetClass="entr" presetSubtype="0" fill="hold" nodeType="clickEffect">
+                                  <p:stCondLst>
+                                    <p:cond delay="0"/>
+                                  </p:stCondLst>
+                                  <p:childTnLst>
+                                    <p:set>
+                                      <p:cBhvr>
+                                        <p:cTn id="32" dur="1" fill="hold">
+                                          <p:stCondLst>
+                                            <p:cond delay="0"/>
+                                          </p:stCondLst>
+                                        </p:cTn>
+                                        <p:tgtEl>
+                                          <p:spTgt spid="3">
+                                            <p:txEl>
+                                              <p:pRg st="5" end="5"/>
+                                            </p:txEl>
+                                          </p:spTgt>
+                                        </p:tgtEl>
+                                        <p:attrNameLst>
+                                          <p:attrName>style.visibility</p:attrName>
+                                        </p:attrNameLst>
+                                      </p:cBhvr>
+                                      <p:to>
+                                        <p:strVal val="visible"/>
+                                      </p:to>
+                                    </p:set>
+                                    <p:animEffect transition="in" filter="fade">
+                                      <p:cBhvr>
+                                        <p:cTn id="33" dur="500"/>
+                                        <p:tgtEl>
+                                          <p:spTgt spid="3">
+                                            <p:txEl>
+                                              <p:pRg st="5" end="5"/>
+                                            </p:txEl>
+                                          </p:spTgt>
+                                        </p:tgtEl>
+                                      </p:cBhvr>
+                                    </p:animEffect>
+                                  </p:childTnLst>
+                                </p:cTn>
+                              </p:par>
+                              <p:par>
+                                <p:cTn id="34" presetID="10" presetClass="entr" presetSubtype="0" fill="hold" nodeType="withEffect">
+                                  <p:stCondLst>
+                                    <p:cond delay="0"/>
+                                  </p:stCondLst>
+                                  <p:childTnLst>
+                                    <p:set>
+                                      <p:cBhvr>
+                                        <p:cTn id="35" dur="1" fill="hold">
+                                          <p:stCondLst>
+                                            <p:cond delay="0"/>
+                                          </p:stCondLst>
+                                        </p:cTn>
+                                        <p:tgtEl>
+                                          <p:spTgt spid="3">
+                                            <p:txEl>
+                                              <p:pRg st="6" end="6"/>
+                                            </p:txEl>
+                                          </p:spTgt>
+                                        </p:tgtEl>
+                                        <p:attrNameLst>
+                                          <p:attrName>style.visibility</p:attrName>
+                                        </p:attrNameLst>
+                                      </p:cBhvr>
+                                      <p:to>
+                                        <p:strVal val="visible"/>
+                                      </p:to>
+                                    </p:set>
+                                    <p:animEffect transition="in" filter="fade">
+                                      <p:cBhvr>
+                                        <p:cTn id="36" dur="500"/>
+                                        <p:tgtEl>
+                                          <p:spTgt spid="3">
+                                            <p:txEl>
+                                              <p:pRg st="6" end="6"/>
+                                            </p:txEl>
+                                          </p:spTgt>
+                                        </p:tgtEl>
+                                      </p:cBhvr>
+                                    </p:animEffect>
+                                  </p:childTnLst>
+                                </p:cTn>
+                              </p:par>
+                              <p:par>
+                                <p:cTn id="37" presetID="10" presetClass="entr" presetSubtype="0" fill="hold" nodeType="withEffect">
+                                  <p:stCondLst>
+                                    <p:cond delay="0"/>
+                                  </p:stCondLst>
+                                  <p:childTnLst>
+                                    <p:set>
+                                      <p:cBhvr>
+                                        <p:cTn id="38" dur="1" fill="hold">
+                                          <p:stCondLst>
+                                            <p:cond delay="0"/>
+                                          </p:stCondLst>
+                                        </p:cTn>
+                                        <p:tgtEl>
+                                          <p:spTgt spid="3">
+                                            <p:txEl>
+                                              <p:pRg st="7" end="7"/>
+                                            </p:txEl>
+                                          </p:spTgt>
+                                        </p:tgtEl>
+                                        <p:attrNameLst>
+                                          <p:attrName>style.visibility</p:attrName>
+                                        </p:attrNameLst>
+                                      </p:cBhvr>
+                                      <p:to>
+                                        <p:strVal val="visible"/>
+                                      </p:to>
+                                    </p:set>
+                                    <p:animEffect transition="in" filter="fade">
+                                      <p:cBhvr>
+                                        <p:cTn id="39" dur="500"/>
+                                        <p:tgtEl>
+                                          <p:spTgt spid="3">
+                                            <p:txEl>
+                                              <p:pRg st="7" end="7"/>
+                                            </p:txEl>
+                                          </p:spTgt>
+                                        </p:tgtEl>
+                                      </p:cBhvr>
+                                    </p:animEffect>
+                                  </p:childTnLst>
+                                </p:cTn>
+                              </p:par>
+                            </p:childTnLst>
+                          </p:cTn>
+                        </p:par>
+                      </p:childTnLst>
+                    </p:cTn>
+                  </p:par>
+                  <p:par>
+                    <p:cTn id="40" fill="hold">
+                      <p:stCondLst>
+                        <p:cond delay="indefinite"/>
+                      </p:stCondLst>
+                      <p:childTnLst>
+                        <p:par>
+                          <p:cTn id="41" fill="hold">
+                            <p:stCondLst>
+                              <p:cond delay="0"/>
+                            </p:stCondLst>
+                            <p:childTnLst>
+                              <p:par>
+                                <p:cTn id="42" presetID="10" presetClass="entr" presetSubtype="0" fill="hold" grpId="0" nodeType="clickEffect">
+                                  <p:stCondLst>
+                                    <p:cond delay="0"/>
+                                  </p:stCondLst>
+                                  <p:childTnLst>
+                                    <p:set>
+                                      <p:cBhvr>
+                                        <p:cTn id="43" dur="1" fill="hold">
+                                          <p:stCondLst>
+                                            <p:cond delay="0"/>
+                                          </p:stCondLst>
+                                        </p:cTn>
+                                        <p:tgtEl>
+                                          <p:spTgt spid="6"/>
+                                        </p:tgtEl>
+                                        <p:attrNameLst>
+                                          <p:attrName>style.visibility</p:attrName>
+                                        </p:attrNameLst>
+                                      </p:cBhvr>
+                                      <p:to>
+                                        <p:strVal val="visible"/>
+                                      </p:to>
+                                    </p:set>
+                                    <p:animEffect transition="in" filter="fade">
+                                      <p:cBhvr>
+                                        <p:cTn id="44" dur="500"/>
+                                        <p:tgtEl>
+                                          <p:spTgt spid="6"/>
+                                        </p:tgtEl>
+                                      </p:cBhvr>
+                                    </p:animEffect>
+                                  </p:childTnLst>
+                                </p:cTn>
+                              </p:par>
+                            </p:childTnLst>
+                          </p:cTn>
+                        </p:par>
+                      </p:childTnLst>
+                    </p:cTn>
+                  </p:par>
+                </p:childTnLst>
+              </p:cTn>
+              <p:prevCondLst>
+                <p:cond evt="onPrev" delay="0">
+                  <p:tgtEl>
+                    <p:sldTgt/>
+                  </p:tgtEl>
+                </p:cond>
+              </p:prevCondLst>
+              <p:nextCondLst>
+                <p:cond evt="onNext" delay="0">
+                  <p:tgtEl>
+                    <p:sldTgt/>
+                  </p:tgtEl>
+                </p:cond>
+              </p:nextCondLst>
+            </p:seq>
+          </p:childTnLst>
+        </p:cTn>
+      </p:par>
+    </p:tnLst>
+    <p:bldLst>
+      <p:bldP spid="5" grpId="0" animBg="1"/>
+      <p:bldP spid="6" grpId="0" animBg="1"/>
+    </p:bldLst>
+  </p:timing>
+</p:sld>
+</file>
+
+<file path=ppt/slides/slide31.xml><?xml version="1.0" encoding="utf-8"?>
+<p:sld xmlns:a="http://schemas.openxmlformats.org/drawingml/2006/main" xmlns:r="http://schemas.openxmlformats.org/officeDocument/2006/relationships" xmlns:p="http://schemas.openxmlformats.org/presentationml/2006/main">
+  <p:cSld>
+    <p:spTree>
+      <p:nvGrpSpPr>
+        <p:cNvPr id="1" name=""/>
+        <p:cNvGrpSpPr/>
+        <p:nvPr/>
+      </p:nvGrpSpPr>
+      <p:grpSpPr>
+        <a:xfrm>
+          <a:off x="0" y="0"/>
+          <a:ext cx="0" cy="0"/>
+          <a:chOff x="0" y="0"/>
+          <a:chExt cx="0" cy="0"/>
+        </a:xfrm>
+      </p:grpSpPr>
+      <p:sp>
+        <p:nvSpPr>
+          <p:cNvPr id="2" name="Title 1">
+            <a:extLst>
+              <a:ext uri="{FF2B5EF4-FFF2-40B4-BE49-F238E27FC236}">
+                <a16:creationId xmlns:a16="http://schemas.microsoft.com/office/drawing/2014/main" id="{91FE1F46-23C5-3AF3-BF1F-9A4C35FA6B5F}"/>
+              </a:ext>
+            </a:extLst>
+          </p:cNvPr>
+          <p:cNvSpPr>
+            <a:spLocks noGrp="1"/>
+          </p:cNvSpPr>
+          <p:nvPr>
+            <p:ph type="title"/>
+          </p:nvPr>
+        </p:nvSpPr>
+        <p:spPr/>
+        <p:txBody>
+          <a:bodyPr/>
+          <a:lstStyle/>
+          <a:p>
+            <a:r>
+              <a:rPr lang="en-US" altLang="zh-CN" dirty="0"/>
+              <a:t>2.10 Using the Math class</a:t>
+            </a:r>
+            <a:endParaRPr lang="zh-CN" altLang="en-US" dirty="0"/>
+          </a:p>
+        </p:txBody>
+      </p:sp>
+      <p:sp>
+        <p:nvSpPr>
+          <p:cNvPr id="3" name="Content Placeholder 2">
+            <a:extLst>
+              <a:ext uri="{FF2B5EF4-FFF2-40B4-BE49-F238E27FC236}">
+                <a16:creationId xmlns:a16="http://schemas.microsoft.com/office/drawing/2014/main" id="{DBA35AF3-21B9-7670-39A0-DAFB90CA7929}"/>
+              </a:ext>
+            </a:extLst>
+          </p:cNvPr>
+          <p:cNvSpPr>
+            <a:spLocks noGrp="1"/>
+          </p:cNvSpPr>
+          <p:nvPr>
+            <p:ph idx="1"/>
+          </p:nvPr>
+        </p:nvSpPr>
+        <p:spPr/>
+        <p:txBody>
+          <a:bodyPr/>
+          <a:lstStyle/>
+          <a:p>
+            <a:r>
+              <a:rPr lang="en-US" altLang="zh-CN" dirty="0"/>
+              <a:t>Non-static method: This is what we have learned so far. First create an object, then call the method on the object. For example:</a:t>
+            </a:r>
+          </a:p>
+          <a:p>
+            <a:pPr lvl="1"/>
+            <a:r>
+              <a:rPr lang="en-US" altLang="zh-CN" dirty="0"/>
+              <a:t>Rectangle r1=new Rectangle(3,4);</a:t>
+            </a:r>
+          </a:p>
+          <a:p>
+            <a:pPr lvl="1"/>
+            <a:r>
+              <a:rPr lang="en-US" altLang="zh-CN" dirty="0"/>
+              <a:t>int x=r1.getWidth();</a:t>
+            </a:r>
+          </a:p>
+          <a:p>
+            <a:r>
+              <a:rPr lang="en-US" altLang="zh-CN" dirty="0"/>
+              <a:t>Static method: Static methods are methods in Java that can be called without creating an object, you can call the method on</a:t>
+            </a:r>
+            <a:r>
+              <a:rPr lang="en-US" altLang="zh-CN" b="1" dirty="0"/>
+              <a:t> the class name</a:t>
+            </a:r>
+            <a:r>
+              <a:rPr lang="en-US" altLang="zh-CN" dirty="0"/>
+              <a:t>. </a:t>
+            </a:r>
+          </a:p>
+          <a:p>
+            <a:pPr lvl="1"/>
+            <a:r>
+              <a:rPr lang="en-US" altLang="zh-CN" dirty="0"/>
+              <a:t>double x=</a:t>
+            </a:r>
+            <a:r>
+              <a:rPr lang="en-US" altLang="zh-CN" dirty="0" err="1"/>
+              <a:t>Math.random</a:t>
+            </a:r>
+            <a:r>
+              <a:rPr lang="en-US" altLang="zh-CN" dirty="0"/>
+              <a:t>()</a:t>
+            </a:r>
+            <a:endParaRPr lang="zh-CN" altLang="en-US" dirty="0"/>
+          </a:p>
+        </p:txBody>
+      </p:sp>
+    </p:spTree>
+    <p:extLst>
+      <p:ext uri="{BB962C8B-B14F-4D97-AF65-F5344CB8AC3E}">
+        <p14:creationId xmlns:p14="http://schemas.microsoft.com/office/powerpoint/2010/main" val="3332351940"/>
+      </p:ext>
+    </p:extLst>
+  </p:cSld>
+  <p:clrMapOvr>
+    <a:masterClrMapping/>
+  </p:clrMapOvr>
+  <p:timing>
+    <p:tnLst>
+      <p:par>
+        <p:cTn id="1" dur="indefinite" restart="never" nodeType="tmRoot">
+          <p:childTnLst>
+            <p:seq concurrent="1" nextAc="seek">
+              <p:cTn id="2" dur="indefinite" nodeType="mainSeq">
+                <p:childTnLst>
+                  <p:par>
+                    <p:cTn id="3" fill="hold">
+                      <p:stCondLst>
+                        <p:cond delay="indefinite"/>
+                      </p:stCondLst>
+                      <p:childTnLst>
+                        <p:par>
+                          <p:cTn id="4" fill="hold">
+                            <p:stCondLst>
+                              <p:cond delay="0"/>
+                            </p:stCondLst>
+                            <p:childTnLst>
+                              <p:par>
+                                <p:cTn id="5" presetID="10" presetClass="entr" presetSubtype="0" fill="hold" nodeType="clickEffect">
+                                  <p:stCondLst>
+                                    <p:cond delay="0"/>
+                                  </p:stCondLst>
+                                  <p:childTnLst>
+                                    <p:set>
+                                      <p:cBhvr>
+                                        <p:cTn id="6" dur="1" fill="hold">
+                                          <p:stCondLst>
+                                            <p:cond delay="0"/>
+                                          </p:stCondLst>
+                                        </p:cTn>
+                                        <p:tgtEl>
+                                          <p:spTgt spid="3">
+                                            <p:txEl>
+                                              <p:pRg st="0" end="0"/>
+                                            </p:txEl>
+                                          </p:spTgt>
+                                        </p:tgtEl>
+                                        <p:attrNameLst>
+                                          <p:attrName>style.visibility</p:attrName>
+                                        </p:attrNameLst>
+                                      </p:cBhvr>
+                                      <p:to>
+                                        <p:strVal val="visible"/>
+                                      </p:to>
+                                    </p:set>
+                                    <p:animEffect transition="in" filter="fade">
+                                      <p:cBhvr>
+                                        <p:cTn id="7" dur="500"/>
+                                        <p:tgtEl>
+                                          <p:spTgt spid="3">
+                                            <p:txEl>
+                                              <p:pRg st="0" end="0"/>
+                                            </p:txEl>
+                                          </p:spTgt>
+                                        </p:tgtEl>
+                                      </p:cBhvr>
+                                    </p:animEffect>
+                                  </p:childTnLst>
+                                </p:cTn>
+                              </p:par>
+                            </p:childTnLst>
+                          </p:cTn>
+                        </p:par>
+                      </p:childTnLst>
+                    </p:cTn>
+                  </p:par>
+                  <p:par>
+                    <p:cTn id="8" fill="hold">
+                      <p:stCondLst>
+                        <p:cond delay="indefinite"/>
+                      </p:stCondLst>
+                      <p:childTnLst>
+                        <p:par>
+                          <p:cTn id="9" fill="hold">
+                            <p:stCondLst>
+                              <p:cond delay="0"/>
+                            </p:stCondLst>
+                            <p:childTnLst>
+                              <p:par>
+                                <p:cTn id="10" presetID="10" presetClass="entr" presetSubtype="0" fill="hold" nodeType="clickEffect">
+                                  <p:stCondLst>
+                                    <p:cond delay="0"/>
+                                  </p:stCondLst>
+                                  <p:childTnLst>
+                                    <p:set>
+                                      <p:cBhvr>
+                                        <p:cTn id="11" dur="1" fill="hold">
+                                          <p:stCondLst>
+                                            <p:cond delay="0"/>
+                                          </p:stCondLst>
+                                        </p:cTn>
+                                        <p:tgtEl>
+                                          <p:spTgt spid="3">
+                                            <p:txEl>
+                                              <p:pRg st="1" end="1"/>
+                                            </p:txEl>
+                                          </p:spTgt>
+                                        </p:tgtEl>
+                                        <p:attrNameLst>
+                                          <p:attrName>style.visibility</p:attrName>
+                                        </p:attrNameLst>
+                                      </p:cBhvr>
+                                      <p:to>
+                                        <p:strVal val="visible"/>
+                                      </p:to>
+                                    </p:set>
+                                    <p:animEffect transition="in" filter="fade">
+                                      <p:cBhvr>
+                                        <p:cTn id="12" dur="500"/>
+                                        <p:tgtEl>
+                                          <p:spTgt spid="3">
+                                            <p:txEl>
+                                              <p:pRg st="1" end="1"/>
+                                            </p:txEl>
+                                          </p:spTgt>
+                                        </p:tgtEl>
+                                      </p:cBhvr>
+                                    </p:animEffect>
+                                  </p:childTnLst>
+                                </p:cTn>
+                              </p:par>
+                              <p:par>
+                                <p:cTn id="13" presetID="10" presetClass="entr" presetSubtype="0" fill="hold" nodeType="withEffect">
+                                  <p:stCondLst>
+                                    <p:cond delay="0"/>
+                                  </p:stCondLst>
+                                  <p:childTnLst>
+                                    <p:set>
+                                      <p:cBhvr>
+                                        <p:cTn id="14" dur="1" fill="hold">
+                                          <p:stCondLst>
+                                            <p:cond delay="0"/>
+                                          </p:stCondLst>
+                                        </p:cTn>
+                                        <p:tgtEl>
+                                          <p:spTgt spid="3">
+                                            <p:txEl>
+                                              <p:pRg st="2" end="2"/>
+                                            </p:txEl>
+                                          </p:spTgt>
+                                        </p:tgtEl>
+                                        <p:attrNameLst>
+                                          <p:attrName>style.visibility</p:attrName>
+                                        </p:attrNameLst>
+                                      </p:cBhvr>
+                                      <p:to>
+                                        <p:strVal val="visible"/>
+                                      </p:to>
+                                    </p:set>
+                                    <p:animEffect transition="in" filter="fade">
+                                      <p:cBhvr>
+                                        <p:cTn id="15" dur="500"/>
+                                        <p:tgtEl>
+                                          <p:spTgt spid="3">
+                                            <p:txEl>
+                                              <p:pRg st="2" end="2"/>
+                                            </p:txEl>
+                                          </p:spTgt>
+                                        </p:tgtEl>
+                                      </p:cBhvr>
+                                    </p:animEffect>
+                                  </p:childTnLst>
+                                </p:cTn>
+                              </p:par>
+                            </p:childTnLst>
+                          </p:cTn>
+                        </p:par>
+                      </p:childTnLst>
+                    </p:cTn>
+                  </p:par>
+                  <p:par>
+                    <p:cTn id="16" fill="hold">
+                      <p:stCondLst>
+                        <p:cond delay="indefinite"/>
+                      </p:stCondLst>
+                      <p:childTnLst>
+                        <p:par>
+                          <p:cTn id="17" fill="hold">
+                            <p:stCondLst>
+                              <p:cond delay="0"/>
+                            </p:stCondLst>
+                            <p:childTnLst>
+                              <p:par>
+                                <p:cTn id="18" presetID="10" presetClass="entr" presetSubtype="0" fill="hold" nodeType="clickEffect">
+                                  <p:stCondLst>
+                                    <p:cond delay="0"/>
+                                  </p:stCondLst>
+                                  <p:childTnLst>
+                                    <p:set>
+                                      <p:cBhvr>
+                                        <p:cTn id="19" dur="1" fill="hold">
+                                          <p:stCondLst>
+                                            <p:cond delay="0"/>
+                                          </p:stCondLst>
+                                        </p:cTn>
+                                        <p:tgtEl>
+                                          <p:spTgt spid="3">
+                                            <p:txEl>
+                                              <p:pRg st="3" end="3"/>
+                                            </p:txEl>
+                                          </p:spTgt>
+                                        </p:tgtEl>
+                                        <p:attrNameLst>
+                                          <p:attrName>style.visibility</p:attrName>
+                                        </p:attrNameLst>
+                                      </p:cBhvr>
+                                      <p:to>
+                                        <p:strVal val="visible"/>
+                                      </p:to>
+                                    </p:set>
+                                    <p:animEffect transition="in" filter="fade">
+                                      <p:cBhvr>
+                                        <p:cTn id="20" dur="500"/>
+                                        <p:tgtEl>
+                                          <p:spTgt spid="3">
+                                            <p:txEl>
+                                              <p:pRg st="3" end="3"/>
+                                            </p:txEl>
+                                          </p:spTgt>
+                                        </p:tgtEl>
+                                      </p:cBhvr>
+                                    </p:animEffect>
+                                  </p:childTnLst>
+                                </p:cTn>
+                              </p:par>
+                            </p:childTnLst>
+                          </p:cTn>
+                        </p:par>
+                      </p:childTnLst>
+                    </p:cTn>
+                  </p:par>
+                  <p:par>
+                    <p:cTn id="21" fill="hold">
+                      <p:stCondLst>
+                        <p:cond delay="indefinite"/>
+                      </p:stCondLst>
+                      <p:childTnLst>
+                        <p:par>
+                          <p:cTn id="22" fill="hold">
+                            <p:stCondLst>
+                              <p:cond delay="0"/>
+                            </p:stCondLst>
+                            <p:childTnLst>
+                              <p:par>
+                                <p:cTn id="23" presetID="10" presetClass="entr" presetSubtype="0" fill="hold" nodeType="clickEffect">
+                                  <p:stCondLst>
+                                    <p:cond delay="0"/>
+                                  </p:stCondLst>
+                                  <p:childTnLst>
+                                    <p:set>
+                                      <p:cBhvr>
+                                        <p:cTn id="24" dur="1" fill="hold">
+                                          <p:stCondLst>
+                                            <p:cond delay="0"/>
+                                          </p:stCondLst>
+                                        </p:cTn>
+                                        <p:tgtEl>
+                                          <p:spTgt spid="3">
+                                            <p:txEl>
+                                              <p:pRg st="4" end="4"/>
+                                            </p:txEl>
+                                          </p:spTgt>
+                                        </p:tgtEl>
+                                        <p:attrNameLst>
+                                          <p:attrName>style.visibility</p:attrName>
+                                        </p:attrNameLst>
+                                      </p:cBhvr>
+                                      <p:to>
+                                        <p:strVal val="visible"/>
+                                      </p:to>
+                                    </p:set>
+                                    <p:animEffect transition="in" filter="fade">
+                                      <p:cBhvr>
+                                        <p:cTn id="25" dur="500"/>
+                                        <p:tgtEl>
+                                          <p:spTgt spid="3">
+                                            <p:txEl>
+                                              <p:pRg st="4" end="4"/>
+                                            </p:txEl>
+                                          </p:spTgt>
+                                        </p:tgtEl>
+                                      </p:cBhvr>
+                                    </p:animEffect>
+                                  </p:childTnLst>
+                                </p:cTn>
+                              </p:par>
+                            </p:childTnLst>
+                          </p:cTn>
+                        </p:par>
+                      </p:childTnLst>
+                    </p:cTn>
+                  </p:par>
+                </p:childTnLst>
+              </p:cTn>
+              <p:prevCondLst>
+                <p:cond evt="onPrev" delay="0">
+                  <p:tgtEl>
+                    <p:sldTgt/>
+                  </p:tgtEl>
+                </p:cond>
+              </p:prevCondLst>
+              <p:nextCondLst>
+                <p:cond evt="onNext" delay="0">
+                  <p:tgtEl>
+                    <p:sldTgt/>
+                  </p:tgtEl>
+                </p:cond>
+              </p:nextCondLst>
+            </p:seq>
+          </p:childTnLst>
+        </p:cTn>
+      </p:par>
+    </p:tnLst>
+  </p:timing>
+</p:sld>
+</file>
+
+<file path=ppt/slides/slide32.xml><?xml version="1.0" encoding="utf-8"?>
+<p:sld xmlns:a="http://schemas.openxmlformats.org/drawingml/2006/main" xmlns:r="http://schemas.openxmlformats.org/officeDocument/2006/relationships" xmlns:p="http://schemas.openxmlformats.org/presentationml/2006/main">
+  <p:cSld>
+    <p:spTree>
+      <p:nvGrpSpPr>
+        <p:cNvPr id="1" name=""/>
+        <p:cNvGrpSpPr/>
+        <p:nvPr/>
+      </p:nvGrpSpPr>
+      <p:grpSpPr>
+        <a:xfrm>
+          <a:off x="0" y="0"/>
+          <a:ext cx="0" cy="0"/>
+          <a:chOff x="0" y="0"/>
+          <a:chExt cx="0" cy="0"/>
+        </a:xfrm>
+      </p:grpSpPr>
+      <p:sp>
+        <p:nvSpPr>
+          <p:cNvPr id="2" name="Title 1">
+            <a:extLst>
+              <a:ext uri="{FF2B5EF4-FFF2-40B4-BE49-F238E27FC236}">
+                <a16:creationId xmlns:a16="http://schemas.microsoft.com/office/drawing/2014/main" id="{840E9451-D6C5-5EDC-E2A5-2173ABE082EF}"/>
+              </a:ext>
+            </a:extLst>
+          </p:cNvPr>
+          <p:cNvSpPr>
+            <a:spLocks noGrp="1"/>
+          </p:cNvSpPr>
+          <p:nvPr>
+            <p:ph type="title"/>
+          </p:nvPr>
+        </p:nvSpPr>
+        <p:spPr/>
+        <p:txBody>
+          <a:bodyPr/>
+          <a:lstStyle/>
+          <a:p>
+            <a:r>
+              <a:rPr lang="en-US" altLang="zh-CN" dirty="0"/>
+              <a:t>The Math class methods</a:t>
+            </a:r>
+            <a:endParaRPr lang="zh-CN" altLang="en-US" dirty="0"/>
+          </a:p>
+        </p:txBody>
+      </p:sp>
+      <p:sp>
+        <p:nvSpPr>
+          <p:cNvPr id="5" name="Content Placeholder 4">
+            <a:extLst>
+              <a:ext uri="{FF2B5EF4-FFF2-40B4-BE49-F238E27FC236}">
+                <a16:creationId xmlns:a16="http://schemas.microsoft.com/office/drawing/2014/main" id="{A4B94B22-F204-E434-14C2-6E5E9FE4F057}"/>
+              </a:ext>
+            </a:extLst>
+          </p:cNvPr>
+          <p:cNvSpPr>
+            <a:spLocks noGrp="1"/>
+          </p:cNvSpPr>
+          <p:nvPr>
+            <p:ph idx="1"/>
+          </p:nvPr>
+        </p:nvSpPr>
+        <p:spPr/>
+        <p:txBody>
+          <a:bodyPr/>
+          <a:lstStyle/>
+          <a:p>
+            <a:endParaRPr lang="zh-CN" altLang="en-US"/>
+          </a:p>
+        </p:txBody>
+      </p:sp>
+      <p:pic>
+        <p:nvPicPr>
+          <p:cNvPr id="7" name="Picture 6">
+            <a:extLst>
+              <a:ext uri="{FF2B5EF4-FFF2-40B4-BE49-F238E27FC236}">
+                <a16:creationId xmlns:a16="http://schemas.microsoft.com/office/drawing/2014/main" id="{47282E68-9E88-AF42-C34A-2B1E9EB3AC0F}"/>
+              </a:ext>
+            </a:extLst>
+          </p:cNvPr>
+          <p:cNvPicPr>
+            <a:picLocks noChangeAspect="1"/>
+          </p:cNvPicPr>
+          <p:nvPr/>
+        </p:nvPicPr>
+        <p:blipFill>
+          <a:blip r:embed="rId2"/>
+          <a:stretch>
+            <a:fillRect/>
+          </a:stretch>
+        </p:blipFill>
+        <p:spPr>
+          <a:xfrm>
+            <a:off x="735427" y="2095024"/>
+            <a:ext cx="10874692" cy="2667952"/>
+          </a:xfrm>
+          <a:prstGeom prst="rect">
+            <a:avLst/>
+          </a:prstGeom>
+        </p:spPr>
+      </p:pic>
+    </p:spTree>
+    <p:extLst>
+      <p:ext uri="{BB962C8B-B14F-4D97-AF65-F5344CB8AC3E}">
+        <p14:creationId xmlns:p14="http://schemas.microsoft.com/office/powerpoint/2010/main" val="4268919692"/>
+      </p:ext>
+    </p:extLst>
+  </p:cSld>
+  <p:clrMapOvr>
+    <a:masterClrMapping/>
+  </p:clrMapOvr>
+</p:sld>
+</file>
+
+<file path=ppt/slides/slide33.xml><?xml version="1.0" encoding="utf-8"?>
+<p:sld xmlns:a="http://schemas.openxmlformats.org/drawingml/2006/main" xmlns:r="http://schemas.openxmlformats.org/officeDocument/2006/relationships" xmlns:p="http://schemas.openxmlformats.org/presentationml/2006/main">
+  <p:cSld>
+    <p:spTree>
+      <p:nvGrpSpPr>
+        <p:cNvPr id="1" name=""/>
+        <p:cNvGrpSpPr/>
+        <p:nvPr/>
+      </p:nvGrpSpPr>
+      <p:grpSpPr>
+        <a:xfrm>
+          <a:off x="0" y="0"/>
+          <a:ext cx="0" cy="0"/>
+          <a:chOff x="0" y="0"/>
+          <a:chExt cx="0" cy="0"/>
+        </a:xfrm>
+      </p:grpSpPr>
+      <p:sp>
+        <p:nvSpPr>
+          <p:cNvPr id="2" name="Title 1">
+            <a:extLst>
+              <a:ext uri="{FF2B5EF4-FFF2-40B4-BE49-F238E27FC236}">
+                <a16:creationId xmlns:a16="http://schemas.microsoft.com/office/drawing/2014/main" id="{FA041B3E-BD68-7EF6-8955-08A0DDC36620}"/>
+              </a:ext>
+            </a:extLst>
+          </p:cNvPr>
+          <p:cNvSpPr>
+            <a:spLocks noGrp="1"/>
+          </p:cNvSpPr>
+          <p:nvPr>
+            <p:ph type="title"/>
+          </p:nvPr>
+        </p:nvSpPr>
+        <p:spPr/>
+        <p:txBody>
+          <a:bodyPr/>
+          <a:lstStyle/>
+          <a:p>
+            <a:r>
+              <a:rPr lang="en-US" altLang="zh-CN" dirty="0"/>
+              <a:t>Small Exercise: Generating a random int between 0 to 5</a:t>
+            </a:r>
+            <a:endParaRPr lang="zh-CN" altLang="en-US" dirty="0"/>
+          </a:p>
+        </p:txBody>
+      </p:sp>
+      <p:sp>
+        <p:nvSpPr>
+          <p:cNvPr id="3" name="Content Placeholder 2">
+            <a:extLst>
+              <a:ext uri="{FF2B5EF4-FFF2-40B4-BE49-F238E27FC236}">
+                <a16:creationId xmlns:a16="http://schemas.microsoft.com/office/drawing/2014/main" id="{AC5DB13C-8C4A-6735-C2EC-900D4854B56C}"/>
+              </a:ext>
+            </a:extLst>
+          </p:cNvPr>
+          <p:cNvSpPr>
+            <a:spLocks noGrp="1"/>
+          </p:cNvSpPr>
+          <p:nvPr>
+            <p:ph idx="1"/>
+          </p:nvPr>
+        </p:nvSpPr>
+        <p:spPr/>
+        <p:txBody>
+          <a:bodyPr/>
+          <a:lstStyle/>
+          <a:p>
+            <a:r>
+              <a:rPr lang="en-US" altLang="zh-CN" dirty="0" err="1"/>
+              <a:t>Math.random</a:t>
+            </a:r>
+            <a:r>
+              <a:rPr lang="en-US" altLang="zh-CN" dirty="0"/>
+              <a:t>() returns a double greater or equal to 0.0, but less than 1.0</a:t>
+            </a:r>
+          </a:p>
+          <a:p>
+            <a:r>
+              <a:rPr lang="en-US" altLang="zh-CN" dirty="0"/>
+              <a:t>What would be the range of values if we do </a:t>
+            </a:r>
+            <a:r>
+              <a:rPr lang="en-US" altLang="zh-CN" dirty="0" err="1"/>
+              <a:t>Math.random</a:t>
+            </a:r>
+            <a:r>
+              <a:rPr lang="en-US" altLang="zh-CN" dirty="0"/>
+              <a:t>() * 5?</a:t>
+            </a:r>
+          </a:p>
+          <a:p>
+            <a:r>
+              <a:rPr lang="en-US" altLang="zh-CN" dirty="0"/>
+              <a:t>How do we convert the value from a double to int?</a:t>
+            </a:r>
+          </a:p>
+          <a:p>
+            <a:r>
+              <a:rPr lang="en-US" altLang="zh-CN" dirty="0"/>
+              <a:t>Now how do we fix the off-by-one error?</a:t>
+            </a:r>
+          </a:p>
+          <a:p>
+            <a:r>
+              <a:rPr lang="en-US" altLang="zh-CN" dirty="0"/>
+              <a:t>Finally, the formula to generating an int from range 0 to x: </a:t>
+            </a:r>
+          </a:p>
+          <a:p>
+            <a:pPr lvl="1"/>
+            <a:r>
+              <a:rPr lang="en-US" altLang="zh-CN" dirty="0"/>
+              <a:t>(int) (</a:t>
+            </a:r>
+            <a:r>
+              <a:rPr lang="en-US" altLang="zh-CN" dirty="0" err="1"/>
+              <a:t>Math.random</a:t>
+            </a:r>
+            <a:r>
+              <a:rPr lang="en-US" altLang="zh-CN" dirty="0"/>
+              <a:t>() * (x+1))</a:t>
+            </a:r>
+          </a:p>
+        </p:txBody>
+      </p:sp>
+    </p:spTree>
+    <p:extLst>
+      <p:ext uri="{BB962C8B-B14F-4D97-AF65-F5344CB8AC3E}">
+        <p14:creationId xmlns:p14="http://schemas.microsoft.com/office/powerpoint/2010/main" val="1904656364"/>
+      </p:ext>
+    </p:extLst>
+  </p:cSld>
+  <p:clrMapOvr>
+    <a:masterClrMapping/>
+  </p:clrMapOvr>
+  <p:timing>
+    <p:tnLst>
+      <p:par>
+        <p:cTn id="1" dur="indefinite" restart="never" nodeType="tmRoot">
+          <p:childTnLst>
+            <p:seq concurrent="1" nextAc="seek">
+              <p:cTn id="2" dur="indefinite" nodeType="mainSeq">
+                <p:childTnLst>
+                  <p:par>
+                    <p:cTn id="3" fill="hold">
+                      <p:stCondLst>
+                        <p:cond delay="indefinite"/>
+                      </p:stCondLst>
+                      <p:childTnLst>
+                        <p:par>
+                          <p:cTn id="4" fill="hold">
+                            <p:stCondLst>
+                              <p:cond delay="0"/>
+                            </p:stCondLst>
+                            <p:childTnLst>
+                              <p:par>
+                                <p:cTn id="5" presetID="10" presetClass="entr" presetSubtype="0" fill="hold" nodeType="clickEffect">
+                                  <p:stCondLst>
+                                    <p:cond delay="0"/>
+                                  </p:stCondLst>
+                                  <p:childTnLst>
+                                    <p:set>
+                                      <p:cBhvr>
+                                        <p:cTn id="6" dur="1" fill="hold">
+                                          <p:stCondLst>
+                                            <p:cond delay="0"/>
+                                          </p:stCondLst>
+                                        </p:cTn>
+                                        <p:tgtEl>
+                                          <p:spTgt spid="3">
+                                            <p:txEl>
+                                              <p:pRg st="0" end="0"/>
+                                            </p:txEl>
+                                          </p:spTgt>
+                                        </p:tgtEl>
+                                        <p:attrNameLst>
+                                          <p:attrName>style.visibility</p:attrName>
+                                        </p:attrNameLst>
+                                      </p:cBhvr>
+                                      <p:to>
+                                        <p:strVal val="visible"/>
+                                      </p:to>
+                                    </p:set>
+                                    <p:animEffect transition="in" filter="fade">
+                                      <p:cBhvr>
+                                        <p:cTn id="7" dur="500"/>
+                                        <p:tgtEl>
+                                          <p:spTgt spid="3">
+                                            <p:txEl>
+                                              <p:pRg st="0" end="0"/>
+                                            </p:txEl>
+                                          </p:spTgt>
+                                        </p:tgtEl>
+                                      </p:cBhvr>
+                                    </p:animEffect>
+                                  </p:childTnLst>
+                                </p:cTn>
+                              </p:par>
+                            </p:childTnLst>
+                          </p:cTn>
+                        </p:par>
+                      </p:childTnLst>
+                    </p:cTn>
+                  </p:par>
+                  <p:par>
+                    <p:cTn id="8" fill="hold">
+                      <p:stCondLst>
+                        <p:cond delay="indefinite"/>
+                      </p:stCondLst>
+                      <p:childTnLst>
+                        <p:par>
+                          <p:cTn id="9" fill="hold">
+                            <p:stCondLst>
+                              <p:cond delay="0"/>
+                            </p:stCondLst>
+                            <p:childTnLst>
+                              <p:par>
+                                <p:cTn id="10" presetID="10" presetClass="entr" presetSubtype="0" fill="hold" nodeType="clickEffect">
+                                  <p:stCondLst>
+                                    <p:cond delay="0"/>
+                                  </p:stCondLst>
+                                  <p:childTnLst>
+                                    <p:set>
+                                      <p:cBhvr>
+                                        <p:cTn id="11" dur="1" fill="hold">
+                                          <p:stCondLst>
+                                            <p:cond delay="0"/>
+                                          </p:stCondLst>
+                                        </p:cTn>
+                                        <p:tgtEl>
+                                          <p:spTgt spid="3">
+                                            <p:txEl>
+                                              <p:pRg st="1" end="1"/>
+                                            </p:txEl>
+                                          </p:spTgt>
+                                        </p:tgtEl>
+                                        <p:attrNameLst>
+                                          <p:attrName>style.visibility</p:attrName>
+                                        </p:attrNameLst>
+                                      </p:cBhvr>
+                                      <p:to>
+                                        <p:strVal val="visible"/>
+                                      </p:to>
+                                    </p:set>
+                                    <p:animEffect transition="in" filter="fade">
+                                      <p:cBhvr>
+                                        <p:cTn id="12" dur="500"/>
+                                        <p:tgtEl>
+                                          <p:spTgt spid="3">
+                                            <p:txEl>
+                                              <p:pRg st="1" end="1"/>
+                                            </p:txEl>
+                                          </p:spTgt>
+                                        </p:tgtEl>
+                                      </p:cBhvr>
+                                    </p:animEffect>
+                                  </p:childTnLst>
+                                </p:cTn>
+                              </p:par>
+                            </p:childTnLst>
+                          </p:cTn>
+                        </p:par>
+                      </p:childTnLst>
+                    </p:cTn>
+                  </p:par>
+                  <p:par>
+                    <p:cTn id="13" fill="hold">
+                      <p:stCondLst>
+                        <p:cond delay="indefinite"/>
+                      </p:stCondLst>
+                      <p:childTnLst>
+                        <p:par>
+                          <p:cTn id="14" fill="hold">
+                            <p:stCondLst>
+                              <p:cond delay="0"/>
+                            </p:stCondLst>
+                            <p:childTnLst>
+                              <p:par>
+                                <p:cTn id="15" presetID="10" presetClass="entr" presetSubtype="0" fill="hold" nodeType="clickEffect">
+                                  <p:stCondLst>
+                                    <p:cond delay="0"/>
+                                  </p:stCondLst>
+                                  <p:childTnLst>
+                                    <p:set>
+                                      <p:cBhvr>
+                                        <p:cTn id="16" dur="1" fill="hold">
+                                          <p:stCondLst>
+                                            <p:cond delay="0"/>
+                                          </p:stCondLst>
+                                        </p:cTn>
+                                        <p:tgtEl>
+                                          <p:spTgt spid="3">
+                                            <p:txEl>
+                                              <p:pRg st="2" end="2"/>
+                                            </p:txEl>
+                                          </p:spTgt>
+                                        </p:tgtEl>
+                                        <p:attrNameLst>
+                                          <p:attrName>style.visibility</p:attrName>
+                                        </p:attrNameLst>
+                                      </p:cBhvr>
+                                      <p:to>
+                                        <p:strVal val="visible"/>
+                                      </p:to>
+                                    </p:set>
+                                    <p:animEffect transition="in" filter="fade">
+                                      <p:cBhvr>
+                                        <p:cTn id="17" dur="500"/>
+                                        <p:tgtEl>
+                                          <p:spTgt spid="3">
+                                            <p:txEl>
+                                              <p:pRg st="2" end="2"/>
+                                            </p:txEl>
+                                          </p:spTgt>
+                                        </p:tgtEl>
+                                      </p:cBhvr>
+                                    </p:animEffect>
+                                  </p:childTnLst>
+                                </p:cTn>
+                              </p:par>
+                            </p:childTnLst>
+                          </p:cTn>
+                        </p:par>
+                      </p:childTnLst>
+                    </p:cTn>
+                  </p:par>
+                  <p:par>
+                    <p:cTn id="18" fill="hold">
+                      <p:stCondLst>
+                        <p:cond delay="indefinite"/>
+                      </p:stCondLst>
+                      <p:childTnLst>
+                        <p:par>
+                          <p:cTn id="19" fill="hold">
+                            <p:stCondLst>
+                              <p:cond delay="0"/>
+                            </p:stCondLst>
+                            <p:childTnLst>
+                              <p:par>
+                                <p:cTn id="20" presetID="10" presetClass="entr" presetSubtype="0" fill="hold" nodeType="clickEffect">
+                                  <p:stCondLst>
+                                    <p:cond delay="0"/>
+                                  </p:stCondLst>
+                                  <p:childTnLst>
+                                    <p:set>
+                                      <p:cBhvr>
+                                        <p:cTn id="21" dur="1" fill="hold">
+                                          <p:stCondLst>
+                                            <p:cond delay="0"/>
+                                          </p:stCondLst>
+                                        </p:cTn>
+                                        <p:tgtEl>
+                                          <p:spTgt spid="3">
+                                            <p:txEl>
+                                              <p:pRg st="3" end="3"/>
+                                            </p:txEl>
+                                          </p:spTgt>
+                                        </p:tgtEl>
+                                        <p:attrNameLst>
+                                          <p:attrName>style.visibility</p:attrName>
+                                        </p:attrNameLst>
+                                      </p:cBhvr>
+                                      <p:to>
+                                        <p:strVal val="visible"/>
+                                      </p:to>
+                                    </p:set>
+                                    <p:animEffect transition="in" filter="fade">
+                                      <p:cBhvr>
+                                        <p:cTn id="22" dur="500"/>
+                                        <p:tgtEl>
+                                          <p:spTgt spid="3">
+                                            <p:txEl>
+                                              <p:pRg st="3" end="3"/>
+                                            </p:txEl>
+                                          </p:spTgt>
+                                        </p:tgtEl>
+                                      </p:cBhvr>
+                                    </p:animEffect>
+                                  </p:childTnLst>
+                                </p:cTn>
+                              </p:par>
+                            </p:childTnLst>
+                          </p:cTn>
+                        </p:par>
+                      </p:childTnLst>
+                    </p:cTn>
+                  </p:par>
+                  <p:par>
+                    <p:cTn id="23" fill="hold">
+                      <p:stCondLst>
+                        <p:cond delay="indefinite"/>
+                      </p:stCondLst>
+                      <p:childTnLst>
+                        <p:par>
+                          <p:cTn id="24" fill="hold">
+                            <p:stCondLst>
+                              <p:cond delay="0"/>
+                            </p:stCondLst>
+                            <p:childTnLst>
+                              <p:par>
+                                <p:cTn id="25" presetID="10" presetClass="entr" presetSubtype="0" fill="hold" nodeType="clickEffect">
+                                  <p:stCondLst>
+                                    <p:cond delay="0"/>
+                                  </p:stCondLst>
+                                  <p:childTnLst>
+                                    <p:set>
+                                      <p:cBhvr>
+                                        <p:cTn id="26" dur="1" fill="hold">
+                                          <p:stCondLst>
+                                            <p:cond delay="0"/>
+                                          </p:stCondLst>
+                                        </p:cTn>
+                                        <p:tgtEl>
+                                          <p:spTgt spid="3">
+                                            <p:txEl>
+                                              <p:pRg st="4" end="4"/>
+                                            </p:txEl>
+                                          </p:spTgt>
+                                        </p:tgtEl>
+                                        <p:attrNameLst>
+                                          <p:attrName>style.visibility</p:attrName>
+                                        </p:attrNameLst>
+                                      </p:cBhvr>
+                                      <p:to>
+                                        <p:strVal val="visible"/>
+                                      </p:to>
+                                    </p:set>
+                                    <p:animEffect transition="in" filter="fade">
+                                      <p:cBhvr>
+                                        <p:cTn id="27" dur="500"/>
+                                        <p:tgtEl>
+                                          <p:spTgt spid="3">
+                                            <p:txEl>
+                                              <p:pRg st="4" end="4"/>
+                                            </p:txEl>
+                                          </p:spTgt>
+                                        </p:tgtEl>
+                                      </p:cBhvr>
+                                    </p:animEffect>
+                                  </p:childTnLst>
+                                </p:cTn>
+                              </p:par>
+                              <p:par>
+                                <p:cTn id="28" presetID="10" presetClass="entr" presetSubtype="0" fill="hold" nodeType="withEffect">
+                                  <p:stCondLst>
+                                    <p:cond delay="0"/>
+                                  </p:stCondLst>
+                                  <p:childTnLst>
+                                    <p:set>
+                                      <p:cBhvr>
+                                        <p:cTn id="29" dur="1" fill="hold">
+                                          <p:stCondLst>
+                                            <p:cond delay="0"/>
+                                          </p:stCondLst>
+                                        </p:cTn>
+                                        <p:tgtEl>
+                                          <p:spTgt spid="3">
+                                            <p:txEl>
+                                              <p:pRg st="5" end="5"/>
+                                            </p:txEl>
+                                          </p:spTgt>
+                                        </p:tgtEl>
+                                        <p:attrNameLst>
+                                          <p:attrName>style.visibility</p:attrName>
+                                        </p:attrNameLst>
+                                      </p:cBhvr>
+                                      <p:to>
+                                        <p:strVal val="visible"/>
+                                      </p:to>
+                                    </p:set>
+                                    <p:animEffect transition="in" filter="fade">
+                                      <p:cBhvr>
+                                        <p:cTn id="30" dur="500"/>
+                                        <p:tgtEl>
+                                          <p:spTgt spid="3">
+                                            <p:txEl>
+                                              <p:pRg st="5" end="5"/>
+                                            </p:txEl>
+                                          </p:spTgt>
+                                        </p:tgtEl>
+                                      </p:cBhvr>
+                                    </p:animEffect>
+                                  </p:childTnLst>
+                                </p:cTn>
+                              </p:par>
+                            </p:childTnLst>
+                          </p:cTn>
+                        </p:par>
+                      </p:childTnLst>
+                    </p:cTn>
+                  </p:par>
+                </p:childTnLst>
+              </p:cTn>
+              <p:prevCondLst>
+                <p:cond evt="onPrev" delay="0">
+                  <p:tgtEl>
+                    <p:sldTgt/>
+                  </p:tgtEl>
+                </p:cond>
+              </p:prevCondLst>
+              <p:nextCondLst>
+                <p:cond evt="onNext" delay="0">
+                  <p:tgtEl>
+                    <p:sldTgt/>
+                  </p:tgtEl>
+                </p:cond>
+              </p:nextCondLst>
+            </p:seq>
+          </p:childTnLst>
+        </p:cTn>
+      </p:par>
+    </p:tnLst>
+  </p:timing>
+</p:sld>
+</file>
+
+<file path=ppt/slides/slide34.xml><?xml version="1.0" encoding="utf-8"?>
+<p:sld xmlns:a="http://schemas.openxmlformats.org/drawingml/2006/main" xmlns:r="http://schemas.openxmlformats.org/officeDocument/2006/relationships" xmlns:p="http://schemas.openxmlformats.org/presentationml/2006/main">
+  <p:cSld>
+    <p:spTree>
+      <p:nvGrpSpPr>
+        <p:cNvPr id="1" name=""/>
+        <p:cNvGrpSpPr/>
+        <p:nvPr/>
+      </p:nvGrpSpPr>
+      <p:grpSpPr>
+        <a:xfrm>
+          <a:off x="0" y="0"/>
+          <a:ext cx="0" cy="0"/>
+          <a:chOff x="0" y="0"/>
+          <a:chExt cx="0" cy="0"/>
+        </a:xfrm>
+      </p:grpSpPr>
+      <p:sp>
+        <p:nvSpPr>
+          <p:cNvPr id="2" name="Title 1">
+            <a:extLst>
+              <a:ext uri="{FF2B5EF4-FFF2-40B4-BE49-F238E27FC236}">
+                <a16:creationId xmlns:a16="http://schemas.microsoft.com/office/drawing/2014/main" id="{D16E5FDA-24B1-1545-D00D-1CD76E689393}"/>
+              </a:ext>
+            </a:extLst>
+          </p:cNvPr>
+          <p:cNvSpPr>
+            <a:spLocks noGrp="1"/>
+          </p:cNvSpPr>
+          <p:nvPr>
+            <p:ph type="title"/>
+          </p:nvPr>
+        </p:nvSpPr>
+        <p:spPr/>
+        <p:txBody>
+          <a:bodyPr>
+            <a:normAutofit fontScale="90000"/>
+          </a:bodyPr>
+          <a:lstStyle/>
+          <a:p>
+            <a:r>
+              <a:rPr lang="en-US" altLang="zh-CN" dirty="0"/>
+              <a:t>Now what if we want to generate int numbers from any range between x (min) and y (max) </a:t>
+            </a:r>
+            <a:endParaRPr lang="zh-CN" altLang="en-US" dirty="0"/>
+          </a:p>
+        </p:txBody>
+      </p:sp>
+      <p:sp>
+        <p:nvSpPr>
+          <p:cNvPr id="3" name="Content Placeholder 2">
+            <a:extLst>
+              <a:ext uri="{FF2B5EF4-FFF2-40B4-BE49-F238E27FC236}">
+                <a16:creationId xmlns:a16="http://schemas.microsoft.com/office/drawing/2014/main" id="{CD1339BB-9122-B248-6360-5E100F7453A2}"/>
+              </a:ext>
+            </a:extLst>
+          </p:cNvPr>
+          <p:cNvSpPr>
+            <a:spLocks noGrp="1"/>
+          </p:cNvSpPr>
+          <p:nvPr>
+            <p:ph idx="1"/>
+          </p:nvPr>
+        </p:nvSpPr>
+        <p:spPr/>
+        <p:txBody>
+          <a:bodyPr/>
+          <a:lstStyle/>
+          <a:p>
+            <a:r>
+              <a:rPr lang="sv-SE" altLang="zh-CN" dirty="0"/>
+              <a:t>(int)(Math.random() * (max - min + 1)) + min;</a:t>
+            </a:r>
+          </a:p>
+          <a:p>
+            <a:r>
+              <a:rPr lang="sv-SE" altLang="zh-CN" dirty="0"/>
+              <a:t>Try the example: [2,4] and see if it works</a:t>
+            </a:r>
+          </a:p>
+        </p:txBody>
+      </p:sp>
+    </p:spTree>
+    <p:extLst>
+      <p:ext uri="{BB962C8B-B14F-4D97-AF65-F5344CB8AC3E}">
+        <p14:creationId xmlns:p14="http://schemas.microsoft.com/office/powerpoint/2010/main" val="3359716900"/>
+      </p:ext>
+    </p:extLst>
+  </p:cSld>
+  <p:clrMapOvr>
+    <a:masterClrMapping/>
+  </p:clrMapOvr>
+  <p:timing>
+    <p:tnLst>
+      <p:par>
+        <p:cTn id="1" dur="indefinite" restart="never" nodeType="tmRoot">
+          <p:childTnLst>
+            <p:seq concurrent="1" nextAc="seek">
+              <p:cTn id="2" dur="indefinite" nodeType="mainSeq">
+                <p:childTnLst>
+                  <p:par>
+                    <p:cTn id="3" fill="hold">
+                      <p:stCondLst>
+                        <p:cond delay="indefinite"/>
+                      </p:stCondLst>
+                      <p:childTnLst>
+                        <p:par>
+                          <p:cTn id="4" fill="hold">
+                            <p:stCondLst>
+                              <p:cond delay="0"/>
+                            </p:stCondLst>
+                            <p:childTnLst>
+                              <p:par>
+                                <p:cTn id="5" presetID="10" presetClass="entr" presetSubtype="0" fill="hold" nodeType="clickEffect">
+                                  <p:stCondLst>
+                                    <p:cond delay="0"/>
+                                  </p:stCondLst>
+                                  <p:childTnLst>
+                                    <p:set>
+                                      <p:cBhvr>
+                                        <p:cTn id="6" dur="1" fill="hold">
+                                          <p:stCondLst>
+                                            <p:cond delay="0"/>
+                                          </p:stCondLst>
+                                        </p:cTn>
+                                        <p:tgtEl>
+                                          <p:spTgt spid="3">
+                                            <p:txEl>
+                                              <p:pRg st="0" end="0"/>
+                                            </p:txEl>
+                                          </p:spTgt>
+                                        </p:tgtEl>
+                                        <p:attrNameLst>
+                                          <p:attrName>style.visibility</p:attrName>
+                                        </p:attrNameLst>
+                                      </p:cBhvr>
+                                      <p:to>
+                                        <p:strVal val="visible"/>
+                                      </p:to>
+                                    </p:set>
+                                    <p:animEffect transition="in" filter="fade">
+                                      <p:cBhvr>
+                                        <p:cTn id="7" dur="500"/>
+                                        <p:tgtEl>
+                                          <p:spTgt spid="3">
+                                            <p:txEl>
+                                              <p:pRg st="0" end="0"/>
+                                            </p:txEl>
+                                          </p:spTgt>
+                                        </p:tgtEl>
+                                      </p:cBhvr>
+                                    </p:animEffect>
+                                  </p:childTnLst>
+                                </p:cTn>
+                              </p:par>
+                            </p:childTnLst>
+                          </p:cTn>
+                        </p:par>
+                      </p:childTnLst>
+                    </p:cTn>
+                  </p:par>
+                  <p:par>
+                    <p:cTn id="8" fill="hold">
+                      <p:stCondLst>
+                        <p:cond delay="indefinite"/>
+                      </p:stCondLst>
+                      <p:childTnLst>
+                        <p:par>
+                          <p:cTn id="9" fill="hold">
+                            <p:stCondLst>
+                              <p:cond delay="0"/>
+                            </p:stCondLst>
+                            <p:childTnLst>
+                              <p:par>
+                                <p:cTn id="10" presetID="10" presetClass="entr" presetSubtype="0" fill="hold" nodeType="clickEffect">
+                                  <p:stCondLst>
+                                    <p:cond delay="0"/>
+                                  </p:stCondLst>
+                                  <p:childTnLst>
+                                    <p:set>
+                                      <p:cBhvr>
+                                        <p:cTn id="11" dur="1" fill="hold">
+                                          <p:stCondLst>
+                                            <p:cond delay="0"/>
+                                          </p:stCondLst>
+                                        </p:cTn>
+                                        <p:tgtEl>
+                                          <p:spTgt spid="3">
+                                            <p:txEl>
+                                              <p:pRg st="1" end="1"/>
+                                            </p:txEl>
+                                          </p:spTgt>
+                                        </p:tgtEl>
+                                        <p:attrNameLst>
+                                          <p:attrName>style.visibility</p:attrName>
+                                        </p:attrNameLst>
+                                      </p:cBhvr>
+                                      <p:to>
+                                        <p:strVal val="visible"/>
+                                      </p:to>
+                                    </p:set>
+                                    <p:animEffect transition="in" filter="fade">
+                                      <p:cBhvr>
+                                        <p:cTn id="12" dur="500"/>
+                                        <p:tgtEl>
+                                          <p:spTgt spid="3">
+                                            <p:txEl>
+                                              <p:pRg st="1" end="1"/>
+                                            </p:txEl>
+                                          </p:spTgt>
+                                        </p:tgtEl>
+                                      </p:cBhvr>
+                                    </p:animEffect>
+                                  </p:childTnLst>
+                                </p:cTn>
+                              </p:par>
+                            </p:childTnLst>
+                          </p:cTn>
+                        </p:par>
+                      </p:childTnLst>
+                    </p:cTn>
+                  </p:par>
+                </p:childTnLst>
+              </p:cTn>
+              <p:prevCondLst>
+                <p:cond evt="onPrev" delay="0">
+                  <p:tgtEl>
+                    <p:sldTgt/>
+                  </p:tgtEl>
+                </p:cond>
+              </p:prevCondLst>
+              <p:nextCondLst>
+                <p:cond evt="onNext" delay="0">
+                  <p:tgtEl>
+                    <p:sldTgt/>
+                  </p:tgtEl>
+                </p:cond>
+              </p:nextCondLst>
+            </p:seq>
+          </p:childTnLst>
+        </p:cTn>
+      </p:par>
+    </p:tnLst>
+  </p:timing>
 </p:sld>
 </file>
 

--- a/files/APCSA/Unit2.pptx
+++ b/files/APCSA/Unit2.pptx
@@ -230,7 +230,7 @@
           <a:p>
             <a:fld id="{6D4F71AE-FACE-4DB9-B871-AC14F33069FF}" type="datetimeFigureOut">
               <a:rPr lang="zh-CN" altLang="en-US" smtClean="0"/>
-              <a:t>2025/10/10</a:t>
+              <a:t>2025/10/13</a:t>
             </a:fld>
             <a:endParaRPr lang="zh-CN" altLang="en-US"/>
           </a:p>
@@ -1369,7 +1369,7 @@
           <a:p>
             <a:fld id="{4122E7CC-E1EA-4EDB-A11B-9EBE68CA3B7D}" type="datetimeFigureOut">
               <a:rPr lang="zh-CN" altLang="en-US" smtClean="0"/>
-              <a:t>2025/10/10</a:t>
+              <a:t>2025/10/13</a:t>
             </a:fld>
             <a:endParaRPr lang="zh-CN" altLang="en-US"/>
           </a:p>
@@ -1569,7 +1569,7 @@
           <a:p>
             <a:fld id="{4122E7CC-E1EA-4EDB-A11B-9EBE68CA3B7D}" type="datetimeFigureOut">
               <a:rPr lang="zh-CN" altLang="en-US" smtClean="0"/>
-              <a:t>2025/10/10</a:t>
+              <a:t>2025/10/13</a:t>
             </a:fld>
             <a:endParaRPr lang="zh-CN" altLang="en-US"/>
           </a:p>
@@ -1779,7 +1779,7 @@
           <a:p>
             <a:fld id="{4122E7CC-E1EA-4EDB-A11B-9EBE68CA3B7D}" type="datetimeFigureOut">
               <a:rPr lang="zh-CN" altLang="en-US" smtClean="0"/>
-              <a:t>2025/10/10</a:t>
+              <a:t>2025/10/13</a:t>
             </a:fld>
             <a:endParaRPr lang="zh-CN" altLang="en-US"/>
           </a:p>
@@ -1979,7 +1979,7 @@
           <a:p>
             <a:fld id="{4122E7CC-E1EA-4EDB-A11B-9EBE68CA3B7D}" type="datetimeFigureOut">
               <a:rPr lang="zh-CN" altLang="en-US" smtClean="0"/>
-              <a:t>2025/10/10</a:t>
+              <a:t>2025/10/13</a:t>
             </a:fld>
             <a:endParaRPr lang="zh-CN" altLang="en-US"/>
           </a:p>
@@ -2255,7 +2255,7 @@
           <a:p>
             <a:fld id="{4122E7CC-E1EA-4EDB-A11B-9EBE68CA3B7D}" type="datetimeFigureOut">
               <a:rPr lang="zh-CN" altLang="en-US" smtClean="0"/>
-              <a:t>2025/10/10</a:t>
+              <a:t>2025/10/13</a:t>
             </a:fld>
             <a:endParaRPr lang="zh-CN" altLang="en-US"/>
           </a:p>
@@ -2523,7 +2523,7 @@
           <a:p>
             <a:fld id="{4122E7CC-E1EA-4EDB-A11B-9EBE68CA3B7D}" type="datetimeFigureOut">
               <a:rPr lang="zh-CN" altLang="en-US" smtClean="0"/>
-              <a:t>2025/10/10</a:t>
+              <a:t>2025/10/13</a:t>
             </a:fld>
             <a:endParaRPr lang="zh-CN" altLang="en-US"/>
           </a:p>
@@ -2938,7 +2938,7 @@
           <a:p>
             <a:fld id="{4122E7CC-E1EA-4EDB-A11B-9EBE68CA3B7D}" type="datetimeFigureOut">
               <a:rPr lang="zh-CN" altLang="en-US" smtClean="0"/>
-              <a:t>2025/10/10</a:t>
+              <a:t>2025/10/13</a:t>
             </a:fld>
             <a:endParaRPr lang="zh-CN" altLang="en-US"/>
           </a:p>
@@ -3080,7 +3080,7 @@
           <a:p>
             <a:fld id="{4122E7CC-E1EA-4EDB-A11B-9EBE68CA3B7D}" type="datetimeFigureOut">
               <a:rPr lang="zh-CN" altLang="en-US" smtClean="0"/>
-              <a:t>2025/10/10</a:t>
+              <a:t>2025/10/13</a:t>
             </a:fld>
             <a:endParaRPr lang="zh-CN" altLang="en-US"/>
           </a:p>
@@ -3193,7 +3193,7 @@
           <a:p>
             <a:fld id="{4122E7CC-E1EA-4EDB-A11B-9EBE68CA3B7D}" type="datetimeFigureOut">
               <a:rPr lang="zh-CN" altLang="en-US" smtClean="0"/>
-              <a:t>2025/10/10</a:t>
+              <a:t>2025/10/13</a:t>
             </a:fld>
             <a:endParaRPr lang="zh-CN" altLang="en-US"/>
           </a:p>
@@ -3506,7 +3506,7 @@
           <a:p>
             <a:fld id="{4122E7CC-E1EA-4EDB-A11B-9EBE68CA3B7D}" type="datetimeFigureOut">
               <a:rPr lang="zh-CN" altLang="en-US" smtClean="0"/>
-              <a:t>2025/10/10</a:t>
+              <a:t>2025/10/13</a:t>
             </a:fld>
             <a:endParaRPr lang="zh-CN" altLang="en-US"/>
           </a:p>
@@ -3795,7 +3795,7 @@
           <a:p>
             <a:fld id="{4122E7CC-E1EA-4EDB-A11B-9EBE68CA3B7D}" type="datetimeFigureOut">
               <a:rPr lang="zh-CN" altLang="en-US" smtClean="0"/>
-              <a:t>2025/10/10</a:t>
+              <a:t>2025/10/13</a:t>
             </a:fld>
             <a:endParaRPr lang="zh-CN" altLang="en-US"/>
           </a:p>
@@ -4038,7 +4038,7 @@
           <a:p>
             <a:fld id="{4122E7CC-E1EA-4EDB-A11B-9EBE68CA3B7D}" type="datetimeFigureOut">
               <a:rPr lang="zh-CN" altLang="en-US" smtClean="0"/>
-              <a:t>2025/10/10</a:t>
+              <a:t>2025/10/13</a:t>
             </a:fld>
             <a:endParaRPr lang="zh-CN" altLang="en-US"/>
           </a:p>
